--- a/examples/consulting-ai-transformation/run/slides/s05-investment-decision/deliverables/slide.pptx
+++ b/examples/consulting-ai-transformation/run/slides/s05-investment-decision/deliverables/slide.pptx
@@ -503,7 +503,10 @@
             <a:r>
               <a:rPr lang="en-US" dirty="0"/>
               <a:t>[SlidePoise sources]
-Generated target visual: /Users/henry/Codes/AI_slide_drafting/output/showcase-revisions/consulting-v3-authoring/slides/s05-investment-decision/work/accepted-slide.png</a:t>
+Generated target visual: /private/tmp/.slidepoise-rebuild-h51errnw/slides/s05-investment-decision/work/accepted-slide.png
+Canonical asset remix-play-circle-line: /Users/henry/Codes/AI_slide_drafting/examples/consulting-ai-transformation/run/work/icon-cache/play-circle/remix-play-circle-line.svg
+Canonical asset remix-pause-circle-line: /Users/henry/Codes/AI_slide_drafting/examples/consulting-ai-transformation/run/work/icon-cache/pause-circle/remix-pause-circle-line.svg
+Canonical asset remix-stop-circle-line: /Users/henry/Codes/AI_slide_drafting/examples/consulting-ai-transformation/run/work/icon-cache/stop-circle/remix-stop-circle-line.svg</a:t>
             </a:r>
             <a:endParaRPr lang="en-US" dirty="0"/>
           </a:p>
@@ -1223,14 +1226,14 @@
         </p:nvSpPr>
         <p:spPr>
           <a:xfrm>
-            <a:off x="304800" y="1454150"/>
-            <a:ext cx="11582400" cy="12700"/>
+            <a:off x="292100" y="1409700"/>
+            <a:ext cx="11607800" cy="12700"/>
           </a:xfrm>
           <a:prstGeom prst="rect">
             <a:avLst/>
           </a:prstGeom>
           <a:solidFill>
-            <a:srgbClr val="AAAAAA"/>
+            <a:srgbClr val="91969D"/>
           </a:solidFill>
           <a:ln w="12700">
             <a:solidFill>
@@ -1244,122 +1247,14 @@
       </p:sp>
       <p:sp>
         <p:nvSpPr>
-          <p:cNvPr id="3" name="capacity-divider"/>
+          <p:cNvPr id="3" name="capacity-panel"/>
           <p:cNvSpPr/>
           <p:nvPr/>
         </p:nvSpPr>
         <p:spPr>
           <a:xfrm>
-            <a:off x="247650" y="2927350"/>
-            <a:ext cx="2959100" cy="6350"/>
-          </a:xfrm>
-          <a:prstGeom prst="rect">
-            <a:avLst/>
-          </a:prstGeom>
-          <a:solidFill>
-            <a:srgbClr val="B5B5B5"/>
-          </a:solidFill>
-          <a:ln w="12700">
-            <a:solidFill>
-              <a:srgbClr val="FFFFFF">
-                <a:alpha val="0"/>
-              </a:srgbClr>
-            </a:solidFill>
-            <a:prstDash val="solid"/>
-          </a:ln>
-        </p:spPr>
-      </p:sp>
-      <p:sp>
-        <p:nvSpPr>
-          <p:cNvPr id="4" name="criteria-rule"/>
-          <p:cNvSpPr/>
-          <p:nvPr/>
-        </p:nvSpPr>
-        <p:spPr>
-          <a:xfrm>
-            <a:off x="241300" y="4260850"/>
-            <a:ext cx="11696700" cy="12700"/>
-          </a:xfrm>
-          <a:prstGeom prst="rect">
-            <a:avLst/>
-          </a:prstGeom>
-          <a:solidFill>
-            <a:srgbClr val="DFE3E6"/>
-          </a:solidFill>
-          <a:ln w="12700">
-            <a:solidFill>
-              <a:srgbClr val="FFFFFF">
-                <a:alpha val="0"/>
-              </a:srgbClr>
-            </a:solidFill>
-            <a:prstDash val="solid"/>
-          </a:ln>
-        </p:spPr>
-      </p:sp>
-      <p:sp>
-        <p:nvSpPr>
-          <p:cNvPr id="5" name="criteria-divider-1"/>
-          <p:cNvSpPr/>
-          <p:nvPr/>
-        </p:nvSpPr>
-        <p:spPr>
-          <a:xfrm>
-            <a:off x="3994150" y="4267200"/>
-            <a:ext cx="6350" cy="1054100"/>
-          </a:xfrm>
-          <a:prstGeom prst="rect">
-            <a:avLst/>
-          </a:prstGeom>
-          <a:solidFill>
-            <a:srgbClr val="DFE3E6"/>
-          </a:solidFill>
-          <a:ln w="12700">
-            <a:solidFill>
-              <a:srgbClr val="FFFFFF">
-                <a:alpha val="0"/>
-              </a:srgbClr>
-            </a:solidFill>
-            <a:prstDash val="solid"/>
-          </a:ln>
-        </p:spPr>
-      </p:sp>
-      <p:sp>
-        <p:nvSpPr>
-          <p:cNvPr id="6" name="criteria-divider-2"/>
-          <p:cNvSpPr/>
-          <p:nvPr/>
-        </p:nvSpPr>
-        <p:spPr>
-          <a:xfrm>
-            <a:off x="7905750" y="4267200"/>
-            <a:ext cx="6350" cy="1054100"/>
-          </a:xfrm>
-          <a:prstGeom prst="rect">
-            <a:avLst/>
-          </a:prstGeom>
-          <a:solidFill>
-            <a:srgbClr val="DFE3E6"/>
-          </a:solidFill>
-          <a:ln w="12700">
-            <a:solidFill>
-              <a:srgbClr val="FFFFFF">
-                <a:alpha val="0"/>
-              </a:srgbClr>
-            </a:solidFill>
-            <a:prstDash val="solid"/>
-          </a:ln>
-        </p:spPr>
-      </p:sp>
-      <p:sp>
-        <p:nvSpPr>
-          <p:cNvPr id="7" name="decision-band"/>
-          <p:cNvSpPr/>
-          <p:nvPr/>
-        </p:nvSpPr>
-        <p:spPr>
-          <a:xfrm>
-            <a:off x="304800" y="5441950"/>
-            <a:ext cx="11582400" cy="850900"/>
+            <a:off x="292100" y="1924050"/>
+            <a:ext cx="3460750" cy="2032000"/>
           </a:xfrm>
           <a:prstGeom prst="rect">
             <a:avLst/>
@@ -1379,14 +1274,149 @@
       </p:sp>
       <p:sp>
         <p:nvSpPr>
-          <p:cNvPr id="8" name="decision-accent"/>
+          <p:cNvPr id="4" name="capacity-divider"/>
           <p:cNvSpPr/>
           <p:nvPr/>
         </p:nvSpPr>
         <p:spPr>
           <a:xfrm>
-            <a:off x="304800" y="5441950"/>
-            <a:ext cx="50800" cy="850900"/>
+            <a:off x="412750" y="3238500"/>
+            <a:ext cx="3111500" cy="6350"/>
+          </a:xfrm>
+          <a:prstGeom prst="rect">
+            <a:avLst/>
+          </a:prstGeom>
+          <a:solidFill>
+            <a:srgbClr val="C1C4C7"/>
+          </a:solidFill>
+          <a:ln w="12700">
+            <a:solidFill>
+              <a:srgbClr val="FFFFFF">
+                <a:alpha val="0"/>
+              </a:srgbClr>
+            </a:solidFill>
+            <a:prstDash val="solid"/>
+          </a:ln>
+        </p:spPr>
+      </p:sp>
+      <p:sp>
+        <p:nvSpPr>
+          <p:cNvPr id="5" name="criterion-panel-go"/>
+          <p:cNvSpPr/>
+          <p:nvPr/>
+        </p:nvSpPr>
+        <p:spPr>
+          <a:xfrm>
+            <a:off x="292100" y="4406900"/>
+            <a:ext cx="3784600" cy="952500"/>
+          </a:xfrm>
+          <a:prstGeom prst="rect">
+            <a:avLst/>
+          </a:prstGeom>
+          <a:solidFill>
+            <a:srgbClr val="F5F7F8"/>
+          </a:solidFill>
+          <a:ln w="12700">
+            <a:solidFill>
+              <a:srgbClr val="FFFFFF">
+                <a:alpha val="0"/>
+              </a:srgbClr>
+            </a:solidFill>
+            <a:prstDash val="solid"/>
+          </a:ln>
+        </p:spPr>
+      </p:sp>
+      <p:sp>
+        <p:nvSpPr>
+          <p:cNvPr id="6" name="criterion-panel-hold"/>
+          <p:cNvSpPr/>
+          <p:nvPr/>
+        </p:nvSpPr>
+        <p:spPr>
+          <a:xfrm>
+            <a:off x="4159250" y="4406900"/>
+            <a:ext cx="3784600" cy="952500"/>
+          </a:xfrm>
+          <a:prstGeom prst="rect">
+            <a:avLst/>
+          </a:prstGeom>
+          <a:solidFill>
+            <a:srgbClr val="F5F7F8"/>
+          </a:solidFill>
+          <a:ln w="12700">
+            <a:solidFill>
+              <a:srgbClr val="FFFFFF">
+                <a:alpha val="0"/>
+              </a:srgbClr>
+            </a:solidFill>
+            <a:prstDash val="solid"/>
+          </a:ln>
+        </p:spPr>
+      </p:sp>
+      <p:sp>
+        <p:nvSpPr>
+          <p:cNvPr id="7" name="criterion-panel-stop"/>
+          <p:cNvSpPr/>
+          <p:nvPr/>
+        </p:nvSpPr>
+        <p:spPr>
+          <a:xfrm>
+            <a:off x="8026400" y="4406900"/>
+            <a:ext cx="3784600" cy="952500"/>
+          </a:xfrm>
+          <a:prstGeom prst="rect">
+            <a:avLst/>
+          </a:prstGeom>
+          <a:solidFill>
+            <a:srgbClr val="F5F7F8"/>
+          </a:solidFill>
+          <a:ln w="12700">
+            <a:solidFill>
+              <a:srgbClr val="FFFFFF">
+                <a:alpha val="0"/>
+              </a:srgbClr>
+            </a:solidFill>
+            <a:prstDash val="solid"/>
+          </a:ln>
+        </p:spPr>
+      </p:sp>
+      <p:sp>
+        <p:nvSpPr>
+          <p:cNvPr id="8" name="decision-band"/>
+          <p:cNvSpPr/>
+          <p:nvPr/>
+        </p:nvSpPr>
+        <p:spPr>
+          <a:xfrm>
+            <a:off x="292100" y="5708650"/>
+            <a:ext cx="11607800" cy="590550"/>
+          </a:xfrm>
+          <a:prstGeom prst="rect">
+            <a:avLst/>
+          </a:prstGeom>
+          <a:solidFill>
+            <a:srgbClr val="FFF5ED"/>
+          </a:solidFill>
+          <a:ln w="12700">
+            <a:solidFill>
+              <a:srgbClr val="FFFFFF">
+                <a:alpha val="0"/>
+              </a:srgbClr>
+            </a:solidFill>
+            <a:prstDash val="solid"/>
+          </a:ln>
+        </p:spPr>
+      </p:sp>
+      <p:sp>
+        <p:nvSpPr>
+          <p:cNvPr id="9" name="decision-accent"/>
+          <p:cNvSpPr/>
+          <p:nvPr/>
+        </p:nvSpPr>
+        <p:spPr>
+          <a:xfrm>
+            <a:off x="292100" y="5708650"/>
+            <a:ext cx="50800" cy="590550"/>
           </a:xfrm>
           <a:prstGeom prst="rect">
             <a:avLst/>
@@ -1406,7 +1436,7 @@
       </p:sp>
       <p:graphicFrame>
         <p:nvGraphicFramePr>
-          <p:cNvPr id="9" name="investment-table"/>
+          <p:cNvPr id="10" name="investment-table"/>
           <p:cNvGraphicFramePr>
             <a:graphicFrameLocks noGrp="1"/>
           </p:cNvGraphicFramePr>
@@ -1419,18 +1449,18 @@
           </p:nvPr>
         </p:nvGraphicFramePr>
         <p:xfrm>
-          <a:off x="4013200" y="1930400"/>
-          <a:ext cx="2393950" cy="1733550"/>
+          <a:off x="3937000" y="1924050"/>
+          <a:ext cx="3079750" cy="1727200"/>
         </p:xfrm>
         <a:graphic>
           <a:graphicData uri="http://schemas.openxmlformats.org/drawingml/2006/table">
             <a:tbl>
               <a:tblPr/>
               <a:tblGrid>
-                <a:gridCol w="1466850"/>
-                <a:gridCol w="927100"/>
+                <a:gridCol w="1809750"/>
+                <a:gridCol w="1270000"/>
               </a:tblGrid>
-              <a:tr h="342900">
+              <a:tr h="330200">
                 <a:tc>
                   <a:txBody>
                     <a:bodyPr>
@@ -1442,7 +1472,7 @@
                         <a:buNone/>
                       </a:pPr>
                       <a:r>
-                        <a:rPr lang="en-US" sz="1200" b="1" dirty="0">
+                        <a:rPr lang="en-US" sz="1100" b="1" dirty="0">
                           <a:solidFill>
                             <a:srgbClr val="FFFFFF"/>
                           </a:solidFill>
@@ -1452,17 +1482,17 @@
                         </a:rPr>
                         <a:t>Cost item</a:t>
                       </a:r>
-                      <a:endParaRPr lang="en-US" sz="1200" dirty="0">
+                      <a:endParaRPr lang="en-US" sz="1100" dirty="0">
                         <a:latin typeface="Arial" charset="0"/>
                         <a:ea typeface="Arial" charset="0"/>
                         <a:cs typeface="Arial" charset="0"/>
                       </a:endParaRPr>
                     </a:p>
                   </a:txBody>
-                  <a:tcPr marL="88900" marR="88900" marT="88900" marB="88900" anchor="ctr">
+                  <a:tcPr marL="101600" marR="101600" marT="38100" marB="38100" anchor="ctr">
                     <a:lnL w="6350" cap="flat" cmpd="sng" algn="ctr">
                       <a:solidFill>
-                        <a:srgbClr val="DFE3E6"/>
+                        <a:srgbClr val="C6C9CD"/>
                       </a:solidFill>
                       <a:prstDash val="solid"/>
                       <a:round/>
@@ -1471,7 +1501,7 @@
                     </a:lnL>
                     <a:lnR w="6350" cap="flat" cmpd="sng" algn="ctr">
                       <a:solidFill>
-                        <a:srgbClr val="DFE3E6"/>
+                        <a:srgbClr val="C6C9CD"/>
                       </a:solidFill>
                       <a:prstDash val="solid"/>
                       <a:round/>
@@ -1480,7 +1510,7 @@
                     </a:lnR>
                     <a:lnT w="6350" cap="flat" cmpd="sng" algn="ctr">
                       <a:solidFill>
-                        <a:srgbClr val="DFE3E6"/>
+                        <a:srgbClr val="C6C9CD"/>
                       </a:solidFill>
                       <a:prstDash val="solid"/>
                       <a:round/>
@@ -1489,7 +1519,7 @@
                     </a:lnT>
                     <a:lnB w="6350" cap="flat" cmpd="sng" algn="ctr">
                       <a:solidFill>
-                        <a:srgbClr val="DFE3E6"/>
+                        <a:srgbClr val="C6C9CD"/>
                       </a:solidFill>
                       <a:prstDash val="solid"/>
                       <a:round/>
@@ -1512,7 +1542,7 @@
                         <a:buNone/>
                       </a:pPr>
                       <a:r>
-                        <a:rPr lang="en-US" sz="1200" b="1" dirty="0">
+                        <a:rPr lang="en-US" sz="1100" b="1" dirty="0">
                           <a:solidFill>
                             <a:srgbClr val="FFFFFF"/>
                           </a:solidFill>
@@ -1522,17 +1552,17 @@
                         </a:rPr>
                         <a:t>Amount</a:t>
                       </a:r>
-                      <a:endParaRPr lang="en-US" sz="1200" dirty="0">
+                      <a:endParaRPr lang="en-US" sz="1100" dirty="0">
                         <a:latin typeface="Arial" charset="0"/>
                         <a:ea typeface="Arial" charset="0"/>
                         <a:cs typeface="Arial" charset="0"/>
                       </a:endParaRPr>
                     </a:p>
                   </a:txBody>
-                  <a:tcPr marL="88900" marR="88900" marT="88900" marB="88900" anchor="ctr">
+                  <a:tcPr marL="101600" marR="101600" marT="38100" marB="38100" anchor="ctr">
                     <a:lnL w="6350" cap="flat" cmpd="sng" algn="ctr">
                       <a:solidFill>
-                        <a:srgbClr val="DFE3E6"/>
+                        <a:srgbClr val="C6C9CD"/>
                       </a:solidFill>
                       <a:prstDash val="solid"/>
                       <a:round/>
@@ -1541,7 +1571,7 @@
                     </a:lnL>
                     <a:lnR w="6350" cap="flat" cmpd="sng" algn="ctr">
                       <a:solidFill>
-                        <a:srgbClr val="DFE3E6"/>
+                        <a:srgbClr val="C6C9CD"/>
                       </a:solidFill>
                       <a:prstDash val="solid"/>
                       <a:round/>
@@ -1550,7 +1580,7 @@
                     </a:lnR>
                     <a:lnT w="6350" cap="flat" cmpd="sng" algn="ctr">
                       <a:solidFill>
-                        <a:srgbClr val="DFE3E6"/>
+                        <a:srgbClr val="C6C9CD"/>
                       </a:solidFill>
                       <a:prstDash val="solid"/>
                       <a:round/>
@@ -1559,7 +1589,7 @@
                     </a:lnT>
                     <a:lnB w="6350" cap="flat" cmpd="sng" algn="ctr">
                       <a:solidFill>
-                        <a:srgbClr val="DFE3E6"/>
+                        <a:srgbClr val="C6C9CD"/>
                       </a:solidFill>
                       <a:prstDash val="solid"/>
                       <a:round/>
@@ -1572,7 +1602,7 @@
                   </a:tcPr>
                 </a:tc>
               </a:tr>
-              <a:tr h="330200">
+              <a:tr h="349250">
                 <a:tc>
                   <a:txBody>
                     <a:bodyPr>
@@ -1584,7 +1614,7 @@
                         <a:buNone/>
                       </a:pPr>
                       <a:r>
-                        <a:rPr lang="en-US" sz="1200" dirty="0">
+                        <a:rPr lang="en-US" sz="1100" b="1" dirty="0">
                           <a:solidFill>
                             <a:srgbClr val="000000"/>
                           </a:solidFill>
@@ -1594,17 +1624,17 @@
                         </a:rPr>
                         <a:t>Implementation</a:t>
                       </a:r>
-                      <a:endParaRPr lang="en-US" sz="1200" dirty="0">
+                      <a:endParaRPr lang="en-US" sz="1100" dirty="0">
                         <a:latin typeface="Arial" charset="0"/>
                         <a:ea typeface="Arial" charset="0"/>
                         <a:cs typeface="Arial" charset="0"/>
                       </a:endParaRPr>
                     </a:p>
                   </a:txBody>
-                  <a:tcPr marL="88900" marR="88900" marT="88900" marB="88900" anchor="ctr">
+                  <a:tcPr marL="101600" marR="101600" marT="38100" marB="38100" anchor="ctr">
                     <a:lnL w="6350" cap="flat" cmpd="sng" algn="ctr">
                       <a:solidFill>
-                        <a:srgbClr val="DFE3E6"/>
+                        <a:srgbClr val="C6C9CD"/>
                       </a:solidFill>
                       <a:prstDash val="solid"/>
                       <a:round/>
@@ -1613,7 +1643,7 @@
                     </a:lnL>
                     <a:lnR w="6350" cap="flat" cmpd="sng" algn="ctr">
                       <a:solidFill>
-                        <a:srgbClr val="DFE3E6"/>
+                        <a:srgbClr val="C6C9CD"/>
                       </a:solidFill>
                       <a:prstDash val="solid"/>
                       <a:round/>
@@ -1622,7 +1652,7 @@
                     </a:lnR>
                     <a:lnT w="6350" cap="flat" cmpd="sng" algn="ctr">
                       <a:solidFill>
-                        <a:srgbClr val="DFE3E6"/>
+                        <a:srgbClr val="C6C9CD"/>
                       </a:solidFill>
                       <a:prstDash val="solid"/>
                       <a:round/>
@@ -1631,7 +1661,7 @@
                     </a:lnT>
                     <a:lnB w="6350" cap="flat" cmpd="sng" algn="ctr">
                       <a:solidFill>
-                        <a:srgbClr val="DFE3E6"/>
+                        <a:srgbClr val="C6C9CD"/>
                       </a:solidFill>
                       <a:prstDash val="solid"/>
                       <a:round/>
@@ -1654,7 +1684,7 @@
                         <a:buNone/>
                       </a:pPr>
                       <a:r>
-                        <a:rPr lang="en-US" sz="1200" dirty="0">
+                        <a:rPr lang="en-US" sz="1100" dirty="0">
                           <a:solidFill>
                             <a:srgbClr val="000000"/>
                           </a:solidFill>
@@ -1664,17 +1694,17 @@
                         </a:rPr>
                         <a:t>$85k</a:t>
                       </a:r>
-                      <a:endParaRPr lang="en-US" sz="1200" dirty="0">
+                      <a:endParaRPr lang="en-US" sz="1100" dirty="0">
                         <a:latin typeface="Arial" charset="0"/>
                         <a:ea typeface="Arial" charset="0"/>
                         <a:cs typeface="Arial" charset="0"/>
                       </a:endParaRPr>
                     </a:p>
                   </a:txBody>
-                  <a:tcPr marL="88900" marR="88900" marT="88900" marB="88900" anchor="ctr">
+                  <a:tcPr marL="101600" marR="101600" marT="38100" marB="38100" anchor="ctr">
                     <a:lnL w="6350" cap="flat" cmpd="sng" algn="ctr">
                       <a:solidFill>
-                        <a:srgbClr val="DFE3E6"/>
+                        <a:srgbClr val="C6C9CD"/>
                       </a:solidFill>
                       <a:prstDash val="solid"/>
                       <a:round/>
@@ -1683,7 +1713,7 @@
                     </a:lnL>
                     <a:lnR w="6350" cap="flat" cmpd="sng" algn="ctr">
                       <a:solidFill>
-                        <a:srgbClr val="DFE3E6"/>
+                        <a:srgbClr val="C6C9CD"/>
                       </a:solidFill>
                       <a:prstDash val="solid"/>
                       <a:round/>
@@ -1692,7 +1722,7 @@
                     </a:lnR>
                     <a:lnT w="6350" cap="flat" cmpd="sng" algn="ctr">
                       <a:solidFill>
-                        <a:srgbClr val="DFE3E6"/>
+                        <a:srgbClr val="C6C9CD"/>
                       </a:solidFill>
                       <a:prstDash val="solid"/>
                       <a:round/>
@@ -1701,7 +1731,7 @@
                     </a:lnT>
                     <a:lnB w="6350" cap="flat" cmpd="sng" algn="ctr">
                       <a:solidFill>
-                        <a:srgbClr val="DFE3E6"/>
+                        <a:srgbClr val="C6C9CD"/>
                       </a:solidFill>
                       <a:prstDash val="solid"/>
                       <a:round/>
@@ -1714,7 +1744,7 @@
                   </a:tcPr>
                 </a:tc>
               </a:tr>
-              <a:tr h="336550">
+              <a:tr h="349250">
                 <a:tc>
                   <a:txBody>
                     <a:bodyPr>
@@ -1726,7 +1756,7 @@
                         <a:buNone/>
                       </a:pPr>
                       <a:r>
-                        <a:rPr lang="en-US" sz="1200" dirty="0">
+                        <a:rPr lang="en-US" sz="1100" b="1" dirty="0">
                           <a:solidFill>
                             <a:srgbClr val="000000"/>
                           </a:solidFill>
@@ -1736,17 +1766,17 @@
                         </a:rPr>
                         <a:t>Pilot included</a:t>
                       </a:r>
-                      <a:endParaRPr lang="en-US" sz="1200" dirty="0">
+                      <a:endParaRPr lang="en-US" sz="1100" dirty="0">
                         <a:latin typeface="Arial" charset="0"/>
                         <a:ea typeface="Arial" charset="0"/>
                         <a:cs typeface="Arial" charset="0"/>
                       </a:endParaRPr>
                     </a:p>
                   </a:txBody>
-                  <a:tcPr marL="88900" marR="88900" marT="88900" marB="88900" anchor="ctr">
+                  <a:tcPr marL="101600" marR="101600" marT="38100" marB="38100" anchor="ctr">
                     <a:lnL w="6350" cap="flat" cmpd="sng" algn="ctr">
                       <a:solidFill>
-                        <a:srgbClr val="DFE3E6"/>
+                        <a:srgbClr val="C6C9CD"/>
                       </a:solidFill>
                       <a:prstDash val="solid"/>
                       <a:round/>
@@ -1755,7 +1785,7 @@
                     </a:lnL>
                     <a:lnR w="6350" cap="flat" cmpd="sng" algn="ctr">
                       <a:solidFill>
-                        <a:srgbClr val="DFE3E6"/>
+                        <a:srgbClr val="C6C9CD"/>
                       </a:solidFill>
                       <a:prstDash val="solid"/>
                       <a:round/>
@@ -1764,7 +1794,7 @@
                     </a:lnR>
                     <a:lnT w="6350" cap="flat" cmpd="sng" algn="ctr">
                       <a:solidFill>
-                        <a:srgbClr val="DFE3E6"/>
+                        <a:srgbClr val="C6C9CD"/>
                       </a:solidFill>
                       <a:prstDash val="solid"/>
                       <a:round/>
@@ -1773,7 +1803,7 @@
                     </a:lnT>
                     <a:lnB w="6350" cap="flat" cmpd="sng" algn="ctr">
                       <a:solidFill>
-                        <a:srgbClr val="DFE3E6"/>
+                        <a:srgbClr val="C6C9CD"/>
                       </a:solidFill>
                       <a:prstDash val="solid"/>
                       <a:round/>
@@ -1796,7 +1826,7 @@
                         <a:buNone/>
                       </a:pPr>
                       <a:r>
-                        <a:rPr lang="en-US" sz="1200" dirty="0">
+                        <a:rPr lang="en-US" sz="1100" dirty="0">
                           <a:solidFill>
                             <a:srgbClr val="000000"/>
                           </a:solidFill>
@@ -1806,17 +1836,17 @@
                         </a:rPr>
                         <a:t>$25k</a:t>
                       </a:r>
-                      <a:endParaRPr lang="en-US" sz="1200" dirty="0">
+                      <a:endParaRPr lang="en-US" sz="1100" dirty="0">
                         <a:latin typeface="Arial" charset="0"/>
                         <a:ea typeface="Arial" charset="0"/>
                         <a:cs typeface="Arial" charset="0"/>
                       </a:endParaRPr>
                     </a:p>
                   </a:txBody>
-                  <a:tcPr marL="88900" marR="88900" marT="88900" marB="88900" anchor="ctr">
+                  <a:tcPr marL="101600" marR="101600" marT="38100" marB="38100" anchor="ctr">
                     <a:lnL w="6350" cap="flat" cmpd="sng" algn="ctr">
                       <a:solidFill>
-                        <a:srgbClr val="DFE3E6"/>
+                        <a:srgbClr val="C6C9CD"/>
                       </a:solidFill>
                       <a:prstDash val="solid"/>
                       <a:round/>
@@ -1825,7 +1855,7 @@
                     </a:lnL>
                     <a:lnR w="6350" cap="flat" cmpd="sng" algn="ctr">
                       <a:solidFill>
-                        <a:srgbClr val="DFE3E6"/>
+                        <a:srgbClr val="C6C9CD"/>
                       </a:solidFill>
                       <a:prstDash val="solid"/>
                       <a:round/>
@@ -1834,7 +1864,7 @@
                     </a:lnR>
                     <a:lnT w="6350" cap="flat" cmpd="sng" algn="ctr">
                       <a:solidFill>
-                        <a:srgbClr val="DFE3E6"/>
+                        <a:srgbClr val="C6C9CD"/>
                       </a:solidFill>
                       <a:prstDash val="solid"/>
                       <a:round/>
@@ -1843,7 +1873,7 @@
                     </a:lnT>
                     <a:lnB w="6350" cap="flat" cmpd="sng" algn="ctr">
                       <a:solidFill>
-                        <a:srgbClr val="DFE3E6"/>
+                        <a:srgbClr val="C6C9CD"/>
                       </a:solidFill>
                       <a:prstDash val="solid"/>
                       <a:round/>
@@ -1856,7 +1886,7 @@
                   </a:tcPr>
                 </a:tc>
               </a:tr>
-              <a:tr h="355600">
+              <a:tr h="349250">
                 <a:tc>
                   <a:txBody>
                     <a:bodyPr>
@@ -1868,7 +1898,7 @@
                         <a:buNone/>
                       </a:pPr>
                       <a:r>
-                        <a:rPr lang="en-US" sz="1200" dirty="0">
+                        <a:rPr lang="en-US" sz="1100" b="1" dirty="0">
                           <a:solidFill>
                             <a:srgbClr val="000000"/>
                           </a:solidFill>
@@ -1878,17 +1908,17 @@
                         </a:rPr>
                         <a:t>Annual operations</a:t>
                       </a:r>
-                      <a:endParaRPr lang="en-US" sz="1200" dirty="0">
+                      <a:endParaRPr lang="en-US" sz="1100" dirty="0">
                         <a:latin typeface="Arial" charset="0"/>
                         <a:ea typeface="Arial" charset="0"/>
                         <a:cs typeface="Arial" charset="0"/>
                       </a:endParaRPr>
                     </a:p>
                   </a:txBody>
-                  <a:tcPr marL="88900" marR="88900" marT="88900" marB="88900" anchor="ctr">
+                  <a:tcPr marL="101600" marR="101600" marT="38100" marB="38100" anchor="ctr">
                     <a:lnL w="6350" cap="flat" cmpd="sng" algn="ctr">
                       <a:solidFill>
-                        <a:srgbClr val="DFE3E6"/>
+                        <a:srgbClr val="C6C9CD"/>
                       </a:solidFill>
                       <a:prstDash val="solid"/>
                       <a:round/>
@@ -1897,7 +1927,7 @@
                     </a:lnL>
                     <a:lnR w="6350" cap="flat" cmpd="sng" algn="ctr">
                       <a:solidFill>
-                        <a:srgbClr val="DFE3E6"/>
+                        <a:srgbClr val="C6C9CD"/>
                       </a:solidFill>
                       <a:prstDash val="solid"/>
                       <a:round/>
@@ -1906,7 +1936,7 @@
                     </a:lnR>
                     <a:lnT w="6350" cap="flat" cmpd="sng" algn="ctr">
                       <a:solidFill>
-                        <a:srgbClr val="DFE3E6"/>
+                        <a:srgbClr val="C6C9CD"/>
                       </a:solidFill>
                       <a:prstDash val="solid"/>
                       <a:round/>
@@ -1915,7 +1945,7 @@
                     </a:lnT>
                     <a:lnB w="6350" cap="flat" cmpd="sng" algn="ctr">
                       <a:solidFill>
-                        <a:srgbClr val="DFE3E6"/>
+                        <a:srgbClr val="C6C9CD"/>
                       </a:solidFill>
                       <a:prstDash val="solid"/>
                       <a:round/>
@@ -1938,7 +1968,7 @@
                         <a:buNone/>
                       </a:pPr>
                       <a:r>
-                        <a:rPr lang="en-US" sz="1200" dirty="0">
+                        <a:rPr lang="en-US" sz="1100" dirty="0">
                           <a:solidFill>
                             <a:srgbClr val="000000"/>
                           </a:solidFill>
@@ -1948,17 +1978,17 @@
                         </a:rPr>
                         <a:t>$30k</a:t>
                       </a:r>
-                      <a:endParaRPr lang="en-US" sz="1200" dirty="0">
+                      <a:endParaRPr lang="en-US" sz="1100" dirty="0">
                         <a:latin typeface="Arial" charset="0"/>
                         <a:ea typeface="Arial" charset="0"/>
                         <a:cs typeface="Arial" charset="0"/>
                       </a:endParaRPr>
                     </a:p>
                   </a:txBody>
-                  <a:tcPr marL="88900" marR="88900" marT="88900" marB="88900" anchor="ctr">
+                  <a:tcPr marL="101600" marR="101600" marT="38100" marB="38100" anchor="ctr">
                     <a:lnL w="6350" cap="flat" cmpd="sng" algn="ctr">
                       <a:solidFill>
-                        <a:srgbClr val="DFE3E6"/>
+                        <a:srgbClr val="C6C9CD"/>
                       </a:solidFill>
                       <a:prstDash val="solid"/>
                       <a:round/>
@@ -1967,7 +1997,7 @@
                     </a:lnL>
                     <a:lnR w="6350" cap="flat" cmpd="sng" algn="ctr">
                       <a:solidFill>
-                        <a:srgbClr val="DFE3E6"/>
+                        <a:srgbClr val="C6C9CD"/>
                       </a:solidFill>
                       <a:prstDash val="solid"/>
                       <a:round/>
@@ -1976,7 +2006,7 @@
                     </a:lnR>
                     <a:lnT w="6350" cap="flat" cmpd="sng" algn="ctr">
                       <a:solidFill>
-                        <a:srgbClr val="DFE3E6"/>
+                        <a:srgbClr val="C6C9CD"/>
                       </a:solidFill>
                       <a:prstDash val="solid"/>
                       <a:round/>
@@ -1985,7 +2015,7 @@
                     </a:lnT>
                     <a:lnB w="6350" cap="flat" cmpd="sng" algn="ctr">
                       <a:solidFill>
-                        <a:srgbClr val="DFE3E6"/>
+                        <a:srgbClr val="C6C9CD"/>
                       </a:solidFill>
                       <a:prstDash val="solid"/>
                       <a:round/>
@@ -1998,7 +2028,7 @@
                   </a:tcPr>
                 </a:tc>
               </a:tr>
-              <a:tr h="368300">
+              <a:tr h="349250">
                 <a:tc>
                   <a:txBody>
                     <a:bodyPr>
@@ -2010,7 +2040,7 @@
                         <a:buNone/>
                       </a:pPr>
                       <a:r>
-                        <a:rPr lang="en-US" sz="1200" b="1" dirty="0">
+                        <a:rPr lang="en-US" sz="1100" b="1" dirty="0">
                           <a:solidFill>
                             <a:srgbClr val="000000"/>
                           </a:solidFill>
@@ -2020,17 +2050,17 @@
                         </a:rPr>
                         <a:t>First-year total</a:t>
                       </a:r>
-                      <a:endParaRPr lang="en-US" sz="1200" dirty="0">
+                      <a:endParaRPr lang="en-US" sz="1100" dirty="0">
                         <a:latin typeface="Arial" charset="0"/>
                         <a:ea typeface="Arial" charset="0"/>
                         <a:cs typeface="Arial" charset="0"/>
                       </a:endParaRPr>
                     </a:p>
                   </a:txBody>
-                  <a:tcPr marL="88900" marR="88900" marT="88900" marB="88900" anchor="ctr">
+                  <a:tcPr marL="101600" marR="101600" marT="38100" marB="38100" anchor="ctr">
                     <a:lnL w="6350" cap="flat" cmpd="sng" algn="ctr">
                       <a:solidFill>
-                        <a:srgbClr val="DFE3E6"/>
+                        <a:srgbClr val="C6C9CD"/>
                       </a:solidFill>
                       <a:prstDash val="solid"/>
                       <a:round/>
@@ -2039,7 +2069,7 @@
                     </a:lnL>
                     <a:lnR w="6350" cap="flat" cmpd="sng" algn="ctr">
                       <a:solidFill>
-                        <a:srgbClr val="DFE3E6"/>
+                        <a:srgbClr val="C6C9CD"/>
                       </a:solidFill>
                       <a:prstDash val="solid"/>
                       <a:round/>
@@ -2048,7 +2078,7 @@
                     </a:lnR>
                     <a:lnT w="6350" cap="flat" cmpd="sng" algn="ctr">
                       <a:solidFill>
-                        <a:srgbClr val="DFE3E6"/>
+                        <a:srgbClr val="C6C9CD"/>
                       </a:solidFill>
                       <a:prstDash val="solid"/>
                       <a:round/>
@@ -2057,7 +2087,7 @@
                     </a:lnT>
                     <a:lnB w="6350" cap="flat" cmpd="sng" algn="ctr">
                       <a:solidFill>
-                        <a:srgbClr val="DFE3E6"/>
+                        <a:srgbClr val="C6C9CD"/>
                       </a:solidFill>
                       <a:prstDash val="solid"/>
                       <a:round/>
@@ -2080,7 +2110,7 @@
                         <a:buNone/>
                       </a:pPr>
                       <a:r>
-                        <a:rPr lang="en-US" sz="1200" b="1" dirty="0">
+                        <a:rPr lang="en-US" sz="1100" dirty="0">
                           <a:solidFill>
                             <a:srgbClr val="000000"/>
                           </a:solidFill>
@@ -2090,17 +2120,17 @@
                         </a:rPr>
                         <a:t>$115k</a:t>
                       </a:r>
-                      <a:endParaRPr lang="en-US" sz="1200" dirty="0">
+                      <a:endParaRPr lang="en-US" sz="1100" dirty="0">
                         <a:latin typeface="Arial" charset="0"/>
                         <a:ea typeface="Arial" charset="0"/>
                         <a:cs typeface="Arial" charset="0"/>
                       </a:endParaRPr>
                     </a:p>
                   </a:txBody>
-                  <a:tcPr marL="88900" marR="88900" marT="88900" marB="88900" anchor="ctr">
+                  <a:tcPr marL="101600" marR="101600" marT="38100" marB="38100" anchor="ctr">
                     <a:lnL w="6350" cap="flat" cmpd="sng" algn="ctr">
                       <a:solidFill>
-                        <a:srgbClr val="DFE3E6"/>
+                        <a:srgbClr val="C6C9CD"/>
                       </a:solidFill>
                       <a:prstDash val="solid"/>
                       <a:round/>
@@ -2109,7 +2139,7 @@
                     </a:lnL>
                     <a:lnR w="6350" cap="flat" cmpd="sng" algn="ctr">
                       <a:solidFill>
-                        <a:srgbClr val="DFE3E6"/>
+                        <a:srgbClr val="C6C9CD"/>
                       </a:solidFill>
                       <a:prstDash val="solid"/>
                       <a:round/>
@@ -2118,7 +2148,7 @@
                     </a:lnR>
                     <a:lnT w="6350" cap="flat" cmpd="sng" algn="ctr">
                       <a:solidFill>
-                        <a:srgbClr val="DFE3E6"/>
+                        <a:srgbClr val="C6C9CD"/>
                       </a:solidFill>
                       <a:prstDash val="solid"/>
                       <a:round/>
@@ -2127,7 +2157,7 @@
                     </a:lnT>
                     <a:lnB w="6350" cap="flat" cmpd="sng" algn="ctr">
                       <a:solidFill>
-                        <a:srgbClr val="DFE3E6"/>
+                        <a:srgbClr val="C6C9CD"/>
                       </a:solidFill>
                       <a:prstDash val="solid"/>
                       <a:round/>
@@ -2146,7 +2176,7 @@
       </p:graphicFrame>
       <p:graphicFrame>
         <p:nvGraphicFramePr>
-          <p:cNvPr id="10" name="scenario-table"/>
+          <p:cNvPr id="11" name="sensitivity-table"/>
           <p:cNvGraphicFramePr>
             <a:graphicFrameLocks noGrp="1"/>
           </p:cNvGraphicFramePr>
@@ -2159,23 +2189,23 @@
           </p:nvPr>
         </p:nvGraphicFramePr>
         <p:xfrm>
-          <a:off x="6737350" y="1930400"/>
-          <a:ext cx="5200650" cy="1905000"/>
+          <a:off x="7207250" y="1924050"/>
+          <a:ext cx="4686300" cy="2032000"/>
         </p:xfrm>
         <a:graphic>
           <a:graphicData uri="http://schemas.openxmlformats.org/drawingml/2006/table">
             <a:tbl>
               <a:tblPr/>
               <a:tblGrid>
-                <a:gridCol w="800100"/>
-                <a:gridCol w="800100"/>
-                <a:gridCol w="558800"/>
-                <a:gridCol w="736600"/>
-                <a:gridCol w="762000"/>
-                <a:gridCol w="819150"/>
-                <a:gridCol w="723900"/>
+                <a:gridCol w="730250"/>
+                <a:gridCol w="666750"/>
+                <a:gridCol w="603250"/>
+                <a:gridCol w="666750"/>
+                <a:gridCol w="685800"/>
+                <a:gridCol w="711200"/>
+                <a:gridCol w="622300"/>
               </a:tblGrid>
-              <a:tr h="501650">
+              <a:tr h="558800">
                 <a:tc>
                   <a:txBody>
                     <a:bodyPr>
@@ -2187,7 +2217,7 @@
                         <a:buNone/>
                       </a:pPr>
                       <a:r>
-                        <a:rPr lang="en-US" sz="1200" b="1" dirty="0">
+                        <a:rPr lang="en-US" sz="900" b="1" dirty="0">
                           <a:solidFill>
                             <a:srgbClr val="FFFFFF"/>
                           </a:solidFill>
@@ -2197,17 +2227,17 @@
                         </a:rPr>
                         <a:t>Scenario</a:t>
                       </a:r>
-                      <a:endParaRPr lang="en-US" sz="1200" dirty="0">
+                      <a:endParaRPr lang="en-US" sz="900" dirty="0">
                         <a:latin typeface="Arial" charset="0"/>
                         <a:ea typeface="Arial" charset="0"/>
                         <a:cs typeface="Arial" charset="0"/>
                       </a:endParaRPr>
                     </a:p>
                   </a:txBody>
-                  <a:tcPr marL="38100" marR="38100" marT="38100" marB="38100" anchor="ctr">
+                  <a:tcPr marL="101600" marR="101600" marT="38100" marB="38100" anchor="ctr">
                     <a:lnL w="6350" cap="flat" cmpd="sng" algn="ctr">
                       <a:solidFill>
-                        <a:srgbClr val="DFE3E6"/>
+                        <a:srgbClr val="C6C9CD"/>
                       </a:solidFill>
                       <a:prstDash val="solid"/>
                       <a:round/>
@@ -2216,7 +2246,7 @@
                     </a:lnL>
                     <a:lnR w="6350" cap="flat" cmpd="sng" algn="ctr">
                       <a:solidFill>
-                        <a:srgbClr val="DFE3E6"/>
+                        <a:srgbClr val="C6C9CD"/>
                       </a:solidFill>
                       <a:prstDash val="solid"/>
                       <a:round/>
@@ -2225,7 +2255,7 @@
                     </a:lnR>
                     <a:lnT w="6350" cap="flat" cmpd="sng" algn="ctr">
                       <a:solidFill>
-                        <a:srgbClr val="DFE3E6"/>
+                        <a:srgbClr val="C6C9CD"/>
                       </a:solidFill>
                       <a:prstDash val="solid"/>
                       <a:round/>
@@ -2234,7 +2264,7 @@
                     </a:lnT>
                     <a:lnB w="6350" cap="flat" cmpd="sng" algn="ctr">
                       <a:solidFill>
-                        <a:srgbClr val="DFE3E6"/>
+                        <a:srgbClr val="C6C9CD"/>
                       </a:solidFill>
                       <a:prstDash val="solid"/>
                       <a:round/>
@@ -2257,7 +2287,7 @@
                         <a:buNone/>
                       </a:pPr>
                       <a:r>
-                        <a:rPr lang="en-US" sz="1200" b="1" dirty="0">
+                        <a:rPr lang="en-US" sz="900" b="1" dirty="0">
                           <a:solidFill>
                             <a:srgbClr val="FFFFFF"/>
                           </a:solidFill>
@@ -2267,17 +2297,17 @@
                         </a:rPr>
                         <a:t>Adoption</a:t>
                       </a:r>
-                      <a:endParaRPr lang="en-US" sz="1200" dirty="0">
+                      <a:endParaRPr lang="en-US" sz="900" dirty="0">
                         <a:latin typeface="Arial" charset="0"/>
                         <a:ea typeface="Arial" charset="0"/>
                         <a:cs typeface="Arial" charset="0"/>
                       </a:endParaRPr>
                     </a:p>
                   </a:txBody>
-                  <a:tcPr marL="38100" marR="38100" marT="38100" marB="38100" anchor="ctr">
+                  <a:tcPr marL="101600" marR="101600" marT="38100" marB="38100" anchor="ctr">
                     <a:lnL w="6350" cap="flat" cmpd="sng" algn="ctr">
                       <a:solidFill>
-                        <a:srgbClr val="DFE3E6"/>
+                        <a:srgbClr val="C6C9CD"/>
                       </a:solidFill>
                       <a:prstDash val="solid"/>
                       <a:round/>
@@ -2286,7 +2316,7 @@
                     </a:lnL>
                     <a:lnR w="6350" cap="flat" cmpd="sng" algn="ctr">
                       <a:solidFill>
-                        <a:srgbClr val="DFE3E6"/>
+                        <a:srgbClr val="C6C9CD"/>
                       </a:solidFill>
                       <a:prstDash val="solid"/>
                       <a:round/>
@@ -2295,7 +2325,7 @@
                     </a:lnR>
                     <a:lnT w="6350" cap="flat" cmpd="sng" algn="ctr">
                       <a:solidFill>
-                        <a:srgbClr val="DFE3E6"/>
+                        <a:srgbClr val="C6C9CD"/>
                       </a:solidFill>
                       <a:prstDash val="solid"/>
                       <a:round/>
@@ -2304,7 +2334,7 @@
                     </a:lnT>
                     <a:lnB w="6350" cap="flat" cmpd="sng" algn="ctr">
                       <a:solidFill>
-                        <a:srgbClr val="DFE3E6"/>
+                        <a:srgbClr val="C6C9CD"/>
                       </a:solidFill>
                       <a:prstDash val="solid"/>
                       <a:round/>
@@ -2327,7 +2357,7 @@
                         <a:buNone/>
                       </a:pPr>
                       <a:r>
-                        <a:rPr lang="en-US" sz="1200" b="1" dirty="0">
+                        <a:rPr lang="en-US" sz="900" b="1" dirty="0">
                           <a:solidFill>
                             <a:srgbClr val="FFFFFF"/>
                           </a:solidFill>
@@ -2335,40 +2365,19 @@
                           <a:ea typeface="Arial" pitchFamily="34" charset="-122"/>
                           <a:cs typeface="Arial" pitchFamily="34" charset="-120"/>
                         </a:rPr>
-                        <a:t>Time</a:t>
+                        <a:t>Time saved</a:t>
                       </a:r>
-                      <a:endParaRPr lang="en-US" sz="1200" dirty="0">
-                        <a:latin typeface="Arial" charset="0"/>
-                        <a:ea typeface="Arial" charset="0"/>
-                        <a:cs typeface="Arial" charset="0"/>
-                      </a:endParaRPr>
-                    </a:p>
-                    <a:p>
-                      <a:pPr algn="ctr" indent="0" marL="0">
-                        <a:buNone/>
-                      </a:pPr>
-                      <a:r>
-                        <a:rPr lang="en-US" sz="1200" b="1" dirty="0">
-                          <a:solidFill>
-                            <a:srgbClr val="FFFFFF"/>
-                          </a:solidFill>
-                          <a:latin typeface="Arial" pitchFamily="34" charset="0"/>
-                          <a:ea typeface="Arial" pitchFamily="34" charset="-122"/>
-                          <a:cs typeface="Arial" pitchFamily="34" charset="-120"/>
-                        </a:rPr>
-                        <a:t>saved</a:t>
-                      </a:r>
-                      <a:endParaRPr lang="en-US" sz="1200" dirty="0">
+                      <a:endParaRPr lang="en-US" sz="900" dirty="0">
                         <a:latin typeface="Arial" charset="0"/>
                         <a:ea typeface="Arial" charset="0"/>
                         <a:cs typeface="Arial" charset="0"/>
                       </a:endParaRPr>
                     </a:p>
                   </a:txBody>
-                  <a:tcPr marL="38100" marR="38100" marT="38100" marB="38100" anchor="ctr">
+                  <a:tcPr marL="101600" marR="101600" marT="38100" marB="38100" anchor="ctr">
                     <a:lnL w="6350" cap="flat" cmpd="sng" algn="ctr">
                       <a:solidFill>
-                        <a:srgbClr val="DFE3E6"/>
+                        <a:srgbClr val="C6C9CD"/>
                       </a:solidFill>
                       <a:prstDash val="solid"/>
                       <a:round/>
@@ -2377,7 +2386,7 @@
                     </a:lnL>
                     <a:lnR w="6350" cap="flat" cmpd="sng" algn="ctr">
                       <a:solidFill>
-                        <a:srgbClr val="DFE3E6"/>
+                        <a:srgbClr val="C6C9CD"/>
                       </a:solidFill>
                       <a:prstDash val="solid"/>
                       <a:round/>
@@ -2386,7 +2395,7 @@
                     </a:lnR>
                     <a:lnT w="6350" cap="flat" cmpd="sng" algn="ctr">
                       <a:solidFill>
-                        <a:srgbClr val="DFE3E6"/>
+                        <a:srgbClr val="C6C9CD"/>
                       </a:solidFill>
                       <a:prstDash val="solid"/>
                       <a:round/>
@@ -2395,7 +2404,7 @@
                     </a:lnT>
                     <a:lnB w="6350" cap="flat" cmpd="sng" algn="ctr">
                       <a:solidFill>
-                        <a:srgbClr val="DFE3E6"/>
+                        <a:srgbClr val="C6C9CD"/>
                       </a:solidFill>
                       <a:prstDash val="solid"/>
                       <a:round/>
@@ -2418,7 +2427,7 @@
                         <a:buNone/>
                       </a:pPr>
                       <a:r>
-                        <a:rPr lang="en-US" sz="1200" b="1" dirty="0">
+                        <a:rPr lang="en-US" sz="900" b="1" dirty="0">
                           <a:solidFill>
                             <a:srgbClr val="FFFFFF"/>
                           </a:solidFill>
@@ -2428,17 +2437,17 @@
                         </a:rPr>
                         <a:t>Annual h</a:t>
                       </a:r>
-                      <a:endParaRPr lang="en-US" sz="1200" dirty="0">
+                      <a:endParaRPr lang="en-US" sz="900" dirty="0">
                         <a:latin typeface="Arial" charset="0"/>
                         <a:ea typeface="Arial" charset="0"/>
                         <a:cs typeface="Arial" charset="0"/>
                       </a:endParaRPr>
                     </a:p>
                   </a:txBody>
-                  <a:tcPr marL="38100" marR="38100" marT="38100" marB="38100" anchor="ctr">
+                  <a:tcPr marL="101600" marR="101600" marT="38100" marB="38100" anchor="ctr">
                     <a:lnL w="6350" cap="flat" cmpd="sng" algn="ctr">
                       <a:solidFill>
-                        <a:srgbClr val="DFE3E6"/>
+                        <a:srgbClr val="C6C9CD"/>
                       </a:solidFill>
                       <a:prstDash val="solid"/>
                       <a:round/>
@@ -2447,7 +2456,7 @@
                     </a:lnL>
                     <a:lnR w="6350" cap="flat" cmpd="sng" algn="ctr">
                       <a:solidFill>
-                        <a:srgbClr val="DFE3E6"/>
+                        <a:srgbClr val="C6C9CD"/>
                       </a:solidFill>
                       <a:prstDash val="solid"/>
                       <a:round/>
@@ -2456,7 +2465,7 @@
                     </a:lnR>
                     <a:lnT w="6350" cap="flat" cmpd="sng" algn="ctr">
                       <a:solidFill>
-                        <a:srgbClr val="DFE3E6"/>
+                        <a:srgbClr val="C6C9CD"/>
                       </a:solidFill>
                       <a:prstDash val="solid"/>
                       <a:round/>
@@ -2465,7 +2474,7 @@
                     </a:lnT>
                     <a:lnB w="6350" cap="flat" cmpd="sng" algn="ctr">
                       <a:solidFill>
-                        <a:srgbClr val="DFE3E6"/>
+                        <a:srgbClr val="C6C9CD"/>
                       </a:solidFill>
                       <a:prstDash val="solid"/>
                       <a:round/>
@@ -2488,7 +2497,7 @@
                         <a:buNone/>
                       </a:pPr>
                       <a:r>
-                        <a:rPr lang="en-US" sz="1200" b="1" dirty="0">
+                        <a:rPr lang="en-US" sz="900" b="1" dirty="0">
                           <a:solidFill>
                             <a:srgbClr val="FFFFFF"/>
                           </a:solidFill>
@@ -2496,40 +2505,19 @@
                           <a:ea typeface="Arial" pitchFamily="34" charset="-122"/>
                           <a:cs typeface="Arial" pitchFamily="34" charset="-120"/>
                         </a:rPr>
-                        <a:t>Annual</a:t>
+                        <a:t>Annual capacity</a:t>
                       </a:r>
-                      <a:endParaRPr lang="en-US" sz="1200" dirty="0">
-                        <a:latin typeface="Arial" charset="0"/>
-                        <a:ea typeface="Arial" charset="0"/>
-                        <a:cs typeface="Arial" charset="0"/>
-                      </a:endParaRPr>
-                    </a:p>
-                    <a:p>
-                      <a:pPr algn="ctr" indent="0" marL="0">
-                        <a:buNone/>
-                      </a:pPr>
-                      <a:r>
-                        <a:rPr lang="en-US" sz="1200" b="1" dirty="0">
-                          <a:solidFill>
-                            <a:srgbClr val="FFFFFF"/>
-                          </a:solidFill>
-                          <a:latin typeface="Arial" pitchFamily="34" charset="0"/>
-                          <a:ea typeface="Arial" pitchFamily="34" charset="-122"/>
-                          <a:cs typeface="Arial" pitchFamily="34" charset="-120"/>
-                        </a:rPr>
-                        <a:t>capacity</a:t>
-                      </a:r>
-                      <a:endParaRPr lang="en-US" sz="1200" dirty="0">
+                      <a:endParaRPr lang="en-US" sz="900" dirty="0">
                         <a:latin typeface="Arial" charset="0"/>
                         <a:ea typeface="Arial" charset="0"/>
                         <a:cs typeface="Arial" charset="0"/>
                       </a:endParaRPr>
                     </a:p>
                   </a:txBody>
-                  <a:tcPr marL="38100" marR="38100" marT="38100" marB="38100" anchor="ctr">
+                  <a:tcPr marL="101600" marR="101600" marT="38100" marB="38100" anchor="ctr">
                     <a:lnL w="6350" cap="flat" cmpd="sng" algn="ctr">
                       <a:solidFill>
-                        <a:srgbClr val="DFE3E6"/>
+                        <a:srgbClr val="C6C9CD"/>
                       </a:solidFill>
                       <a:prstDash val="solid"/>
                       <a:round/>
@@ -2538,7 +2526,7 @@
                     </a:lnL>
                     <a:lnR w="6350" cap="flat" cmpd="sng" algn="ctr">
                       <a:solidFill>
-                        <a:srgbClr val="DFE3E6"/>
+                        <a:srgbClr val="C6C9CD"/>
                       </a:solidFill>
                       <a:prstDash val="solid"/>
                       <a:round/>
@@ -2547,7 +2535,7 @@
                     </a:lnR>
                     <a:lnT w="6350" cap="flat" cmpd="sng" algn="ctr">
                       <a:solidFill>
-                        <a:srgbClr val="DFE3E6"/>
+                        <a:srgbClr val="C6C9CD"/>
                       </a:solidFill>
                       <a:prstDash val="solid"/>
                       <a:round/>
@@ -2556,7 +2544,7 @@
                     </a:lnT>
                     <a:lnB w="6350" cap="flat" cmpd="sng" algn="ctr">
                       <a:solidFill>
-                        <a:srgbClr val="DFE3E6"/>
+                        <a:srgbClr val="C6C9CD"/>
                       </a:solidFill>
                       <a:prstDash val="solid"/>
                       <a:round/>
@@ -2579,7 +2567,7 @@
                         <a:buNone/>
                       </a:pPr>
                       <a:r>
-                        <a:rPr lang="en-US" sz="1200" b="1" dirty="0">
+                        <a:rPr lang="en-US" sz="900" b="1" dirty="0">
                           <a:solidFill>
                             <a:srgbClr val="FFFFFF"/>
                           </a:solidFill>
@@ -2587,40 +2575,19 @@
                           <a:ea typeface="Arial" pitchFamily="34" charset="-122"/>
                           <a:cs typeface="Arial" pitchFamily="34" charset="-120"/>
                         </a:rPr>
-                        <a:t>First-year</a:t>
+                        <a:t>First-year value</a:t>
                       </a:r>
-                      <a:endParaRPr lang="en-US" sz="1200" dirty="0">
-                        <a:latin typeface="Arial" charset="0"/>
-                        <a:ea typeface="Arial" charset="0"/>
-                        <a:cs typeface="Arial" charset="0"/>
-                      </a:endParaRPr>
-                    </a:p>
-                    <a:p>
-                      <a:pPr algn="ctr" indent="0" marL="0">
-                        <a:buNone/>
-                      </a:pPr>
-                      <a:r>
-                        <a:rPr lang="en-US" sz="1200" b="1" dirty="0">
-                          <a:solidFill>
-                            <a:srgbClr val="FFFFFF"/>
-                          </a:solidFill>
-                          <a:latin typeface="Arial" pitchFamily="34" charset="0"/>
-                          <a:ea typeface="Arial" pitchFamily="34" charset="-122"/>
-                          <a:cs typeface="Arial" pitchFamily="34" charset="-120"/>
-                        </a:rPr>
-                        <a:t>value</a:t>
-                      </a:r>
-                      <a:endParaRPr lang="en-US" sz="1200" dirty="0">
+                      <a:endParaRPr lang="en-US" sz="900" dirty="0">
                         <a:latin typeface="Arial" charset="0"/>
                         <a:ea typeface="Arial" charset="0"/>
                         <a:cs typeface="Arial" charset="0"/>
                       </a:endParaRPr>
                     </a:p>
                   </a:txBody>
-                  <a:tcPr marL="38100" marR="38100" marT="38100" marB="38100" anchor="ctr">
+                  <a:tcPr marL="101600" marR="101600" marT="38100" marB="38100" anchor="ctr">
                     <a:lnL w="6350" cap="flat" cmpd="sng" algn="ctr">
                       <a:solidFill>
-                        <a:srgbClr val="DFE3E6"/>
+                        <a:srgbClr val="C6C9CD"/>
                       </a:solidFill>
                       <a:prstDash val="solid"/>
                       <a:round/>
@@ -2629,7 +2596,7 @@
                     </a:lnL>
                     <a:lnR w="6350" cap="flat" cmpd="sng" algn="ctr">
                       <a:solidFill>
-                        <a:srgbClr val="DFE3E6"/>
+                        <a:srgbClr val="C6C9CD"/>
                       </a:solidFill>
                       <a:prstDash val="solid"/>
                       <a:round/>
@@ -2638,7 +2605,7 @@
                     </a:lnR>
                     <a:lnT w="6350" cap="flat" cmpd="sng" algn="ctr">
                       <a:solidFill>
-                        <a:srgbClr val="DFE3E6"/>
+                        <a:srgbClr val="C6C9CD"/>
                       </a:solidFill>
                       <a:prstDash val="solid"/>
                       <a:round/>
@@ -2647,7 +2614,7 @@
                     </a:lnT>
                     <a:lnB w="6350" cap="flat" cmpd="sng" algn="ctr">
                       <a:solidFill>
-                        <a:srgbClr val="DFE3E6"/>
+                        <a:srgbClr val="C6C9CD"/>
                       </a:solidFill>
                       <a:prstDash val="solid"/>
                       <a:round/>
@@ -2670,7 +2637,7 @@
                         <a:buNone/>
                       </a:pPr>
                       <a:r>
-                        <a:rPr lang="en-US" sz="1200" b="1" dirty="0">
+                        <a:rPr lang="en-US" sz="900" b="1" dirty="0">
                           <a:solidFill>
                             <a:srgbClr val="FFFFFF"/>
                           </a:solidFill>
@@ -2678,40 +2645,19 @@
                           <a:ea typeface="Arial" pitchFamily="34" charset="-122"/>
                           <a:cs typeface="Arial" pitchFamily="34" charset="-120"/>
                         </a:rPr>
-                        <a:t>Net vs</a:t>
+                        <a:t>Net vs $115k</a:t>
                       </a:r>
-                      <a:endParaRPr lang="en-US" sz="1200" dirty="0">
-                        <a:latin typeface="Arial" charset="0"/>
-                        <a:ea typeface="Arial" charset="0"/>
-                        <a:cs typeface="Arial" charset="0"/>
-                      </a:endParaRPr>
-                    </a:p>
-                    <a:p>
-                      <a:pPr algn="ctr" indent="0" marL="0">
-                        <a:buNone/>
-                      </a:pPr>
-                      <a:r>
-                        <a:rPr lang="en-US" sz="1200" b="1" dirty="0">
-                          <a:solidFill>
-                            <a:srgbClr val="FFFFFF"/>
-                          </a:solidFill>
-                          <a:latin typeface="Arial" pitchFamily="34" charset="0"/>
-                          <a:ea typeface="Arial" pitchFamily="34" charset="-122"/>
-                          <a:cs typeface="Arial" pitchFamily="34" charset="-120"/>
-                        </a:rPr>
-                        <a:t>$115k</a:t>
-                      </a:r>
-                      <a:endParaRPr lang="en-US" sz="1200" dirty="0">
+                      <a:endParaRPr lang="en-US" sz="900" dirty="0">
                         <a:latin typeface="Arial" charset="0"/>
                         <a:ea typeface="Arial" charset="0"/>
                         <a:cs typeface="Arial" charset="0"/>
                       </a:endParaRPr>
                     </a:p>
                   </a:txBody>
-                  <a:tcPr marL="38100" marR="38100" marT="38100" marB="38100" anchor="ctr">
+                  <a:tcPr marL="101600" marR="101600" marT="38100" marB="38100" anchor="ctr">
                     <a:lnL w="6350" cap="flat" cmpd="sng" algn="ctr">
                       <a:solidFill>
-                        <a:srgbClr val="DFE3E6"/>
+                        <a:srgbClr val="C6C9CD"/>
                       </a:solidFill>
                       <a:prstDash val="solid"/>
                       <a:round/>
@@ -2720,7 +2666,7 @@
                     </a:lnL>
                     <a:lnR w="6350" cap="flat" cmpd="sng" algn="ctr">
                       <a:solidFill>
-                        <a:srgbClr val="DFE3E6"/>
+                        <a:srgbClr val="C6C9CD"/>
                       </a:solidFill>
                       <a:prstDash val="solid"/>
                       <a:round/>
@@ -2729,7 +2675,7 @@
                     </a:lnR>
                     <a:lnT w="6350" cap="flat" cmpd="sng" algn="ctr">
                       <a:solidFill>
-                        <a:srgbClr val="DFE3E6"/>
+                        <a:srgbClr val="C6C9CD"/>
                       </a:solidFill>
                       <a:prstDash val="solid"/>
                       <a:round/>
@@ -2738,7 +2684,7 @@
                     </a:lnT>
                     <a:lnB w="6350" cap="flat" cmpd="sng" algn="ctr">
                       <a:solidFill>
-                        <a:srgbClr val="DFE3E6"/>
+                        <a:srgbClr val="C6C9CD"/>
                       </a:solidFill>
                       <a:prstDash val="solid"/>
                       <a:round/>
@@ -2751,7 +2697,7 @@
                   </a:tcPr>
                 </a:tc>
               </a:tr>
-              <a:tr h="457200">
+              <a:tr h="488950">
                 <a:tc>
                   <a:txBody>
                     <a:bodyPr>
@@ -2763,7 +2709,7 @@
                         <a:buNone/>
                       </a:pPr>
                       <a:r>
-                        <a:rPr lang="en-US" sz="1200" b="1" dirty="0">
+                        <a:rPr lang="en-US" sz="900" b="1" dirty="0">
                           <a:solidFill>
                             <a:srgbClr val="000000"/>
                           </a:solidFill>
@@ -2773,17 +2719,17 @@
                         </a:rPr>
                         <a:t>Downside</a:t>
                       </a:r>
-                      <a:endParaRPr lang="en-US" sz="1200" dirty="0">
+                      <a:endParaRPr lang="en-US" sz="900" dirty="0">
                         <a:latin typeface="Arial" charset="0"/>
                         <a:ea typeface="Arial" charset="0"/>
                         <a:cs typeface="Arial" charset="0"/>
                       </a:endParaRPr>
                     </a:p>
                   </a:txBody>
-                  <a:tcPr marL="38100" marR="38100" marT="38100" marB="38100" anchor="ctr">
+                  <a:tcPr marL="101600" marR="101600" marT="38100" marB="38100" anchor="ctr">
                     <a:lnL w="6350" cap="flat" cmpd="sng" algn="ctr">
                       <a:solidFill>
-                        <a:srgbClr val="DFE3E6"/>
+                        <a:srgbClr val="C6C9CD"/>
                       </a:solidFill>
                       <a:prstDash val="solid"/>
                       <a:round/>
@@ -2792,7 +2738,7 @@
                     </a:lnL>
                     <a:lnR w="6350" cap="flat" cmpd="sng" algn="ctr">
                       <a:solidFill>
-                        <a:srgbClr val="DFE3E6"/>
+                        <a:srgbClr val="C6C9CD"/>
                       </a:solidFill>
                       <a:prstDash val="solid"/>
                       <a:round/>
@@ -2801,7 +2747,7 @@
                     </a:lnR>
                     <a:lnT w="6350" cap="flat" cmpd="sng" algn="ctr">
                       <a:solidFill>
-                        <a:srgbClr val="DFE3E6"/>
+                        <a:srgbClr val="C6C9CD"/>
                       </a:solidFill>
                       <a:prstDash val="solid"/>
                       <a:round/>
@@ -2810,7 +2756,7 @@
                     </a:lnT>
                     <a:lnB w="6350" cap="flat" cmpd="sng" algn="ctr">
                       <a:solidFill>
-                        <a:srgbClr val="DFE3E6"/>
+                        <a:srgbClr val="C6C9CD"/>
                       </a:solidFill>
                       <a:prstDash val="solid"/>
                       <a:round/>
@@ -2833,7 +2779,7 @@
                         <a:buNone/>
                       </a:pPr>
                       <a:r>
-                        <a:rPr lang="en-US" sz="1200" dirty="0">
+                        <a:rPr lang="en-US" sz="900" dirty="0">
                           <a:solidFill>
                             <a:srgbClr val="000000"/>
                           </a:solidFill>
@@ -2843,17 +2789,17 @@
                         </a:rPr>
                         <a:t>40%</a:t>
                       </a:r>
-                      <a:endParaRPr lang="en-US" sz="1200" dirty="0">
+                      <a:endParaRPr lang="en-US" sz="900" dirty="0">
                         <a:latin typeface="Arial" charset="0"/>
                         <a:ea typeface="Arial" charset="0"/>
                         <a:cs typeface="Arial" charset="0"/>
                       </a:endParaRPr>
                     </a:p>
                   </a:txBody>
-                  <a:tcPr marL="38100" marR="38100" marT="38100" marB="38100" anchor="ctr">
+                  <a:tcPr marL="101600" marR="101600" marT="38100" marB="38100" anchor="ctr">
                     <a:lnL w="6350" cap="flat" cmpd="sng" algn="ctr">
                       <a:solidFill>
-                        <a:srgbClr val="DFE3E6"/>
+                        <a:srgbClr val="C6C9CD"/>
                       </a:solidFill>
                       <a:prstDash val="solid"/>
                       <a:round/>
@@ -2862,7 +2808,7 @@
                     </a:lnL>
                     <a:lnR w="6350" cap="flat" cmpd="sng" algn="ctr">
                       <a:solidFill>
-                        <a:srgbClr val="DFE3E6"/>
+                        <a:srgbClr val="C6C9CD"/>
                       </a:solidFill>
                       <a:prstDash val="solid"/>
                       <a:round/>
@@ -2871,7 +2817,7 @@
                     </a:lnR>
                     <a:lnT w="6350" cap="flat" cmpd="sng" algn="ctr">
                       <a:solidFill>
-                        <a:srgbClr val="DFE3E6"/>
+                        <a:srgbClr val="C6C9CD"/>
                       </a:solidFill>
                       <a:prstDash val="solid"/>
                       <a:round/>
@@ -2880,7 +2826,7 @@
                     </a:lnT>
                     <a:lnB w="6350" cap="flat" cmpd="sng" algn="ctr">
                       <a:solidFill>
-                        <a:srgbClr val="DFE3E6"/>
+                        <a:srgbClr val="C6C9CD"/>
                       </a:solidFill>
                       <a:prstDash val="solid"/>
                       <a:round/>
@@ -2903,7 +2849,7 @@
                         <a:buNone/>
                       </a:pPr>
                       <a:r>
-                        <a:rPr lang="en-US" sz="1200" dirty="0">
+                        <a:rPr lang="en-US" sz="900" dirty="0">
                           <a:solidFill>
                             <a:srgbClr val="000000"/>
                           </a:solidFill>
@@ -2913,17 +2859,17 @@
                         </a:rPr>
                         <a:t>20%</a:t>
                       </a:r>
-                      <a:endParaRPr lang="en-US" sz="1200" dirty="0">
+                      <a:endParaRPr lang="en-US" sz="900" dirty="0">
                         <a:latin typeface="Arial" charset="0"/>
                         <a:ea typeface="Arial" charset="0"/>
                         <a:cs typeface="Arial" charset="0"/>
                       </a:endParaRPr>
                     </a:p>
                   </a:txBody>
-                  <a:tcPr marL="38100" marR="38100" marT="38100" marB="38100" anchor="ctr">
+                  <a:tcPr marL="101600" marR="101600" marT="38100" marB="38100" anchor="ctr">
                     <a:lnL w="6350" cap="flat" cmpd="sng" algn="ctr">
                       <a:solidFill>
-                        <a:srgbClr val="DFE3E6"/>
+                        <a:srgbClr val="C6C9CD"/>
                       </a:solidFill>
                       <a:prstDash val="solid"/>
                       <a:round/>
@@ -2932,7 +2878,7 @@
                     </a:lnL>
                     <a:lnR w="6350" cap="flat" cmpd="sng" algn="ctr">
                       <a:solidFill>
-                        <a:srgbClr val="DFE3E6"/>
+                        <a:srgbClr val="C6C9CD"/>
                       </a:solidFill>
                       <a:prstDash val="solid"/>
                       <a:round/>
@@ -2941,7 +2887,7 @@
                     </a:lnR>
                     <a:lnT w="6350" cap="flat" cmpd="sng" algn="ctr">
                       <a:solidFill>
-                        <a:srgbClr val="DFE3E6"/>
+                        <a:srgbClr val="C6C9CD"/>
                       </a:solidFill>
                       <a:prstDash val="solid"/>
                       <a:round/>
@@ -2950,7 +2896,7 @@
                     </a:lnT>
                     <a:lnB w="6350" cap="flat" cmpd="sng" algn="ctr">
                       <a:solidFill>
-                        <a:srgbClr val="DFE3E6"/>
+                        <a:srgbClr val="C6C9CD"/>
                       </a:solidFill>
                       <a:prstDash val="solid"/>
                       <a:round/>
@@ -2973,7 +2919,7 @@
                         <a:buNone/>
                       </a:pPr>
                       <a:r>
-                        <a:rPr lang="en-US" sz="1200" dirty="0">
+                        <a:rPr lang="en-US" sz="900" dirty="0">
                           <a:solidFill>
                             <a:srgbClr val="000000"/>
                           </a:solidFill>
@@ -2983,17 +2929,17 @@
                         </a:rPr>
                         <a:t>864</a:t>
                       </a:r>
-                      <a:endParaRPr lang="en-US" sz="1200" dirty="0">
+                      <a:endParaRPr lang="en-US" sz="900" dirty="0">
                         <a:latin typeface="Arial" charset="0"/>
                         <a:ea typeface="Arial" charset="0"/>
                         <a:cs typeface="Arial" charset="0"/>
                       </a:endParaRPr>
                     </a:p>
                   </a:txBody>
-                  <a:tcPr marL="38100" marR="38100" marT="38100" marB="38100" anchor="ctr">
+                  <a:tcPr marL="101600" marR="101600" marT="38100" marB="38100" anchor="ctr">
                     <a:lnL w="6350" cap="flat" cmpd="sng" algn="ctr">
                       <a:solidFill>
-                        <a:srgbClr val="DFE3E6"/>
+                        <a:srgbClr val="C6C9CD"/>
                       </a:solidFill>
                       <a:prstDash val="solid"/>
                       <a:round/>
@@ -3002,7 +2948,7 @@
                     </a:lnL>
                     <a:lnR w="6350" cap="flat" cmpd="sng" algn="ctr">
                       <a:solidFill>
-                        <a:srgbClr val="DFE3E6"/>
+                        <a:srgbClr val="C6C9CD"/>
                       </a:solidFill>
                       <a:prstDash val="solid"/>
                       <a:round/>
@@ -3011,7 +2957,7 @@
                     </a:lnR>
                     <a:lnT w="6350" cap="flat" cmpd="sng" algn="ctr">
                       <a:solidFill>
-                        <a:srgbClr val="DFE3E6"/>
+                        <a:srgbClr val="C6C9CD"/>
                       </a:solidFill>
                       <a:prstDash val="solid"/>
                       <a:round/>
@@ -3020,7 +2966,7 @@
                     </a:lnT>
                     <a:lnB w="6350" cap="flat" cmpd="sng" algn="ctr">
                       <a:solidFill>
-                        <a:srgbClr val="DFE3E6"/>
+                        <a:srgbClr val="C6C9CD"/>
                       </a:solidFill>
                       <a:prstDash val="solid"/>
                       <a:round/>
@@ -3043,7 +2989,7 @@
                         <a:buNone/>
                       </a:pPr>
                       <a:r>
-                        <a:rPr lang="en-US" sz="1200" dirty="0">
+                        <a:rPr lang="en-US" sz="900" dirty="0">
                           <a:solidFill>
                             <a:srgbClr val="000000"/>
                           </a:solidFill>
@@ -3053,17 +2999,17 @@
                         </a:rPr>
                         <a:t>$108k</a:t>
                       </a:r>
-                      <a:endParaRPr lang="en-US" sz="1200" dirty="0">
+                      <a:endParaRPr lang="en-US" sz="900" dirty="0">
                         <a:latin typeface="Arial" charset="0"/>
                         <a:ea typeface="Arial" charset="0"/>
                         <a:cs typeface="Arial" charset="0"/>
                       </a:endParaRPr>
                     </a:p>
                   </a:txBody>
-                  <a:tcPr marL="38100" marR="38100" marT="38100" marB="38100" anchor="ctr">
+                  <a:tcPr marL="101600" marR="101600" marT="38100" marB="38100" anchor="ctr">
                     <a:lnL w="6350" cap="flat" cmpd="sng" algn="ctr">
                       <a:solidFill>
-                        <a:srgbClr val="DFE3E6"/>
+                        <a:srgbClr val="C6C9CD"/>
                       </a:solidFill>
                       <a:prstDash val="solid"/>
                       <a:round/>
@@ -3072,7 +3018,7 @@
                     </a:lnL>
                     <a:lnR w="6350" cap="flat" cmpd="sng" algn="ctr">
                       <a:solidFill>
-                        <a:srgbClr val="DFE3E6"/>
+                        <a:srgbClr val="C6C9CD"/>
                       </a:solidFill>
                       <a:prstDash val="solid"/>
                       <a:round/>
@@ -3081,7 +3027,7 @@
                     </a:lnR>
                     <a:lnT w="6350" cap="flat" cmpd="sng" algn="ctr">
                       <a:solidFill>
-                        <a:srgbClr val="DFE3E6"/>
+                        <a:srgbClr val="C6C9CD"/>
                       </a:solidFill>
                       <a:prstDash val="solid"/>
                       <a:round/>
@@ -3090,7 +3036,7 @@
                     </a:lnT>
                     <a:lnB w="6350" cap="flat" cmpd="sng" algn="ctr">
                       <a:solidFill>
-                        <a:srgbClr val="DFE3E6"/>
+                        <a:srgbClr val="C6C9CD"/>
                       </a:solidFill>
                       <a:prstDash val="solid"/>
                       <a:round/>
@@ -3113,7 +3059,7 @@
                         <a:buNone/>
                       </a:pPr>
                       <a:r>
-                        <a:rPr lang="en-US" sz="1200" dirty="0">
+                        <a:rPr lang="en-US" sz="900" dirty="0">
                           <a:solidFill>
                             <a:srgbClr val="000000"/>
                           </a:solidFill>
@@ -3123,17 +3069,17 @@
                         </a:rPr>
                         <a:t>$54k</a:t>
                       </a:r>
-                      <a:endParaRPr lang="en-US" sz="1200" dirty="0">
+                      <a:endParaRPr lang="en-US" sz="900" dirty="0">
                         <a:latin typeface="Arial" charset="0"/>
                         <a:ea typeface="Arial" charset="0"/>
                         <a:cs typeface="Arial" charset="0"/>
                       </a:endParaRPr>
                     </a:p>
                   </a:txBody>
-                  <a:tcPr marL="38100" marR="38100" marT="38100" marB="38100" anchor="ctr">
+                  <a:tcPr marL="101600" marR="101600" marT="38100" marB="38100" anchor="ctr">
                     <a:lnL w="6350" cap="flat" cmpd="sng" algn="ctr">
                       <a:solidFill>
-                        <a:srgbClr val="DFE3E6"/>
+                        <a:srgbClr val="C6C9CD"/>
                       </a:solidFill>
                       <a:prstDash val="solid"/>
                       <a:round/>
@@ -3142,7 +3088,7 @@
                     </a:lnL>
                     <a:lnR w="6350" cap="flat" cmpd="sng" algn="ctr">
                       <a:solidFill>
-                        <a:srgbClr val="DFE3E6"/>
+                        <a:srgbClr val="C6C9CD"/>
                       </a:solidFill>
                       <a:prstDash val="solid"/>
                       <a:round/>
@@ -3151,7 +3097,7 @@
                     </a:lnR>
                     <a:lnT w="6350" cap="flat" cmpd="sng" algn="ctr">
                       <a:solidFill>
-                        <a:srgbClr val="DFE3E6"/>
+                        <a:srgbClr val="C6C9CD"/>
                       </a:solidFill>
                       <a:prstDash val="solid"/>
                       <a:round/>
@@ -3160,7 +3106,7 @@
                     </a:lnT>
                     <a:lnB w="6350" cap="flat" cmpd="sng" algn="ctr">
                       <a:solidFill>
-                        <a:srgbClr val="DFE3E6"/>
+                        <a:srgbClr val="C6C9CD"/>
                       </a:solidFill>
                       <a:prstDash val="solid"/>
                       <a:round/>
@@ -3183,7 +3129,7 @@
                         <a:buNone/>
                       </a:pPr>
                       <a:r>
-                        <a:rPr lang="en-US" sz="1200" b="1" dirty="0">
+                        <a:rPr lang="en-US" sz="900" b="1" dirty="0">
                           <a:solidFill>
                             <a:srgbClr val="FD5108"/>
                           </a:solidFill>
@@ -3193,17 +3139,17 @@
                         </a:rPr>
                         <a:t>−$61k</a:t>
                       </a:r>
-                      <a:endParaRPr lang="en-US" sz="1200" dirty="0">
+                      <a:endParaRPr lang="en-US" sz="900" dirty="0">
                         <a:latin typeface="Arial" charset="0"/>
                         <a:ea typeface="Arial" charset="0"/>
                         <a:cs typeface="Arial" charset="0"/>
                       </a:endParaRPr>
                     </a:p>
                   </a:txBody>
-                  <a:tcPr marL="38100" marR="38100" marT="38100" marB="38100" anchor="ctr">
+                  <a:tcPr marL="101600" marR="101600" marT="38100" marB="38100" anchor="ctr">
                     <a:lnL w="6350" cap="flat" cmpd="sng" algn="ctr">
                       <a:solidFill>
-                        <a:srgbClr val="DFE3E6"/>
+                        <a:srgbClr val="C6C9CD"/>
                       </a:solidFill>
                       <a:prstDash val="solid"/>
                       <a:round/>
@@ -3212,7 +3158,7 @@
                     </a:lnL>
                     <a:lnR w="6350" cap="flat" cmpd="sng" algn="ctr">
                       <a:solidFill>
-                        <a:srgbClr val="DFE3E6"/>
+                        <a:srgbClr val="C6C9CD"/>
                       </a:solidFill>
                       <a:prstDash val="solid"/>
                       <a:round/>
@@ -3221,7 +3167,7 @@
                     </a:lnR>
                     <a:lnT w="6350" cap="flat" cmpd="sng" algn="ctr">
                       <a:solidFill>
-                        <a:srgbClr val="DFE3E6"/>
+                        <a:srgbClr val="C6C9CD"/>
                       </a:solidFill>
                       <a:prstDash val="solid"/>
                       <a:round/>
@@ -3230,7 +3176,7 @@
                     </a:lnT>
                     <a:lnB w="6350" cap="flat" cmpd="sng" algn="ctr">
                       <a:solidFill>
-                        <a:srgbClr val="DFE3E6"/>
+                        <a:srgbClr val="C6C9CD"/>
                       </a:solidFill>
                       <a:prstDash val="solid"/>
                       <a:round/>
@@ -3243,7 +3189,7 @@
                   </a:tcPr>
                 </a:tc>
               </a:tr>
-              <a:tr h="469900">
+              <a:tr h="488950">
                 <a:tc>
                   <a:txBody>
                     <a:bodyPr>
@@ -3255,7 +3201,7 @@
                         <a:buNone/>
                       </a:pPr>
                       <a:r>
-                        <a:rPr lang="en-US" sz="1200" b="1" dirty="0">
+                        <a:rPr lang="en-US" sz="900" b="1" dirty="0">
                           <a:solidFill>
                             <a:srgbClr val="000000"/>
                           </a:solidFill>
@@ -3265,17 +3211,17 @@
                         </a:rPr>
                         <a:t>Base</a:t>
                       </a:r>
-                      <a:endParaRPr lang="en-US" sz="1200" dirty="0">
+                      <a:endParaRPr lang="en-US" sz="900" dirty="0">
                         <a:latin typeface="Arial" charset="0"/>
                         <a:ea typeface="Arial" charset="0"/>
                         <a:cs typeface="Arial" charset="0"/>
                       </a:endParaRPr>
                     </a:p>
                   </a:txBody>
-                  <a:tcPr marL="38100" marR="38100" marT="38100" marB="38100" anchor="ctr">
+                  <a:tcPr marL="101600" marR="101600" marT="38100" marB="38100" anchor="ctr">
                     <a:lnL w="6350" cap="flat" cmpd="sng" algn="ctr">
                       <a:solidFill>
-                        <a:srgbClr val="DFE3E6"/>
+                        <a:srgbClr val="C6C9CD"/>
                       </a:solidFill>
                       <a:prstDash val="solid"/>
                       <a:round/>
@@ -3284,7 +3230,7 @@
                     </a:lnL>
                     <a:lnR w="6350" cap="flat" cmpd="sng" algn="ctr">
                       <a:solidFill>
-                        <a:srgbClr val="DFE3E6"/>
+                        <a:srgbClr val="C6C9CD"/>
                       </a:solidFill>
                       <a:prstDash val="solid"/>
                       <a:round/>
@@ -3293,7 +3239,7 @@
                     </a:lnR>
                     <a:lnT w="6350" cap="flat" cmpd="sng" algn="ctr">
                       <a:solidFill>
-                        <a:srgbClr val="DFE3E6"/>
+                        <a:srgbClr val="C6C9CD"/>
                       </a:solidFill>
                       <a:prstDash val="solid"/>
                       <a:round/>
@@ -3302,7 +3248,7 @@
                     </a:lnT>
                     <a:lnB w="6350" cap="flat" cmpd="sng" algn="ctr">
                       <a:solidFill>
-                        <a:srgbClr val="DFE3E6"/>
+                        <a:srgbClr val="C6C9CD"/>
                       </a:solidFill>
                       <a:prstDash val="solid"/>
                       <a:round/>
@@ -3310,7 +3256,7 @@
                       <a:tailEnd type="none" w="med" len="med"/>
                     </a:lnB>
                     <a:solidFill>
-                      <a:srgbClr val="F5F7F8"/>
+                      <a:srgbClr val="FFF5ED"/>
                     </a:solidFill>
                   </a:tcPr>
                 </a:tc>
@@ -3325,7 +3271,7 @@
                         <a:buNone/>
                       </a:pPr>
                       <a:r>
-                        <a:rPr lang="en-US" sz="1200" dirty="0">
+                        <a:rPr lang="en-US" sz="900" dirty="0">
                           <a:solidFill>
                             <a:srgbClr val="000000"/>
                           </a:solidFill>
@@ -3335,17 +3281,17 @@
                         </a:rPr>
                         <a:t>60%</a:t>
                       </a:r>
-                      <a:endParaRPr lang="en-US" sz="1200" dirty="0">
+                      <a:endParaRPr lang="en-US" sz="900" dirty="0">
                         <a:latin typeface="Arial" charset="0"/>
                         <a:ea typeface="Arial" charset="0"/>
                         <a:cs typeface="Arial" charset="0"/>
                       </a:endParaRPr>
                     </a:p>
                   </a:txBody>
-                  <a:tcPr marL="38100" marR="38100" marT="38100" marB="38100" anchor="ctr">
+                  <a:tcPr marL="101600" marR="101600" marT="38100" marB="38100" anchor="ctr">
                     <a:lnL w="6350" cap="flat" cmpd="sng" algn="ctr">
                       <a:solidFill>
-                        <a:srgbClr val="DFE3E6"/>
+                        <a:srgbClr val="C6C9CD"/>
                       </a:solidFill>
                       <a:prstDash val="solid"/>
                       <a:round/>
@@ -3354,7 +3300,7 @@
                     </a:lnL>
                     <a:lnR w="6350" cap="flat" cmpd="sng" algn="ctr">
                       <a:solidFill>
-                        <a:srgbClr val="DFE3E6"/>
+                        <a:srgbClr val="C6C9CD"/>
                       </a:solidFill>
                       <a:prstDash val="solid"/>
                       <a:round/>
@@ -3363,7 +3309,7 @@
                     </a:lnR>
                     <a:lnT w="6350" cap="flat" cmpd="sng" algn="ctr">
                       <a:solidFill>
-                        <a:srgbClr val="DFE3E6"/>
+                        <a:srgbClr val="C6C9CD"/>
                       </a:solidFill>
                       <a:prstDash val="solid"/>
                       <a:round/>
@@ -3372,7 +3318,7 @@
                     </a:lnT>
                     <a:lnB w="6350" cap="flat" cmpd="sng" algn="ctr">
                       <a:solidFill>
-                        <a:srgbClr val="DFE3E6"/>
+                        <a:srgbClr val="C6C9CD"/>
                       </a:solidFill>
                       <a:prstDash val="solid"/>
                       <a:round/>
@@ -3380,7 +3326,7 @@
                       <a:tailEnd type="none" w="med" len="med"/>
                     </a:lnB>
                     <a:solidFill>
-                      <a:srgbClr val="F5F7F8"/>
+                      <a:srgbClr val="FFF5ED"/>
                     </a:solidFill>
                   </a:tcPr>
                 </a:tc>
@@ -3395,7 +3341,7 @@
                         <a:buNone/>
                       </a:pPr>
                       <a:r>
-                        <a:rPr lang="en-US" sz="1200" dirty="0">
+                        <a:rPr lang="en-US" sz="900" dirty="0">
                           <a:solidFill>
                             <a:srgbClr val="000000"/>
                           </a:solidFill>
@@ -3405,17 +3351,17 @@
                         </a:rPr>
                         <a:t>30%</a:t>
                       </a:r>
-                      <a:endParaRPr lang="en-US" sz="1200" dirty="0">
+                      <a:endParaRPr lang="en-US" sz="900" dirty="0">
                         <a:latin typeface="Arial" charset="0"/>
                         <a:ea typeface="Arial" charset="0"/>
                         <a:cs typeface="Arial" charset="0"/>
                       </a:endParaRPr>
                     </a:p>
                   </a:txBody>
-                  <a:tcPr marL="38100" marR="38100" marT="38100" marB="38100" anchor="ctr">
+                  <a:tcPr marL="101600" marR="101600" marT="38100" marB="38100" anchor="ctr">
                     <a:lnL w="6350" cap="flat" cmpd="sng" algn="ctr">
                       <a:solidFill>
-                        <a:srgbClr val="DFE3E6"/>
+                        <a:srgbClr val="C6C9CD"/>
                       </a:solidFill>
                       <a:prstDash val="solid"/>
                       <a:round/>
@@ -3424,7 +3370,7 @@
                     </a:lnL>
                     <a:lnR w="6350" cap="flat" cmpd="sng" algn="ctr">
                       <a:solidFill>
-                        <a:srgbClr val="DFE3E6"/>
+                        <a:srgbClr val="C6C9CD"/>
                       </a:solidFill>
                       <a:prstDash val="solid"/>
                       <a:round/>
@@ -3433,7 +3379,7 @@
                     </a:lnR>
                     <a:lnT w="6350" cap="flat" cmpd="sng" algn="ctr">
                       <a:solidFill>
-                        <a:srgbClr val="DFE3E6"/>
+                        <a:srgbClr val="C6C9CD"/>
                       </a:solidFill>
                       <a:prstDash val="solid"/>
                       <a:round/>
@@ -3442,7 +3388,7 @@
                     </a:lnT>
                     <a:lnB w="6350" cap="flat" cmpd="sng" algn="ctr">
                       <a:solidFill>
-                        <a:srgbClr val="DFE3E6"/>
+                        <a:srgbClr val="C6C9CD"/>
                       </a:solidFill>
                       <a:prstDash val="solid"/>
                       <a:round/>
@@ -3450,7 +3396,7 @@
                       <a:tailEnd type="none" w="med" len="med"/>
                     </a:lnB>
                     <a:solidFill>
-                      <a:srgbClr val="F5F7F8"/>
+                      <a:srgbClr val="FFF5ED"/>
                     </a:solidFill>
                   </a:tcPr>
                 </a:tc>
@@ -3465,7 +3411,7 @@
                         <a:buNone/>
                       </a:pPr>
                       <a:r>
-                        <a:rPr lang="en-US" sz="1200" dirty="0">
+                        <a:rPr lang="en-US" sz="900" dirty="0">
                           <a:solidFill>
                             <a:srgbClr val="000000"/>
                           </a:solidFill>
@@ -3475,17 +3421,17 @@
                         </a:rPr>
                         <a:t>1,944</a:t>
                       </a:r>
-                      <a:endParaRPr lang="en-US" sz="1200" dirty="0">
+                      <a:endParaRPr lang="en-US" sz="900" dirty="0">
                         <a:latin typeface="Arial" charset="0"/>
                         <a:ea typeface="Arial" charset="0"/>
                         <a:cs typeface="Arial" charset="0"/>
                       </a:endParaRPr>
                     </a:p>
                   </a:txBody>
-                  <a:tcPr marL="38100" marR="38100" marT="38100" marB="38100" anchor="ctr">
+                  <a:tcPr marL="101600" marR="101600" marT="38100" marB="38100" anchor="ctr">
                     <a:lnL w="6350" cap="flat" cmpd="sng" algn="ctr">
                       <a:solidFill>
-                        <a:srgbClr val="DFE3E6"/>
+                        <a:srgbClr val="C6C9CD"/>
                       </a:solidFill>
                       <a:prstDash val="solid"/>
                       <a:round/>
@@ -3494,7 +3440,7 @@
                     </a:lnL>
                     <a:lnR w="6350" cap="flat" cmpd="sng" algn="ctr">
                       <a:solidFill>
-                        <a:srgbClr val="DFE3E6"/>
+                        <a:srgbClr val="C6C9CD"/>
                       </a:solidFill>
                       <a:prstDash val="solid"/>
                       <a:round/>
@@ -3503,7 +3449,7 @@
                     </a:lnR>
                     <a:lnT w="6350" cap="flat" cmpd="sng" algn="ctr">
                       <a:solidFill>
-                        <a:srgbClr val="DFE3E6"/>
+                        <a:srgbClr val="C6C9CD"/>
                       </a:solidFill>
                       <a:prstDash val="solid"/>
                       <a:round/>
@@ -3512,7 +3458,7 @@
                     </a:lnT>
                     <a:lnB w="6350" cap="flat" cmpd="sng" algn="ctr">
                       <a:solidFill>
-                        <a:srgbClr val="DFE3E6"/>
+                        <a:srgbClr val="C6C9CD"/>
                       </a:solidFill>
                       <a:prstDash val="solid"/>
                       <a:round/>
@@ -3520,7 +3466,7 @@
                       <a:tailEnd type="none" w="med" len="med"/>
                     </a:lnB>
                     <a:solidFill>
-                      <a:srgbClr val="F5F7F8"/>
+                      <a:srgbClr val="FFF5ED"/>
                     </a:solidFill>
                   </a:tcPr>
                 </a:tc>
@@ -3535,7 +3481,7 @@
                         <a:buNone/>
                       </a:pPr>
                       <a:r>
-                        <a:rPr lang="en-US" sz="1200" dirty="0">
+                        <a:rPr lang="en-US" sz="900" dirty="0">
                           <a:solidFill>
                             <a:srgbClr val="000000"/>
                           </a:solidFill>
@@ -3545,17 +3491,17 @@
                         </a:rPr>
                         <a:t>$243k</a:t>
                       </a:r>
-                      <a:endParaRPr lang="en-US" sz="1200" dirty="0">
+                      <a:endParaRPr lang="en-US" sz="900" dirty="0">
                         <a:latin typeface="Arial" charset="0"/>
                         <a:ea typeface="Arial" charset="0"/>
                         <a:cs typeface="Arial" charset="0"/>
                       </a:endParaRPr>
                     </a:p>
                   </a:txBody>
-                  <a:tcPr marL="38100" marR="38100" marT="38100" marB="38100" anchor="ctr">
+                  <a:tcPr marL="101600" marR="101600" marT="38100" marB="38100" anchor="ctr">
                     <a:lnL w="6350" cap="flat" cmpd="sng" algn="ctr">
                       <a:solidFill>
-                        <a:srgbClr val="DFE3E6"/>
+                        <a:srgbClr val="C6C9CD"/>
                       </a:solidFill>
                       <a:prstDash val="solid"/>
                       <a:round/>
@@ -3564,7 +3510,7 @@
                     </a:lnL>
                     <a:lnR w="6350" cap="flat" cmpd="sng" algn="ctr">
                       <a:solidFill>
-                        <a:srgbClr val="DFE3E6"/>
+                        <a:srgbClr val="C6C9CD"/>
                       </a:solidFill>
                       <a:prstDash val="solid"/>
                       <a:round/>
@@ -3573,7 +3519,7 @@
                     </a:lnR>
                     <a:lnT w="6350" cap="flat" cmpd="sng" algn="ctr">
                       <a:solidFill>
-                        <a:srgbClr val="DFE3E6"/>
+                        <a:srgbClr val="C6C9CD"/>
                       </a:solidFill>
                       <a:prstDash val="solid"/>
                       <a:round/>
@@ -3582,7 +3528,7 @@
                     </a:lnT>
                     <a:lnB w="6350" cap="flat" cmpd="sng" algn="ctr">
                       <a:solidFill>
-                        <a:srgbClr val="DFE3E6"/>
+                        <a:srgbClr val="C6C9CD"/>
                       </a:solidFill>
                       <a:prstDash val="solid"/>
                       <a:round/>
@@ -3590,7 +3536,7 @@
                       <a:tailEnd type="none" w="med" len="med"/>
                     </a:lnB>
                     <a:solidFill>
-                      <a:srgbClr val="F5F7F8"/>
+                      <a:srgbClr val="FFF5ED"/>
                     </a:solidFill>
                   </a:tcPr>
                 </a:tc>
@@ -3605,7 +3551,7 @@
                         <a:buNone/>
                       </a:pPr>
                       <a:r>
-                        <a:rPr lang="en-US" sz="1200" dirty="0">
+                        <a:rPr lang="en-US" sz="900" dirty="0">
                           <a:solidFill>
                             <a:srgbClr val="000000"/>
                           </a:solidFill>
@@ -3615,17 +3561,17 @@
                         </a:rPr>
                         <a:t>$121.5k</a:t>
                       </a:r>
-                      <a:endParaRPr lang="en-US" sz="1200" dirty="0">
+                      <a:endParaRPr lang="en-US" sz="900" dirty="0">
                         <a:latin typeface="Arial" charset="0"/>
                         <a:ea typeface="Arial" charset="0"/>
                         <a:cs typeface="Arial" charset="0"/>
                       </a:endParaRPr>
                     </a:p>
                   </a:txBody>
-                  <a:tcPr marL="38100" marR="38100" marT="38100" marB="38100" anchor="ctr">
+                  <a:tcPr marL="101600" marR="101600" marT="38100" marB="38100" anchor="ctr">
                     <a:lnL w="6350" cap="flat" cmpd="sng" algn="ctr">
                       <a:solidFill>
-                        <a:srgbClr val="DFE3E6"/>
+                        <a:srgbClr val="C6C9CD"/>
                       </a:solidFill>
                       <a:prstDash val="solid"/>
                       <a:round/>
@@ -3634,7 +3580,7 @@
                     </a:lnL>
                     <a:lnR w="6350" cap="flat" cmpd="sng" algn="ctr">
                       <a:solidFill>
-                        <a:srgbClr val="DFE3E6"/>
+                        <a:srgbClr val="C6C9CD"/>
                       </a:solidFill>
                       <a:prstDash val="solid"/>
                       <a:round/>
@@ -3643,7 +3589,7 @@
                     </a:lnR>
                     <a:lnT w="6350" cap="flat" cmpd="sng" algn="ctr">
                       <a:solidFill>
-                        <a:srgbClr val="DFE3E6"/>
+                        <a:srgbClr val="C6C9CD"/>
                       </a:solidFill>
                       <a:prstDash val="solid"/>
                       <a:round/>
@@ -3652,7 +3598,7 @@
                     </a:lnT>
                     <a:lnB w="6350" cap="flat" cmpd="sng" algn="ctr">
                       <a:solidFill>
-                        <a:srgbClr val="DFE3E6"/>
+                        <a:srgbClr val="C6C9CD"/>
                       </a:solidFill>
                       <a:prstDash val="solid"/>
                       <a:round/>
@@ -3660,7 +3606,7 @@
                       <a:tailEnd type="none" w="med" len="med"/>
                     </a:lnB>
                     <a:solidFill>
-                      <a:srgbClr val="F5F7F8"/>
+                      <a:srgbClr val="FFF5ED"/>
                     </a:solidFill>
                   </a:tcPr>
                 </a:tc>
@@ -3675,7 +3621,7 @@
                         <a:buNone/>
                       </a:pPr>
                       <a:r>
-                        <a:rPr lang="en-US" sz="1200" b="1" dirty="0">
+                        <a:rPr lang="en-US" sz="900" b="1" dirty="0">
                           <a:solidFill>
                             <a:srgbClr val="FD5108"/>
                           </a:solidFill>
@@ -3685,17 +3631,17 @@
                         </a:rPr>
                         <a:t>+$6.5k</a:t>
                       </a:r>
-                      <a:endParaRPr lang="en-US" sz="1200" dirty="0">
+                      <a:endParaRPr lang="en-US" sz="900" dirty="0">
                         <a:latin typeface="Arial" charset="0"/>
                         <a:ea typeface="Arial" charset="0"/>
                         <a:cs typeface="Arial" charset="0"/>
                       </a:endParaRPr>
                     </a:p>
                   </a:txBody>
-                  <a:tcPr marL="38100" marR="38100" marT="38100" marB="38100" anchor="ctr">
+                  <a:tcPr marL="101600" marR="101600" marT="38100" marB="38100" anchor="ctr">
                     <a:lnL w="6350" cap="flat" cmpd="sng" algn="ctr">
                       <a:solidFill>
-                        <a:srgbClr val="DFE3E6"/>
+                        <a:srgbClr val="C6C9CD"/>
                       </a:solidFill>
                       <a:prstDash val="solid"/>
                       <a:round/>
@@ -3704,7 +3650,7 @@
                     </a:lnL>
                     <a:lnR w="6350" cap="flat" cmpd="sng" algn="ctr">
                       <a:solidFill>
-                        <a:srgbClr val="DFE3E6"/>
+                        <a:srgbClr val="C6C9CD"/>
                       </a:solidFill>
                       <a:prstDash val="solid"/>
                       <a:round/>
@@ -3713,7 +3659,7 @@
                     </a:lnR>
                     <a:lnT w="6350" cap="flat" cmpd="sng" algn="ctr">
                       <a:solidFill>
-                        <a:srgbClr val="DFE3E6"/>
+                        <a:srgbClr val="C6C9CD"/>
                       </a:solidFill>
                       <a:prstDash val="solid"/>
                       <a:round/>
@@ -3722,7 +3668,7 @@
                     </a:lnT>
                     <a:lnB w="6350" cap="flat" cmpd="sng" algn="ctr">
                       <a:solidFill>
-                        <a:srgbClr val="DFE3E6"/>
+                        <a:srgbClr val="C6C9CD"/>
                       </a:solidFill>
                       <a:prstDash val="solid"/>
                       <a:round/>
@@ -3730,12 +3676,12 @@
                       <a:tailEnd type="none" w="med" len="med"/>
                     </a:lnB>
                     <a:solidFill>
-                      <a:srgbClr val="F5F7F8"/>
+                      <a:srgbClr val="FFF5ED"/>
                     </a:solidFill>
                   </a:tcPr>
                 </a:tc>
               </a:tr>
-              <a:tr h="476250">
+              <a:tr h="495300">
                 <a:tc>
                   <a:txBody>
                     <a:bodyPr>
@@ -3747,7 +3693,7 @@
                         <a:buNone/>
                       </a:pPr>
                       <a:r>
-                        <a:rPr lang="en-US" sz="1200" b="1" dirty="0">
+                        <a:rPr lang="en-US" sz="900" b="1" dirty="0">
                           <a:solidFill>
                             <a:srgbClr val="000000"/>
                           </a:solidFill>
@@ -3757,17 +3703,17 @@
                         </a:rPr>
                         <a:t>Upside</a:t>
                       </a:r>
-                      <a:endParaRPr lang="en-US" sz="1200" dirty="0">
+                      <a:endParaRPr lang="en-US" sz="900" dirty="0">
                         <a:latin typeface="Arial" charset="0"/>
                         <a:ea typeface="Arial" charset="0"/>
                         <a:cs typeface="Arial" charset="0"/>
                       </a:endParaRPr>
                     </a:p>
                   </a:txBody>
-                  <a:tcPr marL="38100" marR="38100" marT="38100" marB="38100" anchor="ctr">
+                  <a:tcPr marL="101600" marR="101600" marT="38100" marB="38100" anchor="ctr">
                     <a:lnL w="6350" cap="flat" cmpd="sng" algn="ctr">
                       <a:solidFill>
-                        <a:srgbClr val="DFE3E6"/>
+                        <a:srgbClr val="C6C9CD"/>
                       </a:solidFill>
                       <a:prstDash val="solid"/>
                       <a:round/>
@@ -3776,7 +3722,7 @@
                     </a:lnL>
                     <a:lnR w="6350" cap="flat" cmpd="sng" algn="ctr">
                       <a:solidFill>
-                        <a:srgbClr val="DFE3E6"/>
+                        <a:srgbClr val="C6C9CD"/>
                       </a:solidFill>
                       <a:prstDash val="solid"/>
                       <a:round/>
@@ -3785,7 +3731,7 @@
                     </a:lnR>
                     <a:lnT w="6350" cap="flat" cmpd="sng" algn="ctr">
                       <a:solidFill>
-                        <a:srgbClr val="DFE3E6"/>
+                        <a:srgbClr val="C6C9CD"/>
                       </a:solidFill>
                       <a:prstDash val="solid"/>
                       <a:round/>
@@ -3794,7 +3740,7 @@
                     </a:lnT>
                     <a:lnB w="6350" cap="flat" cmpd="sng" algn="ctr">
                       <a:solidFill>
-                        <a:srgbClr val="DFE3E6"/>
+                        <a:srgbClr val="C6C9CD"/>
                       </a:solidFill>
                       <a:prstDash val="solid"/>
                       <a:round/>
@@ -3817,7 +3763,7 @@
                         <a:buNone/>
                       </a:pPr>
                       <a:r>
-                        <a:rPr lang="en-US" sz="1200" dirty="0">
+                        <a:rPr lang="en-US" sz="900" dirty="0">
                           <a:solidFill>
                             <a:srgbClr val="000000"/>
                           </a:solidFill>
@@ -3827,17 +3773,17 @@
                         </a:rPr>
                         <a:t>75%</a:t>
                       </a:r>
-                      <a:endParaRPr lang="en-US" sz="1200" dirty="0">
+                      <a:endParaRPr lang="en-US" sz="900" dirty="0">
                         <a:latin typeface="Arial" charset="0"/>
                         <a:ea typeface="Arial" charset="0"/>
                         <a:cs typeface="Arial" charset="0"/>
                       </a:endParaRPr>
                     </a:p>
                   </a:txBody>
-                  <a:tcPr marL="38100" marR="38100" marT="38100" marB="38100" anchor="ctr">
+                  <a:tcPr marL="101600" marR="101600" marT="38100" marB="38100" anchor="ctr">
                     <a:lnL w="6350" cap="flat" cmpd="sng" algn="ctr">
                       <a:solidFill>
-                        <a:srgbClr val="DFE3E6"/>
+                        <a:srgbClr val="C6C9CD"/>
                       </a:solidFill>
                       <a:prstDash val="solid"/>
                       <a:round/>
@@ -3846,7 +3792,7 @@
                     </a:lnL>
                     <a:lnR w="6350" cap="flat" cmpd="sng" algn="ctr">
                       <a:solidFill>
-                        <a:srgbClr val="DFE3E6"/>
+                        <a:srgbClr val="C6C9CD"/>
                       </a:solidFill>
                       <a:prstDash val="solid"/>
                       <a:round/>
@@ -3855,7 +3801,7 @@
                     </a:lnR>
                     <a:lnT w="6350" cap="flat" cmpd="sng" algn="ctr">
                       <a:solidFill>
-                        <a:srgbClr val="DFE3E6"/>
+                        <a:srgbClr val="C6C9CD"/>
                       </a:solidFill>
                       <a:prstDash val="solid"/>
                       <a:round/>
@@ -3864,7 +3810,7 @@
                     </a:lnT>
                     <a:lnB w="6350" cap="flat" cmpd="sng" algn="ctr">
                       <a:solidFill>
-                        <a:srgbClr val="DFE3E6"/>
+                        <a:srgbClr val="C6C9CD"/>
                       </a:solidFill>
                       <a:prstDash val="solid"/>
                       <a:round/>
@@ -3887,7 +3833,7 @@
                         <a:buNone/>
                       </a:pPr>
                       <a:r>
-                        <a:rPr lang="en-US" sz="1200" dirty="0">
+                        <a:rPr lang="en-US" sz="900" dirty="0">
                           <a:solidFill>
                             <a:srgbClr val="000000"/>
                           </a:solidFill>
@@ -3897,17 +3843,17 @@
                         </a:rPr>
                         <a:t>40%</a:t>
                       </a:r>
-                      <a:endParaRPr lang="en-US" sz="1200" dirty="0">
+                      <a:endParaRPr lang="en-US" sz="900" dirty="0">
                         <a:latin typeface="Arial" charset="0"/>
                         <a:ea typeface="Arial" charset="0"/>
                         <a:cs typeface="Arial" charset="0"/>
                       </a:endParaRPr>
                     </a:p>
                   </a:txBody>
-                  <a:tcPr marL="38100" marR="38100" marT="38100" marB="38100" anchor="ctr">
+                  <a:tcPr marL="101600" marR="101600" marT="38100" marB="38100" anchor="ctr">
                     <a:lnL w="6350" cap="flat" cmpd="sng" algn="ctr">
                       <a:solidFill>
-                        <a:srgbClr val="DFE3E6"/>
+                        <a:srgbClr val="C6C9CD"/>
                       </a:solidFill>
                       <a:prstDash val="solid"/>
                       <a:round/>
@@ -3916,7 +3862,7 @@
                     </a:lnL>
                     <a:lnR w="6350" cap="flat" cmpd="sng" algn="ctr">
                       <a:solidFill>
-                        <a:srgbClr val="DFE3E6"/>
+                        <a:srgbClr val="C6C9CD"/>
                       </a:solidFill>
                       <a:prstDash val="solid"/>
                       <a:round/>
@@ -3925,7 +3871,7 @@
                     </a:lnR>
                     <a:lnT w="6350" cap="flat" cmpd="sng" algn="ctr">
                       <a:solidFill>
-                        <a:srgbClr val="DFE3E6"/>
+                        <a:srgbClr val="C6C9CD"/>
                       </a:solidFill>
                       <a:prstDash val="solid"/>
                       <a:round/>
@@ -3934,7 +3880,7 @@
                     </a:lnT>
                     <a:lnB w="6350" cap="flat" cmpd="sng" algn="ctr">
                       <a:solidFill>
-                        <a:srgbClr val="DFE3E6"/>
+                        <a:srgbClr val="C6C9CD"/>
                       </a:solidFill>
                       <a:prstDash val="solid"/>
                       <a:round/>
@@ -3957,7 +3903,7 @@
                         <a:buNone/>
                       </a:pPr>
                       <a:r>
-                        <a:rPr lang="en-US" sz="1200" dirty="0">
+                        <a:rPr lang="en-US" sz="900" dirty="0">
                           <a:solidFill>
                             <a:srgbClr val="000000"/>
                           </a:solidFill>
@@ -3967,17 +3913,17 @@
                         </a:rPr>
                         <a:t>3,240</a:t>
                       </a:r>
-                      <a:endParaRPr lang="en-US" sz="1200" dirty="0">
+                      <a:endParaRPr lang="en-US" sz="900" dirty="0">
                         <a:latin typeface="Arial" charset="0"/>
                         <a:ea typeface="Arial" charset="0"/>
                         <a:cs typeface="Arial" charset="0"/>
                       </a:endParaRPr>
                     </a:p>
                   </a:txBody>
-                  <a:tcPr marL="38100" marR="38100" marT="38100" marB="38100" anchor="ctr">
+                  <a:tcPr marL="101600" marR="101600" marT="38100" marB="38100" anchor="ctr">
                     <a:lnL w="6350" cap="flat" cmpd="sng" algn="ctr">
                       <a:solidFill>
-                        <a:srgbClr val="DFE3E6"/>
+                        <a:srgbClr val="C6C9CD"/>
                       </a:solidFill>
                       <a:prstDash val="solid"/>
                       <a:round/>
@@ -3986,7 +3932,7 @@
                     </a:lnL>
                     <a:lnR w="6350" cap="flat" cmpd="sng" algn="ctr">
                       <a:solidFill>
-                        <a:srgbClr val="DFE3E6"/>
+                        <a:srgbClr val="C6C9CD"/>
                       </a:solidFill>
                       <a:prstDash val="solid"/>
                       <a:round/>
@@ -3995,7 +3941,7 @@
                     </a:lnR>
                     <a:lnT w="6350" cap="flat" cmpd="sng" algn="ctr">
                       <a:solidFill>
-                        <a:srgbClr val="DFE3E6"/>
+                        <a:srgbClr val="C6C9CD"/>
                       </a:solidFill>
                       <a:prstDash val="solid"/>
                       <a:round/>
@@ -4004,7 +3950,7 @@
                     </a:lnT>
                     <a:lnB w="6350" cap="flat" cmpd="sng" algn="ctr">
                       <a:solidFill>
-                        <a:srgbClr val="DFE3E6"/>
+                        <a:srgbClr val="C6C9CD"/>
                       </a:solidFill>
                       <a:prstDash val="solid"/>
                       <a:round/>
@@ -4027,7 +3973,7 @@
                         <a:buNone/>
                       </a:pPr>
                       <a:r>
-                        <a:rPr lang="en-US" sz="1200" dirty="0">
+                        <a:rPr lang="en-US" sz="900" dirty="0">
                           <a:solidFill>
                             <a:srgbClr val="000000"/>
                           </a:solidFill>
@@ -4037,17 +3983,17 @@
                         </a:rPr>
                         <a:t>$405k</a:t>
                       </a:r>
-                      <a:endParaRPr lang="en-US" sz="1200" dirty="0">
+                      <a:endParaRPr lang="en-US" sz="900" dirty="0">
                         <a:latin typeface="Arial" charset="0"/>
                         <a:ea typeface="Arial" charset="0"/>
                         <a:cs typeface="Arial" charset="0"/>
                       </a:endParaRPr>
                     </a:p>
                   </a:txBody>
-                  <a:tcPr marL="38100" marR="38100" marT="38100" marB="38100" anchor="ctr">
+                  <a:tcPr marL="101600" marR="101600" marT="38100" marB="38100" anchor="ctr">
                     <a:lnL w="6350" cap="flat" cmpd="sng" algn="ctr">
                       <a:solidFill>
-                        <a:srgbClr val="DFE3E6"/>
+                        <a:srgbClr val="C6C9CD"/>
                       </a:solidFill>
                       <a:prstDash val="solid"/>
                       <a:round/>
@@ -4056,7 +4002,7 @@
                     </a:lnL>
                     <a:lnR w="6350" cap="flat" cmpd="sng" algn="ctr">
                       <a:solidFill>
-                        <a:srgbClr val="DFE3E6"/>
+                        <a:srgbClr val="C6C9CD"/>
                       </a:solidFill>
                       <a:prstDash val="solid"/>
                       <a:round/>
@@ -4065,7 +4011,7 @@
                     </a:lnR>
                     <a:lnT w="6350" cap="flat" cmpd="sng" algn="ctr">
                       <a:solidFill>
-                        <a:srgbClr val="DFE3E6"/>
+                        <a:srgbClr val="C6C9CD"/>
                       </a:solidFill>
                       <a:prstDash val="solid"/>
                       <a:round/>
@@ -4074,7 +4020,7 @@
                     </a:lnT>
                     <a:lnB w="6350" cap="flat" cmpd="sng" algn="ctr">
                       <a:solidFill>
-                        <a:srgbClr val="DFE3E6"/>
+                        <a:srgbClr val="C6C9CD"/>
                       </a:solidFill>
                       <a:prstDash val="solid"/>
                       <a:round/>
@@ -4097,7 +4043,7 @@
                         <a:buNone/>
                       </a:pPr>
                       <a:r>
-                        <a:rPr lang="en-US" sz="1200" dirty="0">
+                        <a:rPr lang="en-US" sz="900" dirty="0">
                           <a:solidFill>
                             <a:srgbClr val="000000"/>
                           </a:solidFill>
@@ -4107,17 +4053,17 @@
                         </a:rPr>
                         <a:t>$202.5k</a:t>
                       </a:r>
-                      <a:endParaRPr lang="en-US" sz="1200" dirty="0">
+                      <a:endParaRPr lang="en-US" sz="900" dirty="0">
                         <a:latin typeface="Arial" charset="0"/>
                         <a:ea typeface="Arial" charset="0"/>
                         <a:cs typeface="Arial" charset="0"/>
                       </a:endParaRPr>
                     </a:p>
                   </a:txBody>
-                  <a:tcPr marL="38100" marR="38100" marT="38100" marB="38100" anchor="ctr">
+                  <a:tcPr marL="101600" marR="101600" marT="38100" marB="38100" anchor="ctr">
                     <a:lnL w="6350" cap="flat" cmpd="sng" algn="ctr">
                       <a:solidFill>
-                        <a:srgbClr val="DFE3E6"/>
+                        <a:srgbClr val="C6C9CD"/>
                       </a:solidFill>
                       <a:prstDash val="solid"/>
                       <a:round/>
@@ -4126,7 +4072,7 @@
                     </a:lnL>
                     <a:lnR w="6350" cap="flat" cmpd="sng" algn="ctr">
                       <a:solidFill>
-                        <a:srgbClr val="DFE3E6"/>
+                        <a:srgbClr val="C6C9CD"/>
                       </a:solidFill>
                       <a:prstDash val="solid"/>
                       <a:round/>
@@ -4135,7 +4081,7 @@
                     </a:lnR>
                     <a:lnT w="6350" cap="flat" cmpd="sng" algn="ctr">
                       <a:solidFill>
-                        <a:srgbClr val="DFE3E6"/>
+                        <a:srgbClr val="C6C9CD"/>
                       </a:solidFill>
                       <a:prstDash val="solid"/>
                       <a:round/>
@@ -4144,7 +4090,7 @@
                     </a:lnT>
                     <a:lnB w="6350" cap="flat" cmpd="sng" algn="ctr">
                       <a:solidFill>
-                        <a:srgbClr val="DFE3E6"/>
+                        <a:srgbClr val="C6C9CD"/>
                       </a:solidFill>
                       <a:prstDash val="solid"/>
                       <a:round/>
@@ -4167,7 +4113,7 @@
                         <a:buNone/>
                       </a:pPr>
                       <a:r>
-                        <a:rPr lang="en-US" sz="1200" b="1" dirty="0">
+                        <a:rPr lang="en-US" sz="900" b="1" dirty="0">
                           <a:solidFill>
                             <a:srgbClr val="FD5108"/>
                           </a:solidFill>
@@ -4177,17 +4123,17 @@
                         </a:rPr>
                         <a:t>+$87.5k</a:t>
                       </a:r>
-                      <a:endParaRPr lang="en-US" sz="1200" dirty="0">
+                      <a:endParaRPr lang="en-US" sz="900" dirty="0">
                         <a:latin typeface="Arial" charset="0"/>
                         <a:ea typeface="Arial" charset="0"/>
                         <a:cs typeface="Arial" charset="0"/>
                       </a:endParaRPr>
                     </a:p>
                   </a:txBody>
-                  <a:tcPr marL="38100" marR="38100" marT="38100" marB="38100" anchor="ctr">
+                  <a:tcPr marL="101600" marR="101600" marT="38100" marB="38100" anchor="ctr">
                     <a:lnL w="6350" cap="flat" cmpd="sng" algn="ctr">
                       <a:solidFill>
-                        <a:srgbClr val="DFE3E6"/>
+                        <a:srgbClr val="C6C9CD"/>
                       </a:solidFill>
                       <a:prstDash val="solid"/>
                       <a:round/>
@@ -4196,7 +4142,7 @@
                     </a:lnL>
                     <a:lnR w="6350" cap="flat" cmpd="sng" algn="ctr">
                       <a:solidFill>
-                        <a:srgbClr val="DFE3E6"/>
+                        <a:srgbClr val="C6C9CD"/>
                       </a:solidFill>
                       <a:prstDash val="solid"/>
                       <a:round/>
@@ -4205,7 +4151,7 @@
                     </a:lnR>
                     <a:lnT w="6350" cap="flat" cmpd="sng" algn="ctr">
                       <a:solidFill>
-                        <a:srgbClr val="DFE3E6"/>
+                        <a:srgbClr val="C6C9CD"/>
                       </a:solidFill>
                       <a:prstDash val="solid"/>
                       <a:round/>
@@ -4214,7 +4160,7 @@
                     </a:lnT>
                     <a:lnB w="6350" cap="flat" cmpd="sng" algn="ctr">
                       <a:solidFill>
-                        <a:srgbClr val="DFE3E6"/>
+                        <a:srgbClr val="C6C9CD"/>
                       </a:solidFill>
                       <a:prstDash val="solid"/>
                       <a:round/>
@@ -4233,14 +4179,14 @@
       </p:graphicFrame>
       <p:sp>
         <p:nvSpPr>
-          <p:cNvPr id="11" name="headline"/>
+          <p:cNvPr id="12" name="headline"/>
           <p:cNvSpPr txBox="1"/>
           <p:nvPr/>
         </p:nvSpPr>
         <p:spPr>
           <a:xfrm>
-            <a:off x="304800" y="527050"/>
-            <a:ext cx="11582400" cy="508000"/>
+            <a:off x="292100" y="533400"/>
+            <a:ext cx="11607800" cy="482600"/>
           </a:xfrm>
           <a:prstGeom prst="rect">
             <a:avLst/>
@@ -4278,14 +4224,14 @@
       </p:sp>
       <p:sp>
         <p:nvSpPr>
-          <p:cNvPr id="12" name="subtitle"/>
+          <p:cNvPr id="13" name="subtitle"/>
           <p:cNvSpPr txBox="1"/>
           <p:nvPr/>
         </p:nvSpPr>
         <p:spPr>
           <a:xfrm>
-            <a:off x="304800" y="1060450"/>
-            <a:ext cx="11582400" cy="298450"/>
+            <a:off x="298450" y="1047750"/>
+            <a:ext cx="11588750" cy="304800"/>
           </a:xfrm>
           <a:prstGeom prst="rect">
             <a:avLst/>
@@ -4323,14 +4269,14 @@
       </p:sp>
       <p:sp>
         <p:nvSpPr>
-          <p:cNvPr id="13" name="capacity-heading"/>
+          <p:cNvPr id="14" name="capacity-heading"/>
           <p:cNvSpPr txBox="1"/>
           <p:nvPr/>
         </p:nvSpPr>
         <p:spPr>
           <a:xfrm>
-            <a:off x="260350" y="1682750"/>
-            <a:ext cx="3708400" cy="279400"/>
+            <a:off x="292100" y="1644650"/>
+            <a:ext cx="3460750" cy="241300"/>
           </a:xfrm>
           <a:prstGeom prst="rect">
             <a:avLst/>
@@ -4352,7 +4298,7 @@
               <a:defRPr spc="0"/>
             </a:pPr>
             <a:r>
-              <a:rPr lang="en-US" sz="1400" b="1" dirty="0" spc="0">
+              <a:rPr lang="en-US" sz="1350" b="1" dirty="0" spc="0">
                 <a:solidFill>
                   <a:srgbClr val="000000"/>
                 </a:solidFill>
@@ -4362,20 +4308,131 @@
               </a:rPr>
               <a:t>BASE-CASE CAPACITY MODEL</a:t>
             </a:r>
-            <a:endParaRPr lang="en-US" sz="1400" dirty="0" spc="0"/>
+            <a:endParaRPr lang="en-US" sz="1350" dirty="0" spc="0"/>
           </a:p>
         </p:txBody>
       </p:sp>
       <p:sp>
         <p:nvSpPr>
-          <p:cNvPr id="14" name="investment-heading"/>
+          <p:cNvPr id="15" name="capacity-equation"/>
           <p:cNvSpPr txBox="1"/>
           <p:nvPr/>
         </p:nvSpPr>
         <p:spPr>
           <a:xfrm>
-            <a:off x="4019550" y="1682750"/>
-            <a:ext cx="2393950" cy="279400"/>
+            <a:off x="406400" y="2044700"/>
+            <a:ext cx="3206750" cy="730250"/>
+          </a:xfrm>
+          <a:prstGeom prst="rect">
+            <a:avLst/>
+          </a:prstGeom>
+          <a:noFill/>
+          <a:ln/>
+        </p:spPr>
+        <p:txBody>
+          <a:bodyPr wrap="square" lIns="12700" tIns="12700" rIns="12700" bIns="12700" rtlCol="0" anchor="t">
+            <a:noAutofit/>
+          </a:bodyPr>
+          <a:lstStyle/>
+          <a:p>
+            <a:pPr algn="ctr" indent="0" marL="0">
+              <a:lnSpc>
+                <a:spcPct val="100000"/>
+              </a:lnSpc>
+              <a:buNone/>
+              <a:defRPr spc="0"/>
+            </a:pPr>
+            <a:r>
+              <a:rPr lang="en-US" sz="2150" b="1" dirty="0" spc="0">
+                <a:solidFill>
+                  <a:srgbClr val="FD5108"/>
+                </a:solidFill>
+                <a:latin typeface="Arial" pitchFamily="34" charset="0"/>
+                <a:ea typeface="Arial" pitchFamily="34" charset="-122"/>
+                <a:cs typeface="Arial" pitchFamily="34" charset="-120"/>
+              </a:rPr>
+              <a:t>900 × 12 h × 60% × 30%</a:t>
+            </a:r>
+            <a:endParaRPr lang="en-US" sz="2150" dirty="0" spc="0"/>
+          </a:p>
+          <a:p>
+            <a:pPr algn="ctr" indent="0" marL="0">
+              <a:lnSpc>
+                <a:spcPct val="100000"/>
+              </a:lnSpc>
+              <a:buNone/>
+              <a:defRPr spc="0"/>
+            </a:pPr>
+            <a:r>
+              <a:rPr lang="en-US" sz="2150" b="1" dirty="0" spc="0">
+                <a:solidFill>
+                  <a:srgbClr val="FD5108"/>
+                </a:solidFill>
+                <a:latin typeface="Arial" pitchFamily="34" charset="0"/>
+                <a:ea typeface="Arial" pitchFamily="34" charset="-122"/>
+                <a:cs typeface="Arial" pitchFamily="34" charset="-120"/>
+              </a:rPr>
+              <a:t>= 1,944 h</a:t>
+            </a:r>
+            <a:endParaRPr lang="en-US" sz="2150" dirty="0" spc="0"/>
+          </a:p>
+        </p:txBody>
+      </p:sp>
+      <p:sp>
+        <p:nvSpPr>
+          <p:cNvPr id="16" name="capacity-labels"/>
+          <p:cNvSpPr txBox="1"/>
+          <p:nvPr/>
+        </p:nvSpPr>
+        <p:spPr>
+          <a:xfrm>
+            <a:off x="412750" y="2781300"/>
+            <a:ext cx="3175000" cy="285750"/>
+          </a:xfrm>
+          <a:prstGeom prst="rect">
+            <a:avLst/>
+          </a:prstGeom>
+          <a:noFill/>
+          <a:ln/>
+        </p:spPr>
+        <p:txBody>
+          <a:bodyPr wrap="square" lIns="12700" tIns="12700" rIns="12700" bIns="12700" rtlCol="0" anchor="t">
+            <a:noAutofit/>
+          </a:bodyPr>
+          <a:lstStyle/>
+          <a:p>
+            <a:pPr algn="ctr" indent="0" marL="0">
+              <a:lnSpc>
+                <a:spcPct val="100000"/>
+              </a:lnSpc>
+              <a:buNone/>
+              <a:defRPr spc="0"/>
+            </a:pPr>
+            <a:r>
+              <a:rPr lang="en-US" sz="950" dirty="0" spc="0">
+                <a:solidFill>
+                  <a:srgbClr val="000000"/>
+                </a:solidFill>
+                <a:latin typeface="Arial" pitchFamily="34" charset="0"/>
+                <a:ea typeface="Arial" pitchFamily="34" charset="-122"/>
+                <a:cs typeface="Arial" pitchFamily="34" charset="-120"/>
+              </a:rPr>
+              <a:t>Engagements Research time Adoption Time saved</a:t>
+            </a:r>
+            <a:endParaRPr lang="en-US" sz="950" dirty="0" spc="0"/>
+          </a:p>
+        </p:txBody>
+      </p:sp>
+      <p:sp>
+        <p:nvSpPr>
+          <p:cNvPr id="17" name="capacity-value"/>
+          <p:cNvSpPr txBox="1"/>
+          <p:nvPr/>
+        </p:nvSpPr>
+        <p:spPr>
+          <a:xfrm>
+            <a:off x="412750" y="3390900"/>
+            <a:ext cx="1714500" cy="279400"/>
           </a:xfrm>
           <a:prstGeom prst="rect">
             <a:avLst/>
@@ -4397,7 +4454,7 @@
               <a:defRPr spc="0"/>
             </a:pPr>
             <a:r>
-              <a:rPr lang="en-US" sz="1400" b="1" dirty="0" spc="0">
+              <a:rPr lang="en-US" sz="1350" dirty="0" spc="0">
                 <a:solidFill>
                   <a:srgbClr val="000000"/>
                 </a:solidFill>
@@ -4405,22 +4462,22 @@
                 <a:ea typeface="Arial" pitchFamily="34" charset="-122"/>
                 <a:cs typeface="Arial" pitchFamily="34" charset="-120"/>
               </a:rPr>
-              <a:t>INVESTMENT</a:t>
+              <a:t>1,944 h × $125/h =</a:t>
             </a:r>
-            <a:endParaRPr lang="en-US" sz="1400" dirty="0" spc="0"/>
+            <a:endParaRPr lang="en-US" sz="1350" dirty="0" spc="0"/>
           </a:p>
         </p:txBody>
       </p:sp>
       <p:sp>
         <p:nvSpPr>
-          <p:cNvPr id="15" name="sensitivity-heading"/>
+          <p:cNvPr id="18" name="capacity-value-number"/>
           <p:cNvSpPr txBox="1"/>
           <p:nvPr/>
         </p:nvSpPr>
         <p:spPr>
           <a:xfrm>
-            <a:off x="6737350" y="1682750"/>
-            <a:ext cx="5200650" cy="279400"/>
+            <a:off x="2095500" y="3302000"/>
+            <a:ext cx="1397000" cy="381000"/>
           </a:xfrm>
           <a:prstGeom prst="rect">
             <a:avLst/>
@@ -4442,30 +4499,30 @@
               <a:defRPr spc="0"/>
             </a:pPr>
             <a:r>
-              <a:rPr lang="en-US" sz="1400" b="1" dirty="0" spc="0">
+              <a:rPr lang="en-US" sz="2350" b="1" dirty="0" spc="0">
                 <a:solidFill>
-                  <a:srgbClr val="000000"/>
+                  <a:srgbClr val="FD5108"/>
                 </a:solidFill>
                 <a:latin typeface="Arial" pitchFamily="34" charset="0"/>
                 <a:ea typeface="Arial" pitchFamily="34" charset="-122"/>
                 <a:cs typeface="Arial" pitchFamily="34" charset="-120"/>
               </a:rPr>
-              <a:t>FIRST-YEAR SENSITIVITY · 50% RAMP</a:t>
+              <a:t>$243k</a:t>
             </a:r>
-            <a:endParaRPr lang="en-US" sz="1400" dirty="0" spc="0"/>
+            <a:endParaRPr lang="en-US" sz="2350" dirty="0" spc="0"/>
           </a:p>
         </p:txBody>
       </p:sp>
       <p:sp>
         <p:nvSpPr>
-          <p:cNvPr id="16" name="capacity-term-0"/>
+          <p:cNvPr id="19" name="capacity-caption"/>
           <p:cNvSpPr txBox="1"/>
           <p:nvPr/>
         </p:nvSpPr>
         <p:spPr>
           <a:xfrm>
-            <a:off x="558800" y="2120900"/>
-            <a:ext cx="463550" cy="285750"/>
+            <a:off x="412750" y="3708400"/>
+            <a:ext cx="2984500" cy="215900"/>
           </a:xfrm>
           <a:prstGeom prst="rect">
             <a:avLst/>
@@ -4487,7 +4544,7 @@
               <a:defRPr spc="0"/>
             </a:pPr>
             <a:r>
-              <a:rPr lang="en-US" sz="1400" dirty="0" spc="0">
+              <a:rPr lang="en-US" sz="1100" dirty="0" spc="0">
                 <a:solidFill>
                   <a:srgbClr val="000000"/>
                 </a:solidFill>
@@ -4495,22 +4552,22 @@
                 <a:ea typeface="Arial" pitchFamily="34" charset="-122"/>
                 <a:cs typeface="Arial" pitchFamily="34" charset="-120"/>
               </a:rPr>
-              <a:t>900</a:t>
+              <a:t>annual capacity equivalent</a:t>
             </a:r>
-            <a:endParaRPr lang="en-US" sz="1400" dirty="0" spc="0"/>
+            <a:endParaRPr lang="en-US" sz="1100" dirty="0" spc="0"/>
           </a:p>
         </p:txBody>
       </p:sp>
       <p:sp>
         <p:nvSpPr>
-          <p:cNvPr id="17" name="capacity-term-1"/>
+          <p:cNvPr id="20" name="investment-heading"/>
           <p:cNvSpPr txBox="1"/>
           <p:nvPr/>
         </p:nvSpPr>
         <p:spPr>
           <a:xfrm>
-            <a:off x="1104900" y="2120900"/>
-            <a:ext cx="190500" cy="285750"/>
+            <a:off x="3937000" y="1644650"/>
+            <a:ext cx="3079750" cy="241300"/>
           </a:xfrm>
           <a:prstGeom prst="rect">
             <a:avLst/>
@@ -4532,7 +4589,7 @@
               <a:defRPr spc="0"/>
             </a:pPr>
             <a:r>
-              <a:rPr lang="en-US" sz="1400" dirty="0" spc="0">
+              <a:rPr lang="en-US" sz="1350" b="1" dirty="0" spc="0">
                 <a:solidFill>
                   <a:srgbClr val="000000"/>
                 </a:solidFill>
@@ -4540,22 +4597,22 @@
                 <a:ea typeface="Arial" pitchFamily="34" charset="-122"/>
                 <a:cs typeface="Arial" pitchFamily="34" charset="-120"/>
               </a:rPr>
-              <a:t>×</a:t>
+              <a:t>INVESTMENT</a:t>
             </a:r>
-            <a:endParaRPr lang="en-US" sz="1400" dirty="0" spc="0"/>
+            <a:endParaRPr lang="en-US" sz="1350" dirty="0" spc="0"/>
           </a:p>
         </p:txBody>
       </p:sp>
       <p:sp>
         <p:nvSpPr>
-          <p:cNvPr id="18" name="capacity-term-2"/>
+          <p:cNvPr id="21" name="investment-note"/>
           <p:cNvSpPr txBox="1"/>
           <p:nvPr/>
         </p:nvSpPr>
         <p:spPr>
           <a:xfrm>
-            <a:off x="1384300" y="2120900"/>
-            <a:ext cx="495300" cy="285750"/>
+            <a:off x="3937000" y="3708400"/>
+            <a:ext cx="3079750" cy="228600"/>
           </a:xfrm>
           <a:prstGeom prst="rect">
             <a:avLst/>
@@ -4577,7 +4634,7 @@
               <a:defRPr spc="0"/>
             </a:pPr>
             <a:r>
-              <a:rPr lang="en-US" sz="1400" dirty="0" spc="0">
+              <a:rPr lang="en-US" sz="1050" dirty="0" spc="0">
                 <a:solidFill>
                   <a:srgbClr val="000000"/>
                 </a:solidFill>
@@ -4585,22 +4642,22 @@
                 <a:ea typeface="Arial" pitchFamily="34" charset="-122"/>
                 <a:cs typeface="Arial" pitchFamily="34" charset="-120"/>
               </a:rPr>
-              <a:t>12 h</a:t>
+              <a:t>Remaining implementation after the pilot $60k.</a:t>
             </a:r>
-            <a:endParaRPr lang="en-US" sz="1400" dirty="0" spc="0"/>
+            <a:endParaRPr lang="en-US" sz="1050" dirty="0" spc="0"/>
           </a:p>
         </p:txBody>
       </p:sp>
       <p:sp>
         <p:nvSpPr>
-          <p:cNvPr id="19" name="capacity-term-3"/>
+          <p:cNvPr id="22" name="sensitivity-heading"/>
           <p:cNvSpPr txBox="1"/>
           <p:nvPr/>
         </p:nvSpPr>
         <p:spPr>
           <a:xfrm>
-            <a:off x="1790700" y="2120900"/>
-            <a:ext cx="190500" cy="285750"/>
+            <a:off x="7207250" y="1644650"/>
+            <a:ext cx="4686300" cy="241300"/>
           </a:xfrm>
           <a:prstGeom prst="rect">
             <a:avLst/>
@@ -4622,7 +4679,7 @@
               <a:defRPr spc="0"/>
             </a:pPr>
             <a:r>
-              <a:rPr lang="en-US" sz="1400" dirty="0" spc="0">
+              <a:rPr lang="en-US" sz="1350" b="1" dirty="0" spc="0">
                 <a:solidFill>
                   <a:srgbClr val="000000"/>
                 </a:solidFill>
@@ -4630,22 +4687,22 @@
                 <a:ea typeface="Arial" pitchFamily="34" charset="-122"/>
                 <a:cs typeface="Arial" pitchFamily="34" charset="-120"/>
               </a:rPr>
-              <a:t>×</a:t>
+              <a:t>FIRST-YEAR SENSITIVITY · 50% RAMP</a:t>
             </a:r>
-            <a:endParaRPr lang="en-US" sz="1400" dirty="0" spc="0"/>
+            <a:endParaRPr lang="en-US" sz="1350" dirty="0" spc="0"/>
           </a:p>
         </p:txBody>
       </p:sp>
       <p:sp>
         <p:nvSpPr>
-          <p:cNvPr id="20" name="capacity-term-4"/>
+          <p:cNvPr id="23" name="criteria-heading"/>
           <p:cNvSpPr txBox="1"/>
           <p:nvPr/>
         </p:nvSpPr>
         <p:spPr>
           <a:xfrm>
-            <a:off x="2038350" y="2120900"/>
-            <a:ext cx="476250" cy="285750"/>
+            <a:off x="292100" y="4152900"/>
+            <a:ext cx="5715000" cy="228600"/>
           </a:xfrm>
           <a:prstGeom prst="rect">
             <a:avLst/>
@@ -4667,7 +4724,7 @@
               <a:defRPr spc="0"/>
             </a:pPr>
             <a:r>
-              <a:rPr lang="en-US" sz="1400" dirty="0" spc="0">
+              <a:rPr lang="en-US" sz="1350" b="1" dirty="0" spc="0">
                 <a:solidFill>
                   <a:srgbClr val="000000"/>
                 </a:solidFill>
@@ -4675,22 +4732,22 @@
                 <a:ea typeface="Arial" pitchFamily="34" charset="-122"/>
                 <a:cs typeface="Arial" pitchFamily="34" charset="-120"/>
               </a:rPr>
-              <a:t>60%</a:t>
+              <a:t>DECISION CRITERIA</a:t>
             </a:r>
-            <a:endParaRPr lang="en-US" sz="1400" dirty="0" spc="0"/>
+            <a:endParaRPr lang="en-US" sz="1350" dirty="0" spc="0"/>
           </a:p>
         </p:txBody>
       </p:sp>
       <p:sp>
         <p:nvSpPr>
-          <p:cNvPr id="21" name="capacity-term-5"/>
+          <p:cNvPr id="24" name="criterion-label-go"/>
           <p:cNvSpPr txBox="1"/>
           <p:nvPr/>
         </p:nvSpPr>
         <p:spPr>
           <a:xfrm>
-            <a:off x="2482850" y="2120900"/>
-            <a:ext cx="190500" cy="285750"/>
+            <a:off x="1371600" y="4546600"/>
+            <a:ext cx="1143000" cy="254000"/>
           </a:xfrm>
           <a:prstGeom prst="rect">
             <a:avLst/>
@@ -4712,7 +4769,52 @@
               <a:defRPr spc="0"/>
             </a:pPr>
             <a:r>
-              <a:rPr lang="en-US" sz="1400" dirty="0" spc="0">
+              <a:rPr lang="en-US" sz="1350" b="1" dirty="0" spc="0">
+                <a:solidFill>
+                  <a:srgbClr val="FD5108"/>
+                </a:solidFill>
+                <a:latin typeface="Arial" pitchFamily="34" charset="0"/>
+                <a:ea typeface="Arial" pitchFamily="34" charset="-122"/>
+                <a:cs typeface="Arial" pitchFamily="34" charset="-120"/>
+              </a:rPr>
+              <a:t>GO</a:t>
+            </a:r>
+            <a:endParaRPr lang="en-US" sz="1350" dirty="0" spc="0"/>
+          </a:p>
+        </p:txBody>
+      </p:sp>
+      <p:sp>
+        <p:nvSpPr>
+          <p:cNvPr id="25" name="criterion-body-go"/>
+          <p:cNvSpPr txBox="1"/>
+          <p:nvPr/>
+        </p:nvSpPr>
+        <p:spPr>
+          <a:xfrm>
+            <a:off x="1371600" y="4838700"/>
+            <a:ext cx="2476500" cy="412750"/>
+          </a:xfrm>
+          <a:prstGeom prst="rect">
+            <a:avLst/>
+          </a:prstGeom>
+          <a:noFill/>
+          <a:ln/>
+        </p:spPr>
+        <p:txBody>
+          <a:bodyPr wrap="square" lIns="12700" tIns="12700" rIns="12700" bIns="12700" rtlCol="0" anchor="t">
+            <a:noAutofit/>
+          </a:bodyPr>
+          <a:lstStyle/>
+          <a:p>
+            <a:pPr algn="l" indent="0" marL="0">
+              <a:lnSpc>
+                <a:spcPct val="115000"/>
+              </a:lnSpc>
+              <a:buNone/>
+              <a:defRPr spc="0"/>
+            </a:pPr>
+            <a:r>
+              <a:rPr lang="en-US" sz="1100" dirty="0" spc="0">
                 <a:solidFill>
                   <a:srgbClr val="000000"/>
                 </a:solidFill>
@@ -4720,22 +4822,43 @@
                 <a:ea typeface="Arial" pitchFamily="34" charset="-122"/>
                 <a:cs typeface="Arial" pitchFamily="34" charset="-120"/>
               </a:rPr>
-              <a:t>×</a:t>
+              <a:t>All four gates hold.</a:t>
             </a:r>
-            <a:endParaRPr lang="en-US" sz="1400" dirty="0" spc="0"/>
+            <a:endParaRPr lang="en-US" sz="1100" dirty="0" spc="0"/>
+          </a:p>
+          <a:p>
+            <a:pPr algn="l" indent="0" marL="0">
+              <a:lnSpc>
+                <a:spcPct val="115000"/>
+              </a:lnSpc>
+              <a:buNone/>
+              <a:defRPr spc="0"/>
+            </a:pPr>
+            <a:r>
+              <a:rPr lang="en-US" sz="1100" dirty="0" spc="0">
+                <a:solidFill>
+                  <a:srgbClr val="000000"/>
+                </a:solidFill>
+                <a:latin typeface="Arial" pitchFamily="34" charset="0"/>
+                <a:ea typeface="Arial" pitchFamily="34" charset="-122"/>
+                <a:cs typeface="Arial" pitchFamily="34" charset="-120"/>
+              </a:rPr>
+              <a:t>Practice lead owns rollout.</a:t>
+            </a:r>
+            <a:endParaRPr lang="en-US" sz="1100" dirty="0" spc="0"/>
           </a:p>
         </p:txBody>
       </p:sp>
       <p:sp>
         <p:nvSpPr>
-          <p:cNvPr id="22" name="capacity-term-6"/>
+          <p:cNvPr id="26" name="criterion-label-hold"/>
           <p:cNvSpPr txBox="1"/>
           <p:nvPr/>
         </p:nvSpPr>
         <p:spPr>
           <a:xfrm>
-            <a:off x="2698750" y="2120900"/>
-            <a:ext cx="444500" cy="285750"/>
+            <a:off x="5238750" y="4546600"/>
+            <a:ext cx="1143000" cy="254000"/>
           </a:xfrm>
           <a:prstGeom prst="rect">
             <a:avLst/>
@@ -4757,7 +4880,52 @@
               <a:defRPr spc="0"/>
             </a:pPr>
             <a:r>
-              <a:rPr lang="en-US" sz="1400" dirty="0" spc="0">
+              <a:rPr lang="en-US" sz="1350" b="1" dirty="0" spc="0">
+                <a:solidFill>
+                  <a:srgbClr val="FD5108"/>
+                </a:solidFill>
+                <a:latin typeface="Arial" pitchFamily="34" charset="0"/>
+                <a:ea typeface="Arial" pitchFamily="34" charset="-122"/>
+                <a:cs typeface="Arial" pitchFamily="34" charset="-120"/>
+              </a:rPr>
+              <a:t>HOLD</a:t>
+            </a:r>
+            <a:endParaRPr lang="en-US" sz="1350" dirty="0" spc="0"/>
+          </a:p>
+        </p:txBody>
+      </p:sp>
+      <p:sp>
+        <p:nvSpPr>
+          <p:cNvPr id="27" name="criterion-body-hold"/>
+          <p:cNvSpPr txBox="1"/>
+          <p:nvPr/>
+        </p:nvSpPr>
+        <p:spPr>
+          <a:xfrm>
+            <a:off x="5238750" y="4838700"/>
+            <a:ext cx="2476500" cy="412750"/>
+          </a:xfrm>
+          <a:prstGeom prst="rect">
+            <a:avLst/>
+          </a:prstGeom>
+          <a:noFill/>
+          <a:ln/>
+        </p:spPr>
+        <p:txBody>
+          <a:bodyPr wrap="square" lIns="12700" tIns="12700" rIns="12700" bIns="12700" rtlCol="0" anchor="t">
+            <a:noAutofit/>
+          </a:bodyPr>
+          <a:lstStyle/>
+          <a:p>
+            <a:pPr algn="l" indent="0" marL="0">
+              <a:lnSpc>
+                <a:spcPct val="115000"/>
+              </a:lnSpc>
+              <a:buNone/>
+              <a:defRPr spc="0"/>
+            </a:pPr>
+            <a:r>
+              <a:rPr lang="en-US" sz="1100" dirty="0" spc="0">
                 <a:solidFill>
                   <a:srgbClr val="000000"/>
                 </a:solidFill>
@@ -4765,22 +4933,43 @@
                 <a:ea typeface="Arial" pitchFamily="34" charset="-122"/>
                 <a:cs typeface="Arial" pitchFamily="34" charset="-120"/>
               </a:rPr>
-              <a:t>30%</a:t>
+              <a:t>Evidence or usage is weak.</a:t>
             </a:r>
-            <a:endParaRPr lang="en-US" sz="1400" dirty="0" spc="0"/>
+            <a:endParaRPr lang="en-US" sz="1100" dirty="0" spc="0"/>
+          </a:p>
+          <a:p>
+            <a:pPr algn="l" indent="0" marL="0">
+              <a:lnSpc>
+                <a:spcPct val="115000"/>
+              </a:lnSpc>
+              <a:buNone/>
+              <a:defRPr spc="0"/>
+            </a:pPr>
+            <a:r>
+              <a:rPr lang="en-US" sz="1100" dirty="0" spc="0">
+                <a:solidFill>
+                  <a:srgbClr val="000000"/>
+                </a:solidFill>
+                <a:latin typeface="Arial" pitchFamily="34" charset="0"/>
+                <a:ea typeface="Arial" pitchFamily="34" charset="-122"/>
+                <a:cs typeface="Arial" pitchFamily="34" charset="-120"/>
+              </a:rPr>
+              <a:t>Extend within an agreed cap.</a:t>
+            </a:r>
+            <a:endParaRPr lang="en-US" sz="1100" dirty="0" spc="0"/>
           </a:p>
         </p:txBody>
       </p:sp>
       <p:sp>
         <p:nvSpPr>
-          <p:cNvPr id="23" name="capacity-term-7"/>
+          <p:cNvPr id="28" name="criterion-label-stop"/>
           <p:cNvSpPr txBox="1"/>
           <p:nvPr/>
         </p:nvSpPr>
         <p:spPr>
           <a:xfrm>
-            <a:off x="3124200" y="2120900"/>
-            <a:ext cx="184150" cy="285750"/>
+            <a:off x="9105900" y="4546600"/>
+            <a:ext cx="1143000" cy="254000"/>
           </a:xfrm>
           <a:prstGeom prst="rect">
             <a:avLst/>
@@ -4802,30 +4991,30 @@
               <a:defRPr spc="0"/>
             </a:pPr>
             <a:r>
-              <a:rPr lang="en-US" sz="1400" dirty="0" spc="0">
+              <a:rPr lang="en-US" sz="1350" b="1" dirty="0" spc="0">
                 <a:solidFill>
-                  <a:srgbClr val="000000"/>
+                  <a:srgbClr val="FD5108"/>
                 </a:solidFill>
                 <a:latin typeface="Arial" pitchFamily="34" charset="0"/>
                 <a:ea typeface="Arial" pitchFamily="34" charset="-122"/>
                 <a:cs typeface="Arial" pitchFamily="34" charset="-120"/>
               </a:rPr>
-              <a:t>=</a:t>
+              <a:t>STOP</a:t>
             </a:r>
-            <a:endParaRPr lang="en-US" sz="1400" dirty="0" spc="0"/>
+            <a:endParaRPr lang="en-US" sz="1350" dirty="0" spc="0"/>
           </a:p>
         </p:txBody>
       </p:sp>
       <p:sp>
         <p:nvSpPr>
-          <p:cNvPr id="24" name="capacity-result"/>
+          <p:cNvPr id="29" name="criterion-body-stop"/>
           <p:cNvSpPr txBox="1"/>
           <p:nvPr/>
         </p:nvSpPr>
         <p:spPr>
           <a:xfrm>
-            <a:off x="3289300" y="2120900"/>
-            <a:ext cx="698500" cy="311150"/>
+            <a:off x="9105900" y="4838700"/>
+            <a:ext cx="2476500" cy="412750"/>
           </a:xfrm>
           <a:prstGeom prst="rect">
             <a:avLst/>
@@ -4841,748 +5030,13 @@
           <a:p>
             <a:pPr algn="l" indent="0" marL="0">
               <a:lnSpc>
-                <a:spcPct val="100000"/>
+                <a:spcPct val="115000"/>
               </a:lnSpc>
               <a:buNone/>
               <a:defRPr spc="0"/>
             </a:pPr>
             <a:r>
-              <a:rPr lang="en-US" sz="1400" b="1" dirty="0" spc="0">
-                <a:solidFill>
-                  <a:srgbClr val="FD5108"/>
-                </a:solidFill>
-                <a:latin typeface="Arial" pitchFamily="34" charset="0"/>
-                <a:ea typeface="Arial" pitchFamily="34" charset="-122"/>
-                <a:cs typeface="Arial" pitchFamily="34" charset="-120"/>
-              </a:rPr>
-              <a:t>1,944 h</a:t>
-            </a:r>
-            <a:endParaRPr lang="en-US" sz="1400" dirty="0" spc="0"/>
-          </a:p>
-        </p:txBody>
-      </p:sp>
-      <p:sp>
-        <p:nvSpPr>
-          <p:cNvPr id="25" name="capacity-term-label-0"/>
-          <p:cNvSpPr txBox="1"/>
-          <p:nvPr/>
-        </p:nvSpPr>
-        <p:spPr>
-          <a:xfrm>
-            <a:off x="234950" y="2463800"/>
-            <a:ext cx="1003300" cy="285750"/>
-          </a:xfrm>
-          <a:prstGeom prst="rect">
-            <a:avLst/>
-          </a:prstGeom>
-          <a:noFill/>
-          <a:ln/>
-        </p:spPr>
-        <p:txBody>
-          <a:bodyPr wrap="square" lIns="12700" tIns="12700" rIns="12700" bIns="12700" rtlCol="0" anchor="t">
-            <a:noAutofit/>
-          </a:bodyPr>
-          <a:lstStyle/>
-          <a:p>
-            <a:pPr algn="ctr" indent="0" marL="0">
-              <a:lnSpc>
-                <a:spcPct val="110000"/>
-              </a:lnSpc>
-              <a:buNone/>
-              <a:defRPr spc="0"/>
-            </a:pPr>
-            <a:r>
-              <a:rPr lang="en-US" sz="1200" dirty="0" spc="0">
-                <a:solidFill>
-                  <a:srgbClr val="000000"/>
-                </a:solidFill>
-                <a:latin typeface="Arial" pitchFamily="34" charset="0"/>
-                <a:ea typeface="Arial" pitchFamily="34" charset="-122"/>
-                <a:cs typeface="Arial" pitchFamily="34" charset="-120"/>
-              </a:rPr>
-              <a:t>Engagements</a:t>
-            </a:r>
-            <a:endParaRPr lang="en-US" sz="1200" dirty="0" spc="0"/>
-          </a:p>
-        </p:txBody>
-      </p:sp>
-      <p:sp>
-        <p:nvSpPr>
-          <p:cNvPr id="26" name="capacity-term-label-1"/>
-          <p:cNvSpPr txBox="1"/>
-          <p:nvPr/>
-        </p:nvSpPr>
-        <p:spPr>
-          <a:xfrm>
-            <a:off x="1225550" y="2463800"/>
-            <a:ext cx="704850" cy="431800"/>
-          </a:xfrm>
-          <a:prstGeom prst="rect">
-            <a:avLst/>
-          </a:prstGeom>
-          <a:noFill/>
-          <a:ln/>
-        </p:spPr>
-        <p:txBody>
-          <a:bodyPr wrap="square" lIns="12700" tIns="12700" rIns="12700" bIns="12700" rtlCol="0" anchor="t">
-            <a:noAutofit/>
-          </a:bodyPr>
-          <a:lstStyle/>
-          <a:p>
-            <a:pPr algn="ctr" indent="0" marL="0">
-              <a:lnSpc>
-                <a:spcPct val="110000"/>
-              </a:lnSpc>
-              <a:buNone/>
-              <a:defRPr spc="0"/>
-            </a:pPr>
-            <a:r>
-              <a:rPr lang="en-US" sz="1200" dirty="0" spc="0">
-                <a:solidFill>
-                  <a:srgbClr val="000000"/>
-                </a:solidFill>
-                <a:latin typeface="Arial" pitchFamily="34" charset="0"/>
-                <a:ea typeface="Arial" pitchFamily="34" charset="-122"/>
-                <a:cs typeface="Arial" pitchFamily="34" charset="-120"/>
-              </a:rPr>
-              <a:t>Research</a:t>
-            </a:r>
-            <a:endParaRPr lang="en-US" sz="1200" dirty="0" spc="0"/>
-          </a:p>
-          <a:p>
-            <a:pPr algn="ctr" indent="0" marL="0">
-              <a:lnSpc>
-                <a:spcPct val="110000"/>
-              </a:lnSpc>
-              <a:buNone/>
-              <a:defRPr spc="0"/>
-            </a:pPr>
-            <a:r>
-              <a:rPr lang="en-US" sz="1200" dirty="0" spc="0">
-                <a:solidFill>
-                  <a:srgbClr val="000000"/>
-                </a:solidFill>
-                <a:latin typeface="Arial" pitchFamily="34" charset="0"/>
-                <a:ea typeface="Arial" pitchFamily="34" charset="-122"/>
-                <a:cs typeface="Arial" pitchFamily="34" charset="-120"/>
-              </a:rPr>
-              <a:t>time</a:t>
-            </a:r>
-            <a:endParaRPr lang="en-US" sz="1200" dirty="0" spc="0"/>
-          </a:p>
-        </p:txBody>
-      </p:sp>
-      <p:sp>
-        <p:nvSpPr>
-          <p:cNvPr id="27" name="capacity-term-label-2"/>
-          <p:cNvSpPr txBox="1"/>
-          <p:nvPr/>
-        </p:nvSpPr>
-        <p:spPr>
-          <a:xfrm>
-            <a:off x="1924050" y="2463800"/>
-            <a:ext cx="673100" cy="285750"/>
-          </a:xfrm>
-          <a:prstGeom prst="rect">
-            <a:avLst/>
-          </a:prstGeom>
-          <a:noFill/>
-          <a:ln/>
-        </p:spPr>
-        <p:txBody>
-          <a:bodyPr wrap="square" lIns="12700" tIns="12700" rIns="12700" bIns="12700" rtlCol="0" anchor="t">
-            <a:noAutofit/>
-          </a:bodyPr>
-          <a:lstStyle/>
-          <a:p>
-            <a:pPr algn="ctr" indent="0" marL="0">
-              <a:lnSpc>
-                <a:spcPct val="110000"/>
-              </a:lnSpc>
-              <a:buNone/>
-              <a:defRPr spc="0"/>
-            </a:pPr>
-            <a:r>
-              <a:rPr lang="en-US" sz="1200" dirty="0" spc="0">
-                <a:solidFill>
-                  <a:srgbClr val="000000"/>
-                </a:solidFill>
-                <a:latin typeface="Arial" pitchFamily="34" charset="0"/>
-                <a:ea typeface="Arial" pitchFamily="34" charset="-122"/>
-                <a:cs typeface="Arial" pitchFamily="34" charset="-120"/>
-              </a:rPr>
-              <a:t>Adoption</a:t>
-            </a:r>
-            <a:endParaRPr lang="en-US" sz="1200" dirty="0" spc="0"/>
-          </a:p>
-        </p:txBody>
-      </p:sp>
-      <p:sp>
-        <p:nvSpPr>
-          <p:cNvPr id="28" name="capacity-term-label-3"/>
-          <p:cNvSpPr txBox="1"/>
-          <p:nvPr/>
-        </p:nvSpPr>
-        <p:spPr>
-          <a:xfrm>
-            <a:off x="2647950" y="2463800"/>
-            <a:ext cx="495300" cy="431800"/>
-          </a:xfrm>
-          <a:prstGeom prst="rect">
-            <a:avLst/>
-          </a:prstGeom>
-          <a:noFill/>
-          <a:ln/>
-        </p:spPr>
-        <p:txBody>
-          <a:bodyPr wrap="square" lIns="12700" tIns="12700" rIns="12700" bIns="12700" rtlCol="0" anchor="t">
-            <a:noAutofit/>
-          </a:bodyPr>
-          <a:lstStyle/>
-          <a:p>
-            <a:pPr algn="ctr" indent="0" marL="0">
-              <a:lnSpc>
-                <a:spcPct val="110000"/>
-              </a:lnSpc>
-              <a:buNone/>
-              <a:defRPr spc="0"/>
-            </a:pPr>
-            <a:r>
-              <a:rPr lang="en-US" sz="1200" dirty="0" spc="0">
-                <a:solidFill>
-                  <a:srgbClr val="000000"/>
-                </a:solidFill>
-                <a:latin typeface="Arial" pitchFamily="34" charset="0"/>
-                <a:ea typeface="Arial" pitchFamily="34" charset="-122"/>
-                <a:cs typeface="Arial" pitchFamily="34" charset="-120"/>
-              </a:rPr>
-              <a:t>Time</a:t>
-            </a:r>
-            <a:endParaRPr lang="en-US" sz="1200" dirty="0" spc="0"/>
-          </a:p>
-          <a:p>
-            <a:pPr algn="ctr" indent="0" marL="0">
-              <a:lnSpc>
-                <a:spcPct val="110000"/>
-              </a:lnSpc>
-              <a:buNone/>
-              <a:defRPr spc="0"/>
-            </a:pPr>
-            <a:r>
-              <a:rPr lang="en-US" sz="1200" dirty="0" spc="0">
-                <a:solidFill>
-                  <a:srgbClr val="000000"/>
-                </a:solidFill>
-                <a:latin typeface="Arial" pitchFamily="34" charset="0"/>
-                <a:ea typeface="Arial" pitchFamily="34" charset="-122"/>
-                <a:cs typeface="Arial" pitchFamily="34" charset="-120"/>
-              </a:rPr>
-              <a:t>saved</a:t>
-            </a:r>
-            <a:endParaRPr lang="en-US" sz="1200" dirty="0" spc="0"/>
-          </a:p>
-        </p:txBody>
-      </p:sp>
-      <p:sp>
-        <p:nvSpPr>
-          <p:cNvPr id="29" name="capacity-valuation"/>
-          <p:cNvSpPr txBox="1"/>
-          <p:nvPr/>
-        </p:nvSpPr>
-        <p:spPr>
-          <a:xfrm>
-            <a:off x="247650" y="3270250"/>
-            <a:ext cx="1612900" cy="317500"/>
-          </a:xfrm>
-          <a:prstGeom prst="rect">
-            <a:avLst/>
-          </a:prstGeom>
-          <a:noFill/>
-          <a:ln/>
-        </p:spPr>
-        <p:txBody>
-          <a:bodyPr wrap="square" lIns="12700" tIns="12700" rIns="12700" bIns="12700" rtlCol="0" anchor="t">
-            <a:noAutofit/>
-          </a:bodyPr>
-          <a:lstStyle/>
-          <a:p>
-            <a:pPr algn="l" indent="0" marL="0">
-              <a:lnSpc>
-                <a:spcPct val="100000"/>
-              </a:lnSpc>
-              <a:buNone/>
-              <a:defRPr spc="0"/>
-            </a:pPr>
-            <a:r>
-              <a:rPr lang="en-US" sz="1400" dirty="0" spc="0">
-                <a:solidFill>
-                  <a:srgbClr val="000000"/>
-                </a:solidFill>
-                <a:latin typeface="Arial" pitchFamily="34" charset="0"/>
-                <a:ea typeface="Arial" pitchFamily="34" charset="-122"/>
-                <a:cs typeface="Arial" pitchFamily="34" charset="-120"/>
-              </a:rPr>
-              <a:t>1,944 h × $125/h =</a:t>
-            </a:r>
-            <a:endParaRPr lang="en-US" sz="1400" dirty="0" spc="0"/>
-          </a:p>
-        </p:txBody>
-      </p:sp>
-      <p:sp>
-        <p:nvSpPr>
-          <p:cNvPr id="30" name="capacity-value"/>
-          <p:cNvSpPr txBox="1"/>
-          <p:nvPr/>
-        </p:nvSpPr>
-        <p:spPr>
-          <a:xfrm>
-            <a:off x="1879600" y="3270250"/>
-            <a:ext cx="1555750" cy="317500"/>
-          </a:xfrm>
-          <a:prstGeom prst="rect">
-            <a:avLst/>
-          </a:prstGeom>
-          <a:noFill/>
-          <a:ln/>
-        </p:spPr>
-        <p:txBody>
-          <a:bodyPr wrap="square" lIns="12700" tIns="12700" rIns="12700" bIns="12700" rtlCol="0" anchor="t">
-            <a:noAutofit/>
-          </a:bodyPr>
-          <a:lstStyle/>
-          <a:p>
-            <a:pPr algn="l" indent="0" marL="0">
-              <a:lnSpc>
-                <a:spcPct val="100000"/>
-              </a:lnSpc>
-              <a:buNone/>
-              <a:defRPr spc="0"/>
-            </a:pPr>
-            <a:r>
-              <a:rPr lang="en-US" sz="1400" b="1" dirty="0" spc="0">
-                <a:solidFill>
-                  <a:srgbClr val="FD5108"/>
-                </a:solidFill>
-                <a:latin typeface="Arial" pitchFamily="34" charset="0"/>
-                <a:ea typeface="Arial" pitchFamily="34" charset="-122"/>
-                <a:cs typeface="Arial" pitchFamily="34" charset="-120"/>
-              </a:rPr>
-              <a:t>$243k</a:t>
-            </a:r>
-            <a:endParaRPr lang="en-US" sz="1400" dirty="0" spc="0"/>
-          </a:p>
-        </p:txBody>
-      </p:sp>
-      <p:sp>
-        <p:nvSpPr>
-          <p:cNvPr id="31" name="capacity-equivalent"/>
-          <p:cNvSpPr txBox="1"/>
-          <p:nvPr/>
-        </p:nvSpPr>
-        <p:spPr>
-          <a:xfrm>
-            <a:off x="260350" y="3594100"/>
-            <a:ext cx="3670300" cy="273050"/>
-          </a:xfrm>
-          <a:prstGeom prst="rect">
-            <a:avLst/>
-          </a:prstGeom>
-          <a:noFill/>
-          <a:ln/>
-        </p:spPr>
-        <p:txBody>
-          <a:bodyPr wrap="square" lIns="12700" tIns="12700" rIns="12700" bIns="12700" rtlCol="0" anchor="t">
-            <a:noAutofit/>
-          </a:bodyPr>
-          <a:lstStyle/>
-          <a:p>
-            <a:pPr algn="l" indent="0" marL="0">
-              <a:lnSpc>
-                <a:spcPct val="100000"/>
-              </a:lnSpc>
-              <a:buNone/>
-              <a:defRPr spc="0"/>
-            </a:pPr>
-            <a:r>
-              <a:rPr lang="en-US" sz="1400" dirty="0" spc="0">
-                <a:solidFill>
-                  <a:srgbClr val="000000"/>
-                </a:solidFill>
-                <a:latin typeface="Arial" pitchFamily="34" charset="0"/>
-                <a:ea typeface="Arial" pitchFamily="34" charset="-122"/>
-                <a:cs typeface="Arial" pitchFamily="34" charset="-120"/>
-              </a:rPr>
-              <a:t>annual capacity equivalent</a:t>
-            </a:r>
-            <a:endParaRPr lang="en-US" sz="1400" dirty="0" spc="0"/>
-          </a:p>
-        </p:txBody>
-      </p:sp>
-      <p:sp>
-        <p:nvSpPr>
-          <p:cNvPr id="32" name="remaining-investment"/>
-          <p:cNvSpPr txBox="1"/>
-          <p:nvPr/>
-        </p:nvSpPr>
-        <p:spPr>
-          <a:xfrm>
-            <a:off x="4013200" y="3721100"/>
-            <a:ext cx="2552700" cy="444500"/>
-          </a:xfrm>
-          <a:prstGeom prst="rect">
-            <a:avLst/>
-          </a:prstGeom>
-          <a:noFill/>
-          <a:ln/>
-        </p:spPr>
-        <p:txBody>
-          <a:bodyPr wrap="square" lIns="12700" tIns="12700" rIns="12700" bIns="12700" rtlCol="0" anchor="t">
-            <a:noAutofit/>
-          </a:bodyPr>
-          <a:lstStyle/>
-          <a:p>
-            <a:pPr algn="l" indent="0" marL="0">
-              <a:lnSpc>
-                <a:spcPct val="110000"/>
-              </a:lnSpc>
-              <a:buNone/>
-              <a:defRPr spc="0"/>
-            </a:pPr>
-            <a:r>
-              <a:rPr lang="en-US" sz="1400" dirty="0" spc="0">
-                <a:solidFill>
-                  <a:srgbClr val="000000"/>
-                </a:solidFill>
-                <a:latin typeface="Arial" pitchFamily="34" charset="0"/>
-                <a:ea typeface="Arial" pitchFamily="34" charset="-122"/>
-                <a:cs typeface="Arial" pitchFamily="34" charset="-120"/>
-              </a:rPr>
-              <a:t>Remaining implementation</a:t>
-            </a:r>
-            <a:endParaRPr lang="en-US" sz="1400" dirty="0" spc="0"/>
-          </a:p>
-          <a:p>
-            <a:pPr algn="l" indent="0" marL="0">
-              <a:lnSpc>
-                <a:spcPct val="110000"/>
-              </a:lnSpc>
-              <a:buNone/>
-              <a:defRPr spc="0"/>
-            </a:pPr>
-            <a:r>
-              <a:rPr lang="en-US" sz="1400" dirty="0" spc="0">
-                <a:solidFill>
-                  <a:srgbClr val="000000"/>
-                </a:solidFill>
-                <a:latin typeface="Arial" pitchFamily="34" charset="0"/>
-                <a:ea typeface="Arial" pitchFamily="34" charset="-122"/>
-                <a:cs typeface="Arial" pitchFamily="34" charset="-120"/>
-              </a:rPr>
-              <a:t>after the pilot $60k.</a:t>
-            </a:r>
-            <a:endParaRPr lang="en-US" sz="1400" dirty="0" spc="0"/>
-          </a:p>
-        </p:txBody>
-      </p:sp>
-      <p:sp>
-        <p:nvSpPr>
-          <p:cNvPr id="33" name="criterion-heading-0"/>
-          <p:cNvSpPr txBox="1"/>
-          <p:nvPr/>
-        </p:nvSpPr>
-        <p:spPr>
-          <a:xfrm>
-            <a:off x="831850" y="4368800"/>
-            <a:ext cx="2774950" cy="304800"/>
-          </a:xfrm>
-          <a:prstGeom prst="rect">
-            <a:avLst/>
-          </a:prstGeom>
-          <a:noFill/>
-          <a:ln/>
-        </p:spPr>
-        <p:txBody>
-          <a:bodyPr wrap="square" lIns="12700" tIns="12700" rIns="12700" bIns="12700" rtlCol="0" anchor="t">
-            <a:noAutofit/>
-          </a:bodyPr>
-          <a:lstStyle/>
-          <a:p>
-            <a:pPr algn="l" indent="0" marL="0">
-              <a:lnSpc>
-                <a:spcPct val="100000"/>
-              </a:lnSpc>
-              <a:buNone/>
-              <a:defRPr spc="0"/>
-            </a:pPr>
-            <a:r>
-              <a:rPr lang="en-US" sz="1400" b="1" dirty="0" spc="0">
-                <a:solidFill>
-                  <a:srgbClr val="000000"/>
-                </a:solidFill>
-                <a:latin typeface="Arial" pitchFamily="34" charset="0"/>
-                <a:ea typeface="Arial" pitchFamily="34" charset="-122"/>
-                <a:cs typeface="Arial" pitchFamily="34" charset="-120"/>
-              </a:rPr>
-              <a:t>GO</a:t>
-            </a:r>
-            <a:endParaRPr lang="en-US" sz="1400" dirty="0" spc="0"/>
-          </a:p>
-        </p:txBody>
-      </p:sp>
-      <p:sp>
-        <p:nvSpPr>
-          <p:cNvPr id="34" name="criterion-body-0"/>
-          <p:cNvSpPr txBox="1"/>
-          <p:nvPr/>
-        </p:nvSpPr>
-        <p:spPr>
-          <a:xfrm>
-            <a:off x="831850" y="4699000"/>
-            <a:ext cx="3117850" cy="577850"/>
-          </a:xfrm>
-          <a:prstGeom prst="rect">
-            <a:avLst/>
-          </a:prstGeom>
-          <a:noFill/>
-          <a:ln/>
-        </p:spPr>
-        <p:txBody>
-          <a:bodyPr wrap="square" lIns="12700" tIns="12700" rIns="12700" bIns="12700" rtlCol="0" anchor="t">
-            <a:noAutofit/>
-          </a:bodyPr>
-          <a:lstStyle/>
-          <a:p>
-            <a:pPr algn="l" indent="0" marL="0">
-              <a:lnSpc>
-                <a:spcPct val="135000"/>
-              </a:lnSpc>
-              <a:buNone/>
-              <a:defRPr spc="0"/>
-            </a:pPr>
-            <a:r>
-              <a:rPr lang="en-US" sz="1400" dirty="0" spc="0">
-                <a:solidFill>
-                  <a:srgbClr val="000000"/>
-                </a:solidFill>
-                <a:latin typeface="Arial" pitchFamily="34" charset="0"/>
-                <a:ea typeface="Arial" pitchFamily="34" charset="-122"/>
-                <a:cs typeface="Arial" pitchFamily="34" charset="-120"/>
-              </a:rPr>
-              <a:t>All four gates hold.</a:t>
-            </a:r>
-            <a:endParaRPr lang="en-US" sz="1400" dirty="0" spc="0"/>
-          </a:p>
-          <a:p>
-            <a:pPr algn="l" indent="0" marL="0">
-              <a:lnSpc>
-                <a:spcPct val="135000"/>
-              </a:lnSpc>
-              <a:buNone/>
-              <a:defRPr spc="0"/>
-            </a:pPr>
-            <a:r>
-              <a:rPr lang="en-US" sz="1400" dirty="0" spc="0">
-                <a:solidFill>
-                  <a:srgbClr val="000000"/>
-                </a:solidFill>
-                <a:latin typeface="Arial" pitchFamily="34" charset="0"/>
-                <a:ea typeface="Arial" pitchFamily="34" charset="-122"/>
-                <a:cs typeface="Arial" pitchFamily="34" charset="-120"/>
-              </a:rPr>
-              <a:t>Practice lead owns rollout.</a:t>
-            </a:r>
-            <a:endParaRPr lang="en-US" sz="1400" dirty="0" spc="0"/>
-          </a:p>
-        </p:txBody>
-      </p:sp>
-      <p:sp>
-        <p:nvSpPr>
-          <p:cNvPr id="35" name="criterion-heading-1"/>
-          <p:cNvSpPr txBox="1"/>
-          <p:nvPr/>
-        </p:nvSpPr>
-        <p:spPr>
-          <a:xfrm>
-            <a:off x="4775200" y="4368800"/>
-            <a:ext cx="2774950" cy="304800"/>
-          </a:xfrm>
-          <a:prstGeom prst="rect">
-            <a:avLst/>
-          </a:prstGeom>
-          <a:noFill/>
-          <a:ln/>
-        </p:spPr>
-        <p:txBody>
-          <a:bodyPr wrap="square" lIns="12700" tIns="12700" rIns="12700" bIns="12700" rtlCol="0" anchor="t">
-            <a:noAutofit/>
-          </a:bodyPr>
-          <a:lstStyle/>
-          <a:p>
-            <a:pPr algn="l" indent="0" marL="0">
-              <a:lnSpc>
-                <a:spcPct val="100000"/>
-              </a:lnSpc>
-              <a:buNone/>
-              <a:defRPr spc="0"/>
-            </a:pPr>
-            <a:r>
-              <a:rPr lang="en-US" sz="1400" b="1" dirty="0" spc="0">
-                <a:solidFill>
-                  <a:srgbClr val="000000"/>
-                </a:solidFill>
-                <a:latin typeface="Arial" pitchFamily="34" charset="0"/>
-                <a:ea typeface="Arial" pitchFamily="34" charset="-122"/>
-                <a:cs typeface="Arial" pitchFamily="34" charset="-120"/>
-              </a:rPr>
-              <a:t>HOLD</a:t>
-            </a:r>
-            <a:endParaRPr lang="en-US" sz="1400" dirty="0" spc="0"/>
-          </a:p>
-        </p:txBody>
-      </p:sp>
-      <p:sp>
-        <p:nvSpPr>
-          <p:cNvPr id="36" name="criterion-body-1"/>
-          <p:cNvSpPr txBox="1"/>
-          <p:nvPr/>
-        </p:nvSpPr>
-        <p:spPr>
-          <a:xfrm>
-            <a:off x="4775200" y="4699000"/>
-            <a:ext cx="3117850" cy="577850"/>
-          </a:xfrm>
-          <a:prstGeom prst="rect">
-            <a:avLst/>
-          </a:prstGeom>
-          <a:noFill/>
-          <a:ln/>
-        </p:spPr>
-        <p:txBody>
-          <a:bodyPr wrap="square" lIns="12700" tIns="12700" rIns="12700" bIns="12700" rtlCol="0" anchor="t">
-            <a:noAutofit/>
-          </a:bodyPr>
-          <a:lstStyle/>
-          <a:p>
-            <a:pPr algn="l" indent="0" marL="0">
-              <a:lnSpc>
-                <a:spcPct val="135000"/>
-              </a:lnSpc>
-              <a:buNone/>
-              <a:defRPr spc="0"/>
-            </a:pPr>
-            <a:r>
-              <a:rPr lang="en-US" sz="1400" dirty="0" spc="0">
-                <a:solidFill>
-                  <a:srgbClr val="000000"/>
-                </a:solidFill>
-                <a:latin typeface="Arial" pitchFamily="34" charset="0"/>
-                <a:ea typeface="Arial" pitchFamily="34" charset="-122"/>
-                <a:cs typeface="Arial" pitchFamily="34" charset="-120"/>
-              </a:rPr>
-              <a:t>Evidence or usage is weak.</a:t>
-            </a:r>
-            <a:endParaRPr lang="en-US" sz="1400" dirty="0" spc="0"/>
-          </a:p>
-          <a:p>
-            <a:pPr algn="l" indent="0" marL="0">
-              <a:lnSpc>
-                <a:spcPct val="135000"/>
-              </a:lnSpc>
-              <a:buNone/>
-              <a:defRPr spc="0"/>
-            </a:pPr>
-            <a:r>
-              <a:rPr lang="en-US" sz="1400" dirty="0" spc="0">
-                <a:solidFill>
-                  <a:srgbClr val="000000"/>
-                </a:solidFill>
-                <a:latin typeface="Arial" pitchFamily="34" charset="0"/>
-                <a:ea typeface="Arial" pitchFamily="34" charset="-122"/>
-                <a:cs typeface="Arial" pitchFamily="34" charset="-120"/>
-              </a:rPr>
-              <a:t>Extend within an agreed cap.</a:t>
-            </a:r>
-            <a:endParaRPr lang="en-US" sz="1400" dirty="0" spc="0"/>
-          </a:p>
-        </p:txBody>
-      </p:sp>
-      <p:sp>
-        <p:nvSpPr>
-          <p:cNvPr id="37" name="criterion-heading-2"/>
-          <p:cNvSpPr txBox="1"/>
-          <p:nvPr/>
-        </p:nvSpPr>
-        <p:spPr>
-          <a:xfrm>
-            <a:off x="8763000" y="4368800"/>
-            <a:ext cx="2774950" cy="304800"/>
-          </a:xfrm>
-          <a:prstGeom prst="rect">
-            <a:avLst/>
-          </a:prstGeom>
-          <a:noFill/>
-          <a:ln/>
-        </p:spPr>
-        <p:txBody>
-          <a:bodyPr wrap="square" lIns="12700" tIns="12700" rIns="12700" bIns="12700" rtlCol="0" anchor="t">
-            <a:noAutofit/>
-          </a:bodyPr>
-          <a:lstStyle/>
-          <a:p>
-            <a:pPr algn="l" indent="0" marL="0">
-              <a:lnSpc>
-                <a:spcPct val="100000"/>
-              </a:lnSpc>
-              <a:buNone/>
-              <a:defRPr spc="0"/>
-            </a:pPr>
-            <a:r>
-              <a:rPr lang="en-US" sz="1400" b="1" dirty="0" spc="0">
-                <a:solidFill>
-                  <a:srgbClr val="000000"/>
-                </a:solidFill>
-                <a:latin typeface="Arial" pitchFamily="34" charset="0"/>
-                <a:ea typeface="Arial" pitchFamily="34" charset="-122"/>
-                <a:cs typeface="Arial" pitchFamily="34" charset="-120"/>
-              </a:rPr>
-              <a:t>STOP</a:t>
-            </a:r>
-            <a:endParaRPr lang="en-US" sz="1400" dirty="0" spc="0"/>
-          </a:p>
-        </p:txBody>
-      </p:sp>
-      <p:sp>
-        <p:nvSpPr>
-          <p:cNvPr id="38" name="criterion-body-2"/>
-          <p:cNvSpPr txBox="1"/>
-          <p:nvPr/>
-        </p:nvSpPr>
-        <p:spPr>
-          <a:xfrm>
-            <a:off x="8763000" y="4699000"/>
-            <a:ext cx="3117850" cy="577850"/>
-          </a:xfrm>
-          <a:prstGeom prst="rect">
-            <a:avLst/>
-          </a:prstGeom>
-          <a:noFill/>
-          <a:ln/>
-        </p:spPr>
-        <p:txBody>
-          <a:bodyPr wrap="square" lIns="12700" tIns="12700" rIns="12700" bIns="12700" rtlCol="0" anchor="t">
-            <a:noAutofit/>
-          </a:bodyPr>
-          <a:lstStyle/>
-          <a:p>
-            <a:pPr algn="l" indent="0" marL="0">
-              <a:lnSpc>
-                <a:spcPct val="135000"/>
-              </a:lnSpc>
-              <a:buNone/>
-              <a:defRPr spc="0"/>
-            </a:pPr>
-            <a:r>
-              <a:rPr lang="en-US" sz="1400" dirty="0" spc="0">
+              <a:rPr lang="en-US" sz="1100" dirty="0" spc="0">
                 <a:solidFill>
                   <a:srgbClr val="000000"/>
                 </a:solidFill>
@@ -5592,18 +5046,18 @@
               </a:rPr>
               <a:t>A critical data control fails.</a:t>
             </a:r>
-            <a:endParaRPr lang="en-US" sz="1400" dirty="0" spc="0"/>
+            <a:endParaRPr lang="en-US" sz="1100" dirty="0" spc="0"/>
           </a:p>
           <a:p>
             <a:pPr algn="l" indent="0" marL="0">
               <a:lnSpc>
-                <a:spcPct val="135000"/>
+                <a:spcPct val="115000"/>
               </a:lnSpc>
               <a:buNone/>
               <a:defRPr spc="0"/>
             </a:pPr>
             <a:r>
-              <a:rPr lang="en-US" sz="1400" dirty="0" spc="0">
+              <a:rPr lang="en-US" sz="1100" dirty="0" spc="0">
                 <a:solidFill>
                   <a:srgbClr val="000000"/>
                 </a:solidFill>
@@ -5613,20 +5067,20 @@
               </a:rPr>
               <a:t>Suspend use and close the issue.</a:t>
             </a:r>
-            <a:endParaRPr lang="en-US" sz="1400" dirty="0" spc="0"/>
+            <a:endParaRPr lang="en-US" sz="1100" dirty="0" spc="0"/>
           </a:p>
         </p:txBody>
       </p:sp>
       <p:sp>
         <p:nvSpPr>
-          <p:cNvPr id="39" name="decision-label"/>
+          <p:cNvPr id="30" name="decision-label"/>
           <p:cNvSpPr txBox="1"/>
           <p:nvPr/>
         </p:nvSpPr>
         <p:spPr>
           <a:xfrm>
-            <a:off x="635000" y="5689600"/>
-            <a:ext cx="2667000" cy="330200"/>
+            <a:off x="508000" y="5822950"/>
+            <a:ext cx="2730500" cy="317500"/>
           </a:xfrm>
           <a:prstGeom prst="rect">
             <a:avLst/>
@@ -5664,14 +5118,14 @@
       </p:sp>
       <p:sp>
         <p:nvSpPr>
-          <p:cNvPr id="40" name="decision-message"/>
+          <p:cNvPr id="31" name="decision-message"/>
           <p:cNvSpPr txBox="1"/>
           <p:nvPr/>
         </p:nvSpPr>
         <p:spPr>
           <a:xfrm>
-            <a:off x="3556000" y="5689600"/>
-            <a:ext cx="8032750" cy="330200"/>
+            <a:off x="3302000" y="5822950"/>
+            <a:ext cx="8369300" cy="317500"/>
           </a:xfrm>
           <a:prstGeom prst="rect">
             <a:avLst/>
@@ -5707,9 +5161,99 @@
           </a:p>
         </p:txBody>
       </p:sp>
+      <p:pic>
+        <p:nvPicPr>
+          <p:cNvPr id="32" name="criterion-icon-go" descr="remix-play-circle-line">    </p:cNvPr>
+          <p:cNvPicPr>
+            <a:picLocks noChangeAspect="1"/>
+          </p:cNvPicPr>
+          <p:nvPr/>
+        </p:nvPicPr>
+        <p:blipFill>
+          <a:blip r:embed="rId1">
+            <a:extLst>
+              <a:ext uri="{96DAC541-7B7A-43D3-8B79-37D633B846F1}">
+                <asvg:svgBlip xmlns:asvg="http://schemas.microsoft.com/office/drawing/2016/SVG/main" r:embed="rId2"/>
+              </a:ext>
+            </a:extLst>
+          </a:blip>
+          <a:stretch>
+            <a:fillRect/>
+          </a:stretch>
+        </p:blipFill>
+        <p:spPr>
+          <a:xfrm>
+            <a:off x="508000" y="4591050"/>
+            <a:ext cx="546100" cy="546100"/>
+          </a:xfrm>
+          <a:prstGeom prst="rect">
+            <a:avLst/>
+          </a:prstGeom>
+        </p:spPr>
+      </p:pic>
+      <p:pic>
+        <p:nvPicPr>
+          <p:cNvPr id="33" name="criterion-icon-hold" descr="remix-pause-circle-line">    </p:cNvPr>
+          <p:cNvPicPr>
+            <a:picLocks noChangeAspect="1"/>
+          </p:cNvPicPr>
+          <p:nvPr/>
+        </p:nvPicPr>
+        <p:blipFill>
+          <a:blip r:embed="rId3">
+            <a:extLst>
+              <a:ext uri="{96DAC541-7B7A-43D3-8B79-37D633B846F1}">
+                <asvg:svgBlip xmlns:asvg="http://schemas.microsoft.com/office/drawing/2016/SVG/main" r:embed="rId4"/>
+              </a:ext>
+            </a:extLst>
+          </a:blip>
+          <a:stretch>
+            <a:fillRect/>
+          </a:stretch>
+        </p:blipFill>
+        <p:spPr>
+          <a:xfrm>
+            <a:off x="4375150" y="4591050"/>
+            <a:ext cx="546100" cy="546100"/>
+          </a:xfrm>
+          <a:prstGeom prst="rect">
+            <a:avLst/>
+          </a:prstGeom>
+        </p:spPr>
+      </p:pic>
+      <p:pic>
+        <p:nvPicPr>
+          <p:cNvPr id="34" name="criterion-icon-stop" descr="remix-stop-circle-line">    </p:cNvPr>
+          <p:cNvPicPr>
+            <a:picLocks noChangeAspect="1"/>
+          </p:cNvPicPr>
+          <p:nvPr/>
+        </p:nvPicPr>
+        <p:blipFill>
+          <a:blip r:embed="rId5">
+            <a:extLst>
+              <a:ext uri="{96DAC541-7B7A-43D3-8B79-37D633B846F1}">
+                <asvg:svgBlip xmlns:asvg="http://schemas.microsoft.com/office/drawing/2016/SVG/main" r:embed="rId6"/>
+              </a:ext>
+            </a:extLst>
+          </a:blip>
+          <a:stretch>
+            <a:fillRect/>
+          </a:stretch>
+        </p:blipFill>
+        <p:spPr>
+          <a:xfrm>
+            <a:off x="8242300" y="4591050"/>
+            <a:ext cx="546100" cy="546100"/>
+          </a:xfrm>
+          <a:prstGeom prst="rect">
+            <a:avLst/>
+          </a:prstGeom>
+        </p:spPr>
+      </p:pic>
       <p:sp>
         <p:nvSpPr>
-          <p:cNvPr id="41" name="Slide Number Placeholder 0"/>
+          <p:cNvPr id="35" name="Slide Number Placeholder 0"/>
           <p:cNvSpPr>
             <a:spLocks noGrp="1"/>
           </p:cNvSpPr>

--- a/examples/consulting-ai-transformation/run/slides/s05-investment-decision/deliverables/slide.pptx
+++ b/examples/consulting-ai-transformation/run/slides/s05-investment-decision/deliverables/slide.pptx
@@ -503,7 +503,7 @@
             <a:r>
               <a:rPr lang="en-US" dirty="0"/>
               <a:t>[SlidePoise sources]
-Generated target visual: /private/tmp/.slidepoise-rebuild-h51errnw/slides/s05-investment-decision/work/accepted-slide.png
+Generated target visual: /Users/henry/Codes/AI_slide_drafting/examples/consulting-ai-transformation/run/slides/s05-investment-decision/work/accepted-slide.png
 Canonical asset remix-play-circle-line: /Users/henry/Codes/AI_slide_drafting/examples/consulting-ai-transformation/run/work/icon-cache/play-circle/remix-play-circle-line.svg
 Canonical asset remix-pause-circle-line: /Users/henry/Codes/AI_slide_drafting/examples/consulting-ai-transformation/run/work/icon-cache/pause-circle/remix-pause-circle-line.svg
 Canonical asset remix-stop-circle-line: /Users/henry/Codes/AI_slide_drafting/examples/consulting-ai-transformation/run/work/icon-cache/stop-circle/remix-stop-circle-line.svg</a:t>
@@ -1472,7 +1472,7 @@
                         <a:buNone/>
                       </a:pPr>
                       <a:r>
-                        <a:rPr lang="en-US" sz="1100" b="1" dirty="0">
+                        <a:rPr lang="en-US" sz="1200" b="1" dirty="0">
                           <a:solidFill>
                             <a:srgbClr val="FFFFFF"/>
                           </a:solidFill>
@@ -1482,14 +1482,14 @@
                         </a:rPr>
                         <a:t>Cost item</a:t>
                       </a:r>
-                      <a:endParaRPr lang="en-US" sz="1100" dirty="0">
+                      <a:endParaRPr lang="en-US" sz="1200" dirty="0">
                         <a:latin typeface="Arial" charset="0"/>
                         <a:ea typeface="Arial" charset="0"/>
                         <a:cs typeface="Arial" charset="0"/>
                       </a:endParaRPr>
                     </a:p>
                   </a:txBody>
-                  <a:tcPr marL="101600" marR="101600" marT="38100" marB="38100" anchor="ctr">
+                  <a:tcPr marL="76200" marR="76200" marT="31750" marB="31750" anchor="ctr">
                     <a:lnL w="6350" cap="flat" cmpd="sng" algn="ctr">
                       <a:solidFill>
                         <a:srgbClr val="C6C9CD"/>
@@ -1538,11 +1538,11 @@
                     </a:bodyPr>
                     <a:lstStyle/>
                     <a:p>
-                      <a:pPr algn="ctr" indent="0" marL="0">
+                      <a:pPr algn="l" indent="0" marL="0">
                         <a:buNone/>
                       </a:pPr>
                       <a:r>
-                        <a:rPr lang="en-US" sz="1100" b="1" dirty="0">
+                        <a:rPr lang="en-US" sz="1200" b="1" dirty="0">
                           <a:solidFill>
                             <a:srgbClr val="FFFFFF"/>
                           </a:solidFill>
@@ -1552,14 +1552,14 @@
                         </a:rPr>
                         <a:t>Amount</a:t>
                       </a:r>
-                      <a:endParaRPr lang="en-US" sz="1100" dirty="0">
+                      <a:endParaRPr lang="en-US" sz="1200" dirty="0">
                         <a:latin typeface="Arial" charset="0"/>
                         <a:ea typeface="Arial" charset="0"/>
                         <a:cs typeface="Arial" charset="0"/>
                       </a:endParaRPr>
                     </a:p>
                   </a:txBody>
-                  <a:tcPr marL="101600" marR="101600" marT="38100" marB="38100" anchor="ctr">
+                  <a:tcPr marL="76200" marR="76200" marT="31750" marB="31750" anchor="ctr">
                     <a:lnL w="6350" cap="flat" cmpd="sng" algn="ctr">
                       <a:solidFill>
                         <a:srgbClr val="C6C9CD"/>
@@ -1614,7 +1614,7 @@
                         <a:buNone/>
                       </a:pPr>
                       <a:r>
-                        <a:rPr lang="en-US" sz="1100" b="1" dirty="0">
+                        <a:rPr lang="en-US" sz="1200" dirty="0">
                           <a:solidFill>
                             <a:srgbClr val="000000"/>
                           </a:solidFill>
@@ -1624,14 +1624,14 @@
                         </a:rPr>
                         <a:t>Implementation</a:t>
                       </a:r>
-                      <a:endParaRPr lang="en-US" sz="1100" dirty="0">
+                      <a:endParaRPr lang="en-US" sz="1200" dirty="0">
                         <a:latin typeface="Arial" charset="0"/>
                         <a:ea typeface="Arial" charset="0"/>
                         <a:cs typeface="Arial" charset="0"/>
                       </a:endParaRPr>
                     </a:p>
                   </a:txBody>
-                  <a:tcPr marL="101600" marR="101600" marT="38100" marB="38100" anchor="ctr">
+                  <a:tcPr marL="76200" marR="76200" marT="31750" marB="31750" anchor="ctr">
                     <a:lnL w="6350" cap="flat" cmpd="sng" algn="ctr">
                       <a:solidFill>
                         <a:srgbClr val="C6C9CD"/>
@@ -1680,11 +1680,11 @@
                     </a:bodyPr>
                     <a:lstStyle/>
                     <a:p>
-                      <a:pPr algn="ctr" indent="0" marL="0">
+                      <a:pPr algn="l" indent="0" marL="0">
                         <a:buNone/>
                       </a:pPr>
                       <a:r>
-                        <a:rPr lang="en-US" sz="1100" dirty="0">
+                        <a:rPr lang="en-US" sz="1200" dirty="0">
                           <a:solidFill>
                             <a:srgbClr val="000000"/>
                           </a:solidFill>
@@ -1694,14 +1694,14 @@
                         </a:rPr>
                         <a:t>$85k</a:t>
                       </a:r>
-                      <a:endParaRPr lang="en-US" sz="1100" dirty="0">
+                      <a:endParaRPr lang="en-US" sz="1200" dirty="0">
                         <a:latin typeface="Arial" charset="0"/>
                         <a:ea typeface="Arial" charset="0"/>
                         <a:cs typeface="Arial" charset="0"/>
                       </a:endParaRPr>
                     </a:p>
                   </a:txBody>
-                  <a:tcPr marL="101600" marR="101600" marT="38100" marB="38100" anchor="ctr">
+                  <a:tcPr marL="76200" marR="76200" marT="31750" marB="31750" anchor="ctr">
                     <a:lnL w="6350" cap="flat" cmpd="sng" algn="ctr">
                       <a:solidFill>
                         <a:srgbClr val="C6C9CD"/>
@@ -1756,7 +1756,7 @@
                         <a:buNone/>
                       </a:pPr>
                       <a:r>
-                        <a:rPr lang="en-US" sz="1100" b="1" dirty="0">
+                        <a:rPr lang="en-US" sz="1200" dirty="0">
                           <a:solidFill>
                             <a:srgbClr val="000000"/>
                           </a:solidFill>
@@ -1766,14 +1766,14 @@
                         </a:rPr>
                         <a:t>Pilot included</a:t>
                       </a:r>
-                      <a:endParaRPr lang="en-US" sz="1100" dirty="0">
+                      <a:endParaRPr lang="en-US" sz="1200" dirty="0">
                         <a:latin typeface="Arial" charset="0"/>
                         <a:ea typeface="Arial" charset="0"/>
                         <a:cs typeface="Arial" charset="0"/>
                       </a:endParaRPr>
                     </a:p>
                   </a:txBody>
-                  <a:tcPr marL="101600" marR="101600" marT="38100" marB="38100" anchor="ctr">
+                  <a:tcPr marL="76200" marR="76200" marT="31750" marB="31750" anchor="ctr">
                     <a:lnL w="6350" cap="flat" cmpd="sng" algn="ctr">
                       <a:solidFill>
                         <a:srgbClr val="C6C9CD"/>
@@ -1822,11 +1822,11 @@
                     </a:bodyPr>
                     <a:lstStyle/>
                     <a:p>
-                      <a:pPr algn="ctr" indent="0" marL="0">
+                      <a:pPr algn="l" indent="0" marL="0">
                         <a:buNone/>
                       </a:pPr>
                       <a:r>
-                        <a:rPr lang="en-US" sz="1100" dirty="0">
+                        <a:rPr lang="en-US" sz="1200" dirty="0">
                           <a:solidFill>
                             <a:srgbClr val="000000"/>
                           </a:solidFill>
@@ -1836,14 +1836,14 @@
                         </a:rPr>
                         <a:t>$25k</a:t>
                       </a:r>
-                      <a:endParaRPr lang="en-US" sz="1100" dirty="0">
+                      <a:endParaRPr lang="en-US" sz="1200" dirty="0">
                         <a:latin typeface="Arial" charset="0"/>
                         <a:ea typeface="Arial" charset="0"/>
                         <a:cs typeface="Arial" charset="0"/>
                       </a:endParaRPr>
                     </a:p>
                   </a:txBody>
-                  <a:tcPr marL="101600" marR="101600" marT="38100" marB="38100" anchor="ctr">
+                  <a:tcPr marL="76200" marR="76200" marT="31750" marB="31750" anchor="ctr">
                     <a:lnL w="6350" cap="flat" cmpd="sng" algn="ctr">
                       <a:solidFill>
                         <a:srgbClr val="C6C9CD"/>
@@ -1898,7 +1898,7 @@
                         <a:buNone/>
                       </a:pPr>
                       <a:r>
-                        <a:rPr lang="en-US" sz="1100" b="1" dirty="0">
+                        <a:rPr lang="en-US" sz="1200" dirty="0">
                           <a:solidFill>
                             <a:srgbClr val="000000"/>
                           </a:solidFill>
@@ -1908,14 +1908,14 @@
                         </a:rPr>
                         <a:t>Annual operations</a:t>
                       </a:r>
-                      <a:endParaRPr lang="en-US" sz="1100" dirty="0">
+                      <a:endParaRPr lang="en-US" sz="1200" dirty="0">
                         <a:latin typeface="Arial" charset="0"/>
                         <a:ea typeface="Arial" charset="0"/>
                         <a:cs typeface="Arial" charset="0"/>
                       </a:endParaRPr>
                     </a:p>
                   </a:txBody>
-                  <a:tcPr marL="101600" marR="101600" marT="38100" marB="38100" anchor="ctr">
+                  <a:tcPr marL="76200" marR="76200" marT="31750" marB="31750" anchor="ctr">
                     <a:lnL w="6350" cap="flat" cmpd="sng" algn="ctr">
                       <a:solidFill>
                         <a:srgbClr val="C6C9CD"/>
@@ -1964,11 +1964,11 @@
                     </a:bodyPr>
                     <a:lstStyle/>
                     <a:p>
-                      <a:pPr algn="ctr" indent="0" marL="0">
+                      <a:pPr algn="l" indent="0" marL="0">
                         <a:buNone/>
                       </a:pPr>
                       <a:r>
-                        <a:rPr lang="en-US" sz="1100" dirty="0">
+                        <a:rPr lang="en-US" sz="1200" dirty="0">
                           <a:solidFill>
                             <a:srgbClr val="000000"/>
                           </a:solidFill>
@@ -1978,14 +1978,14 @@
                         </a:rPr>
                         <a:t>$30k</a:t>
                       </a:r>
-                      <a:endParaRPr lang="en-US" sz="1100" dirty="0">
+                      <a:endParaRPr lang="en-US" sz="1200" dirty="0">
                         <a:latin typeface="Arial" charset="0"/>
                         <a:ea typeface="Arial" charset="0"/>
                         <a:cs typeface="Arial" charset="0"/>
                       </a:endParaRPr>
                     </a:p>
                   </a:txBody>
-                  <a:tcPr marL="101600" marR="101600" marT="38100" marB="38100" anchor="ctr">
+                  <a:tcPr marL="76200" marR="76200" marT="31750" marB="31750" anchor="ctr">
                     <a:lnL w="6350" cap="flat" cmpd="sng" algn="ctr">
                       <a:solidFill>
                         <a:srgbClr val="C6C9CD"/>
@@ -2040,7 +2040,7 @@
                         <a:buNone/>
                       </a:pPr>
                       <a:r>
-                        <a:rPr lang="en-US" sz="1100" b="1" dirty="0">
+                        <a:rPr lang="en-US" sz="1200" b="1" dirty="0">
                           <a:solidFill>
                             <a:srgbClr val="000000"/>
                           </a:solidFill>
@@ -2050,14 +2050,14 @@
                         </a:rPr>
                         <a:t>First-year total</a:t>
                       </a:r>
-                      <a:endParaRPr lang="en-US" sz="1100" dirty="0">
+                      <a:endParaRPr lang="en-US" sz="1200" dirty="0">
                         <a:latin typeface="Arial" charset="0"/>
                         <a:ea typeface="Arial" charset="0"/>
                         <a:cs typeface="Arial" charset="0"/>
                       </a:endParaRPr>
                     </a:p>
                   </a:txBody>
-                  <a:tcPr marL="101600" marR="101600" marT="38100" marB="38100" anchor="ctr">
+                  <a:tcPr marL="76200" marR="76200" marT="31750" marB="31750" anchor="ctr">
                     <a:lnL w="6350" cap="flat" cmpd="sng" algn="ctr">
                       <a:solidFill>
                         <a:srgbClr val="C6C9CD"/>
@@ -2106,11 +2106,11 @@
                     </a:bodyPr>
                     <a:lstStyle/>
                     <a:p>
-                      <a:pPr algn="ctr" indent="0" marL="0">
+                      <a:pPr algn="l" indent="0" marL="0">
                         <a:buNone/>
                       </a:pPr>
                       <a:r>
-                        <a:rPr lang="en-US" sz="1100" dirty="0">
+                        <a:rPr lang="en-US" sz="1200" b="1" dirty="0">
                           <a:solidFill>
                             <a:srgbClr val="000000"/>
                           </a:solidFill>
@@ -2120,14 +2120,14 @@
                         </a:rPr>
                         <a:t>$115k</a:t>
                       </a:r>
-                      <a:endParaRPr lang="en-US" sz="1100" dirty="0">
+                      <a:endParaRPr lang="en-US" sz="1200" dirty="0">
                         <a:latin typeface="Arial" charset="0"/>
                         <a:ea typeface="Arial" charset="0"/>
                         <a:cs typeface="Arial" charset="0"/>
                       </a:endParaRPr>
                     </a:p>
                   </a:txBody>
-                  <a:tcPr marL="101600" marR="101600" marT="38100" marB="38100" anchor="ctr">
+                  <a:tcPr marL="76200" marR="76200" marT="31750" marB="31750" anchor="ctr">
                     <a:lnL w="6350" cap="flat" cmpd="sng" algn="ctr">
                       <a:solidFill>
                         <a:srgbClr val="C6C9CD"/>
@@ -2197,13 +2197,13 @@
             <a:tbl>
               <a:tblPr/>
               <a:tblGrid>
-                <a:gridCol w="730250"/>
-                <a:gridCol w="666750"/>
-                <a:gridCol w="603250"/>
+                <a:gridCol w="787400"/>
+                <a:gridCol w="711200"/>
+                <a:gridCol w="622300"/>
+                <a:gridCol w="584200"/>
                 <a:gridCol w="666750"/>
                 <a:gridCol w="685800"/>
-                <a:gridCol w="711200"/>
-                <a:gridCol w="622300"/>
+                <a:gridCol w="628650"/>
               </a:tblGrid>
               <a:tr h="558800">
                 <a:tc>
@@ -2217,7 +2217,7 @@
                         <a:buNone/>
                       </a:pPr>
                       <a:r>
-                        <a:rPr lang="en-US" sz="900" b="1" dirty="0">
+                        <a:rPr lang="en-US" sz="1000" b="1" dirty="0">
                           <a:solidFill>
                             <a:srgbClr val="FFFFFF"/>
                           </a:solidFill>
@@ -2227,14 +2227,14 @@
                         </a:rPr>
                         <a:t>Scenario</a:t>
                       </a:r>
-                      <a:endParaRPr lang="en-US" sz="900" dirty="0">
+                      <a:endParaRPr lang="en-US" sz="1000" dirty="0">
                         <a:latin typeface="Arial" charset="0"/>
                         <a:ea typeface="Arial" charset="0"/>
                         <a:cs typeface="Arial" charset="0"/>
                       </a:endParaRPr>
                     </a:p>
                   </a:txBody>
-                  <a:tcPr marL="101600" marR="101600" marT="38100" marB="38100" anchor="ctr">
+                  <a:tcPr marL="44450" marR="44450" marT="31750" marB="31750" anchor="ctr">
                     <a:lnL w="6350" cap="flat" cmpd="sng" algn="ctr">
                       <a:solidFill>
                         <a:srgbClr val="C6C9CD"/>
@@ -2287,7 +2287,7 @@
                         <a:buNone/>
                       </a:pPr>
                       <a:r>
-                        <a:rPr lang="en-US" sz="900" b="1" dirty="0">
+                        <a:rPr lang="en-US" sz="1000" b="1" dirty="0">
                           <a:solidFill>
                             <a:srgbClr val="FFFFFF"/>
                           </a:solidFill>
@@ -2297,14 +2297,14 @@
                         </a:rPr>
                         <a:t>Adoption</a:t>
                       </a:r>
-                      <a:endParaRPr lang="en-US" sz="900" dirty="0">
+                      <a:endParaRPr lang="en-US" sz="1000" dirty="0">
                         <a:latin typeface="Arial" charset="0"/>
                         <a:ea typeface="Arial" charset="0"/>
                         <a:cs typeface="Arial" charset="0"/>
                       </a:endParaRPr>
                     </a:p>
                   </a:txBody>
-                  <a:tcPr marL="101600" marR="101600" marT="38100" marB="38100" anchor="ctr">
+                  <a:tcPr marL="44450" marR="44450" marT="31750" marB="31750" anchor="ctr">
                     <a:lnL w="6350" cap="flat" cmpd="sng" algn="ctr">
                       <a:solidFill>
                         <a:srgbClr val="C6C9CD"/>
@@ -2357,7 +2357,7 @@
                         <a:buNone/>
                       </a:pPr>
                       <a:r>
-                        <a:rPr lang="en-US" sz="900" b="1" dirty="0">
+                        <a:rPr lang="en-US" sz="1000" b="1" dirty="0">
                           <a:solidFill>
                             <a:srgbClr val="FFFFFF"/>
                           </a:solidFill>
@@ -2365,16 +2365,37 @@
                           <a:ea typeface="Arial" pitchFamily="34" charset="-122"/>
                           <a:cs typeface="Arial" pitchFamily="34" charset="-120"/>
                         </a:rPr>
-                        <a:t>Time saved</a:t>
+                        <a:t>Time</a:t>
                       </a:r>
-                      <a:endParaRPr lang="en-US" sz="900" dirty="0">
+                      <a:endParaRPr lang="en-US" sz="1000" dirty="0">
+                        <a:latin typeface="Arial" charset="0"/>
+                        <a:ea typeface="Arial" charset="0"/>
+                        <a:cs typeface="Arial" charset="0"/>
+                      </a:endParaRPr>
+                    </a:p>
+                    <a:p>
+                      <a:pPr algn="ctr" indent="0" marL="0">
+                        <a:buNone/>
+                      </a:pPr>
+                      <a:r>
+                        <a:rPr lang="en-US" sz="1000" b="1" dirty="0">
+                          <a:solidFill>
+                            <a:srgbClr val="FFFFFF"/>
+                          </a:solidFill>
+                          <a:latin typeface="Arial" pitchFamily="34" charset="0"/>
+                          <a:ea typeface="Arial" pitchFamily="34" charset="-122"/>
+                          <a:cs typeface="Arial" pitchFamily="34" charset="-120"/>
+                        </a:rPr>
+                        <a:t>saved</a:t>
+                      </a:r>
+                      <a:endParaRPr lang="en-US" sz="1000" dirty="0">
                         <a:latin typeface="Arial" charset="0"/>
                         <a:ea typeface="Arial" charset="0"/>
                         <a:cs typeface="Arial" charset="0"/>
                       </a:endParaRPr>
                     </a:p>
                   </a:txBody>
-                  <a:tcPr marL="101600" marR="101600" marT="38100" marB="38100" anchor="ctr">
+                  <a:tcPr marL="44450" marR="44450" marT="31750" marB="31750" anchor="ctr">
                     <a:lnL w="6350" cap="flat" cmpd="sng" algn="ctr">
                       <a:solidFill>
                         <a:srgbClr val="C6C9CD"/>
@@ -2427,7 +2448,7 @@
                         <a:buNone/>
                       </a:pPr>
                       <a:r>
-                        <a:rPr lang="en-US" sz="900" b="1" dirty="0">
+                        <a:rPr lang="en-US" sz="1000" b="1" dirty="0">
                           <a:solidFill>
                             <a:srgbClr val="FFFFFF"/>
                           </a:solidFill>
@@ -2437,14 +2458,14 @@
                         </a:rPr>
                         <a:t>Annual h</a:t>
                       </a:r>
-                      <a:endParaRPr lang="en-US" sz="900" dirty="0">
+                      <a:endParaRPr lang="en-US" sz="1000" dirty="0">
                         <a:latin typeface="Arial" charset="0"/>
                         <a:ea typeface="Arial" charset="0"/>
                         <a:cs typeface="Arial" charset="0"/>
                       </a:endParaRPr>
                     </a:p>
                   </a:txBody>
-                  <a:tcPr marL="101600" marR="101600" marT="38100" marB="38100" anchor="ctr">
+                  <a:tcPr marL="44450" marR="44450" marT="31750" marB="31750" anchor="ctr">
                     <a:lnL w="6350" cap="flat" cmpd="sng" algn="ctr">
                       <a:solidFill>
                         <a:srgbClr val="C6C9CD"/>
@@ -2497,7 +2518,7 @@
                         <a:buNone/>
                       </a:pPr>
                       <a:r>
-                        <a:rPr lang="en-US" sz="900" b="1" dirty="0">
+                        <a:rPr lang="en-US" sz="1000" b="1" dirty="0">
                           <a:solidFill>
                             <a:srgbClr val="FFFFFF"/>
                           </a:solidFill>
@@ -2505,16 +2526,37 @@
                           <a:ea typeface="Arial" pitchFamily="34" charset="-122"/>
                           <a:cs typeface="Arial" pitchFamily="34" charset="-120"/>
                         </a:rPr>
-                        <a:t>Annual capacity</a:t>
+                        <a:t>Annual</a:t>
                       </a:r>
-                      <a:endParaRPr lang="en-US" sz="900" dirty="0">
+                      <a:endParaRPr lang="en-US" sz="1000" dirty="0">
+                        <a:latin typeface="Arial" charset="0"/>
+                        <a:ea typeface="Arial" charset="0"/>
+                        <a:cs typeface="Arial" charset="0"/>
+                      </a:endParaRPr>
+                    </a:p>
+                    <a:p>
+                      <a:pPr algn="ctr" indent="0" marL="0">
+                        <a:buNone/>
+                      </a:pPr>
+                      <a:r>
+                        <a:rPr lang="en-US" sz="1000" b="1" dirty="0">
+                          <a:solidFill>
+                            <a:srgbClr val="FFFFFF"/>
+                          </a:solidFill>
+                          <a:latin typeface="Arial" pitchFamily="34" charset="0"/>
+                          <a:ea typeface="Arial" pitchFamily="34" charset="-122"/>
+                          <a:cs typeface="Arial" pitchFamily="34" charset="-120"/>
+                        </a:rPr>
+                        <a:t>capacity</a:t>
+                      </a:r>
+                      <a:endParaRPr lang="en-US" sz="1000" dirty="0">
                         <a:latin typeface="Arial" charset="0"/>
                         <a:ea typeface="Arial" charset="0"/>
                         <a:cs typeface="Arial" charset="0"/>
                       </a:endParaRPr>
                     </a:p>
                   </a:txBody>
-                  <a:tcPr marL="101600" marR="101600" marT="38100" marB="38100" anchor="ctr">
+                  <a:tcPr marL="44450" marR="44450" marT="31750" marB="31750" anchor="ctr">
                     <a:lnL w="6350" cap="flat" cmpd="sng" algn="ctr">
                       <a:solidFill>
                         <a:srgbClr val="C6C9CD"/>
@@ -2567,7 +2609,7 @@
                         <a:buNone/>
                       </a:pPr>
                       <a:r>
-                        <a:rPr lang="en-US" sz="900" b="1" dirty="0">
+                        <a:rPr lang="en-US" sz="1000" b="1" dirty="0">
                           <a:solidFill>
                             <a:srgbClr val="FFFFFF"/>
                           </a:solidFill>
@@ -2575,16 +2617,37 @@
                           <a:ea typeface="Arial" pitchFamily="34" charset="-122"/>
                           <a:cs typeface="Arial" pitchFamily="34" charset="-120"/>
                         </a:rPr>
-                        <a:t>First-year value</a:t>
+                        <a:t>First-year</a:t>
                       </a:r>
-                      <a:endParaRPr lang="en-US" sz="900" dirty="0">
+                      <a:endParaRPr lang="en-US" sz="1000" dirty="0">
+                        <a:latin typeface="Arial" charset="0"/>
+                        <a:ea typeface="Arial" charset="0"/>
+                        <a:cs typeface="Arial" charset="0"/>
+                      </a:endParaRPr>
+                    </a:p>
+                    <a:p>
+                      <a:pPr algn="ctr" indent="0" marL="0">
+                        <a:buNone/>
+                      </a:pPr>
+                      <a:r>
+                        <a:rPr lang="en-US" sz="1000" b="1" dirty="0">
+                          <a:solidFill>
+                            <a:srgbClr val="FFFFFF"/>
+                          </a:solidFill>
+                          <a:latin typeface="Arial" pitchFamily="34" charset="0"/>
+                          <a:ea typeface="Arial" pitchFamily="34" charset="-122"/>
+                          <a:cs typeface="Arial" pitchFamily="34" charset="-120"/>
+                        </a:rPr>
+                        <a:t>value</a:t>
+                      </a:r>
+                      <a:endParaRPr lang="en-US" sz="1000" dirty="0">
                         <a:latin typeface="Arial" charset="0"/>
                         <a:ea typeface="Arial" charset="0"/>
                         <a:cs typeface="Arial" charset="0"/>
                       </a:endParaRPr>
                     </a:p>
                   </a:txBody>
-                  <a:tcPr marL="101600" marR="101600" marT="38100" marB="38100" anchor="ctr">
+                  <a:tcPr marL="44450" marR="44450" marT="31750" marB="31750" anchor="ctr">
                     <a:lnL w="6350" cap="flat" cmpd="sng" algn="ctr">
                       <a:solidFill>
                         <a:srgbClr val="C6C9CD"/>
@@ -2637,7 +2700,7 @@
                         <a:buNone/>
                       </a:pPr>
                       <a:r>
-                        <a:rPr lang="en-US" sz="900" b="1" dirty="0">
+                        <a:rPr lang="en-US" sz="1000" b="1" dirty="0">
                           <a:solidFill>
                             <a:srgbClr val="FFFFFF"/>
                           </a:solidFill>
@@ -2645,16 +2708,37 @@
                           <a:ea typeface="Arial" pitchFamily="34" charset="-122"/>
                           <a:cs typeface="Arial" pitchFamily="34" charset="-120"/>
                         </a:rPr>
-                        <a:t>Net vs $115k</a:t>
+                        <a:t>Net vs</a:t>
                       </a:r>
-                      <a:endParaRPr lang="en-US" sz="900" dirty="0">
+                      <a:endParaRPr lang="en-US" sz="1000" dirty="0">
+                        <a:latin typeface="Arial" charset="0"/>
+                        <a:ea typeface="Arial" charset="0"/>
+                        <a:cs typeface="Arial" charset="0"/>
+                      </a:endParaRPr>
+                    </a:p>
+                    <a:p>
+                      <a:pPr algn="ctr" indent="0" marL="0">
+                        <a:buNone/>
+                      </a:pPr>
+                      <a:r>
+                        <a:rPr lang="en-US" sz="1000" b="1" dirty="0">
+                          <a:solidFill>
+                            <a:srgbClr val="FFFFFF"/>
+                          </a:solidFill>
+                          <a:latin typeface="Arial" pitchFamily="34" charset="0"/>
+                          <a:ea typeface="Arial" pitchFamily="34" charset="-122"/>
+                          <a:cs typeface="Arial" pitchFamily="34" charset="-120"/>
+                        </a:rPr>
+                        <a:t>$115k</a:t>
+                      </a:r>
+                      <a:endParaRPr lang="en-US" sz="1000" dirty="0">
                         <a:latin typeface="Arial" charset="0"/>
                         <a:ea typeface="Arial" charset="0"/>
                         <a:cs typeface="Arial" charset="0"/>
                       </a:endParaRPr>
                     </a:p>
                   </a:txBody>
-                  <a:tcPr marL="101600" marR="101600" marT="38100" marB="38100" anchor="ctr">
+                  <a:tcPr marL="44450" marR="44450" marT="31750" marB="31750" anchor="ctr">
                     <a:lnL w="6350" cap="flat" cmpd="sng" algn="ctr">
                       <a:solidFill>
                         <a:srgbClr val="C6C9CD"/>
@@ -2709,7 +2793,7 @@
                         <a:buNone/>
                       </a:pPr>
                       <a:r>
-                        <a:rPr lang="en-US" sz="900" b="1" dirty="0">
+                        <a:rPr lang="en-US" sz="1000" b="1" dirty="0">
                           <a:solidFill>
                             <a:srgbClr val="000000"/>
                           </a:solidFill>
@@ -2719,14 +2803,14 @@
                         </a:rPr>
                         <a:t>Downside</a:t>
                       </a:r>
-                      <a:endParaRPr lang="en-US" sz="900" dirty="0">
+                      <a:endParaRPr lang="en-US" sz="1000" dirty="0">
                         <a:latin typeface="Arial" charset="0"/>
                         <a:ea typeface="Arial" charset="0"/>
                         <a:cs typeface="Arial" charset="0"/>
                       </a:endParaRPr>
                     </a:p>
                   </a:txBody>
-                  <a:tcPr marL="101600" marR="101600" marT="38100" marB="38100" anchor="ctr">
+                  <a:tcPr marL="44450" marR="44450" marT="31750" marB="31750" anchor="ctr">
                     <a:lnL w="6350" cap="flat" cmpd="sng" algn="ctr">
                       <a:solidFill>
                         <a:srgbClr val="C6C9CD"/>
@@ -2779,7 +2863,7 @@
                         <a:buNone/>
                       </a:pPr>
                       <a:r>
-                        <a:rPr lang="en-US" sz="900" dirty="0">
+                        <a:rPr lang="en-US" sz="1000" dirty="0">
                           <a:solidFill>
                             <a:srgbClr val="000000"/>
                           </a:solidFill>
@@ -2789,14 +2873,14 @@
                         </a:rPr>
                         <a:t>40%</a:t>
                       </a:r>
-                      <a:endParaRPr lang="en-US" sz="900" dirty="0">
+                      <a:endParaRPr lang="en-US" sz="1000" dirty="0">
                         <a:latin typeface="Arial" charset="0"/>
                         <a:ea typeface="Arial" charset="0"/>
                         <a:cs typeface="Arial" charset="0"/>
                       </a:endParaRPr>
                     </a:p>
                   </a:txBody>
-                  <a:tcPr marL="101600" marR="101600" marT="38100" marB="38100" anchor="ctr">
+                  <a:tcPr marL="44450" marR="44450" marT="31750" marB="31750" anchor="ctr">
                     <a:lnL w="6350" cap="flat" cmpd="sng" algn="ctr">
                       <a:solidFill>
                         <a:srgbClr val="C6C9CD"/>
@@ -2849,7 +2933,7 @@
                         <a:buNone/>
                       </a:pPr>
                       <a:r>
-                        <a:rPr lang="en-US" sz="900" dirty="0">
+                        <a:rPr lang="en-US" sz="1000" dirty="0">
                           <a:solidFill>
                             <a:srgbClr val="000000"/>
                           </a:solidFill>
@@ -2859,14 +2943,14 @@
                         </a:rPr>
                         <a:t>20%</a:t>
                       </a:r>
-                      <a:endParaRPr lang="en-US" sz="900" dirty="0">
+                      <a:endParaRPr lang="en-US" sz="1000" dirty="0">
                         <a:latin typeface="Arial" charset="0"/>
                         <a:ea typeface="Arial" charset="0"/>
                         <a:cs typeface="Arial" charset="0"/>
                       </a:endParaRPr>
                     </a:p>
                   </a:txBody>
-                  <a:tcPr marL="101600" marR="101600" marT="38100" marB="38100" anchor="ctr">
+                  <a:tcPr marL="44450" marR="44450" marT="31750" marB="31750" anchor="ctr">
                     <a:lnL w="6350" cap="flat" cmpd="sng" algn="ctr">
                       <a:solidFill>
                         <a:srgbClr val="C6C9CD"/>
@@ -2919,7 +3003,7 @@
                         <a:buNone/>
                       </a:pPr>
                       <a:r>
-                        <a:rPr lang="en-US" sz="900" dirty="0">
+                        <a:rPr lang="en-US" sz="1000" dirty="0">
                           <a:solidFill>
                             <a:srgbClr val="000000"/>
                           </a:solidFill>
@@ -2929,14 +3013,14 @@
                         </a:rPr>
                         <a:t>864</a:t>
                       </a:r>
-                      <a:endParaRPr lang="en-US" sz="900" dirty="0">
+                      <a:endParaRPr lang="en-US" sz="1000" dirty="0">
                         <a:latin typeface="Arial" charset="0"/>
                         <a:ea typeface="Arial" charset="0"/>
                         <a:cs typeface="Arial" charset="0"/>
                       </a:endParaRPr>
                     </a:p>
                   </a:txBody>
-                  <a:tcPr marL="101600" marR="101600" marT="38100" marB="38100" anchor="ctr">
+                  <a:tcPr marL="44450" marR="44450" marT="31750" marB="31750" anchor="ctr">
                     <a:lnL w="6350" cap="flat" cmpd="sng" algn="ctr">
                       <a:solidFill>
                         <a:srgbClr val="C6C9CD"/>
@@ -2989,7 +3073,7 @@
                         <a:buNone/>
                       </a:pPr>
                       <a:r>
-                        <a:rPr lang="en-US" sz="900" dirty="0">
+                        <a:rPr lang="en-US" sz="1000" dirty="0">
                           <a:solidFill>
                             <a:srgbClr val="000000"/>
                           </a:solidFill>
@@ -2999,14 +3083,14 @@
                         </a:rPr>
                         <a:t>$108k</a:t>
                       </a:r>
-                      <a:endParaRPr lang="en-US" sz="900" dirty="0">
+                      <a:endParaRPr lang="en-US" sz="1000" dirty="0">
                         <a:latin typeface="Arial" charset="0"/>
                         <a:ea typeface="Arial" charset="0"/>
                         <a:cs typeface="Arial" charset="0"/>
                       </a:endParaRPr>
                     </a:p>
                   </a:txBody>
-                  <a:tcPr marL="101600" marR="101600" marT="38100" marB="38100" anchor="ctr">
+                  <a:tcPr marL="44450" marR="44450" marT="31750" marB="31750" anchor="ctr">
                     <a:lnL w="6350" cap="flat" cmpd="sng" algn="ctr">
                       <a:solidFill>
                         <a:srgbClr val="C6C9CD"/>
@@ -3059,7 +3143,7 @@
                         <a:buNone/>
                       </a:pPr>
                       <a:r>
-                        <a:rPr lang="en-US" sz="900" dirty="0">
+                        <a:rPr lang="en-US" sz="1000" dirty="0">
                           <a:solidFill>
                             <a:srgbClr val="000000"/>
                           </a:solidFill>
@@ -3069,14 +3153,14 @@
                         </a:rPr>
                         <a:t>$54k</a:t>
                       </a:r>
-                      <a:endParaRPr lang="en-US" sz="900" dirty="0">
+                      <a:endParaRPr lang="en-US" sz="1000" dirty="0">
                         <a:latin typeface="Arial" charset="0"/>
                         <a:ea typeface="Arial" charset="0"/>
                         <a:cs typeface="Arial" charset="0"/>
                       </a:endParaRPr>
                     </a:p>
                   </a:txBody>
-                  <a:tcPr marL="101600" marR="101600" marT="38100" marB="38100" anchor="ctr">
+                  <a:tcPr marL="44450" marR="44450" marT="31750" marB="31750" anchor="ctr">
                     <a:lnL w="6350" cap="flat" cmpd="sng" algn="ctr">
                       <a:solidFill>
                         <a:srgbClr val="C6C9CD"/>
@@ -3129,7 +3213,7 @@
                         <a:buNone/>
                       </a:pPr>
                       <a:r>
-                        <a:rPr lang="en-US" sz="900" b="1" dirty="0">
+                        <a:rPr lang="en-US" sz="1000" b="1" dirty="0">
                           <a:solidFill>
                             <a:srgbClr val="FD5108"/>
                           </a:solidFill>
@@ -3139,14 +3223,14 @@
                         </a:rPr>
                         <a:t>−$61k</a:t>
                       </a:r>
-                      <a:endParaRPr lang="en-US" sz="900" dirty="0">
+                      <a:endParaRPr lang="en-US" sz="1000" dirty="0">
                         <a:latin typeface="Arial" charset="0"/>
                         <a:ea typeface="Arial" charset="0"/>
                         <a:cs typeface="Arial" charset="0"/>
                       </a:endParaRPr>
                     </a:p>
                   </a:txBody>
-                  <a:tcPr marL="101600" marR="101600" marT="38100" marB="38100" anchor="ctr">
+                  <a:tcPr marL="44450" marR="44450" marT="31750" marB="31750" anchor="ctr">
                     <a:lnL w="6350" cap="flat" cmpd="sng" algn="ctr">
                       <a:solidFill>
                         <a:srgbClr val="C6C9CD"/>
@@ -3201,7 +3285,7 @@
                         <a:buNone/>
                       </a:pPr>
                       <a:r>
-                        <a:rPr lang="en-US" sz="900" b="1" dirty="0">
+                        <a:rPr lang="en-US" sz="1000" b="1" dirty="0">
                           <a:solidFill>
                             <a:srgbClr val="000000"/>
                           </a:solidFill>
@@ -3211,14 +3295,14 @@
                         </a:rPr>
                         <a:t>Base</a:t>
                       </a:r>
-                      <a:endParaRPr lang="en-US" sz="900" dirty="0">
+                      <a:endParaRPr lang="en-US" sz="1000" dirty="0">
                         <a:latin typeface="Arial" charset="0"/>
                         <a:ea typeface="Arial" charset="0"/>
                         <a:cs typeface="Arial" charset="0"/>
                       </a:endParaRPr>
                     </a:p>
                   </a:txBody>
-                  <a:tcPr marL="101600" marR="101600" marT="38100" marB="38100" anchor="ctr">
+                  <a:tcPr marL="44450" marR="44450" marT="31750" marB="31750" anchor="ctr">
                     <a:lnL w="6350" cap="flat" cmpd="sng" algn="ctr">
                       <a:solidFill>
                         <a:srgbClr val="C6C9CD"/>
@@ -3271,7 +3355,7 @@
                         <a:buNone/>
                       </a:pPr>
                       <a:r>
-                        <a:rPr lang="en-US" sz="900" dirty="0">
+                        <a:rPr lang="en-US" sz="1000" dirty="0">
                           <a:solidFill>
                             <a:srgbClr val="000000"/>
                           </a:solidFill>
@@ -3281,14 +3365,14 @@
                         </a:rPr>
                         <a:t>60%</a:t>
                       </a:r>
-                      <a:endParaRPr lang="en-US" sz="900" dirty="0">
+                      <a:endParaRPr lang="en-US" sz="1000" dirty="0">
                         <a:latin typeface="Arial" charset="0"/>
                         <a:ea typeface="Arial" charset="0"/>
                         <a:cs typeface="Arial" charset="0"/>
                       </a:endParaRPr>
                     </a:p>
                   </a:txBody>
-                  <a:tcPr marL="101600" marR="101600" marT="38100" marB="38100" anchor="ctr">
+                  <a:tcPr marL="44450" marR="44450" marT="31750" marB="31750" anchor="ctr">
                     <a:lnL w="6350" cap="flat" cmpd="sng" algn="ctr">
                       <a:solidFill>
                         <a:srgbClr val="C6C9CD"/>
@@ -3341,7 +3425,7 @@
                         <a:buNone/>
                       </a:pPr>
                       <a:r>
-                        <a:rPr lang="en-US" sz="900" dirty="0">
+                        <a:rPr lang="en-US" sz="1000" dirty="0">
                           <a:solidFill>
                             <a:srgbClr val="000000"/>
                           </a:solidFill>
@@ -3351,14 +3435,14 @@
                         </a:rPr>
                         <a:t>30%</a:t>
                       </a:r>
-                      <a:endParaRPr lang="en-US" sz="900" dirty="0">
+                      <a:endParaRPr lang="en-US" sz="1000" dirty="0">
                         <a:latin typeface="Arial" charset="0"/>
                         <a:ea typeface="Arial" charset="0"/>
                         <a:cs typeface="Arial" charset="0"/>
                       </a:endParaRPr>
                     </a:p>
                   </a:txBody>
-                  <a:tcPr marL="101600" marR="101600" marT="38100" marB="38100" anchor="ctr">
+                  <a:tcPr marL="44450" marR="44450" marT="31750" marB="31750" anchor="ctr">
                     <a:lnL w="6350" cap="flat" cmpd="sng" algn="ctr">
                       <a:solidFill>
                         <a:srgbClr val="C6C9CD"/>
@@ -3411,7 +3495,7 @@
                         <a:buNone/>
                       </a:pPr>
                       <a:r>
-                        <a:rPr lang="en-US" sz="900" dirty="0">
+                        <a:rPr lang="en-US" sz="1000" dirty="0">
                           <a:solidFill>
                             <a:srgbClr val="000000"/>
                           </a:solidFill>
@@ -3421,14 +3505,14 @@
                         </a:rPr>
                         <a:t>1,944</a:t>
                       </a:r>
-                      <a:endParaRPr lang="en-US" sz="900" dirty="0">
+                      <a:endParaRPr lang="en-US" sz="1000" dirty="0">
                         <a:latin typeface="Arial" charset="0"/>
                         <a:ea typeface="Arial" charset="0"/>
                         <a:cs typeface="Arial" charset="0"/>
                       </a:endParaRPr>
                     </a:p>
                   </a:txBody>
-                  <a:tcPr marL="101600" marR="101600" marT="38100" marB="38100" anchor="ctr">
+                  <a:tcPr marL="44450" marR="44450" marT="31750" marB="31750" anchor="ctr">
                     <a:lnL w="6350" cap="flat" cmpd="sng" algn="ctr">
                       <a:solidFill>
                         <a:srgbClr val="C6C9CD"/>
@@ -3481,7 +3565,7 @@
                         <a:buNone/>
                       </a:pPr>
                       <a:r>
-                        <a:rPr lang="en-US" sz="900" dirty="0">
+                        <a:rPr lang="en-US" sz="1000" dirty="0">
                           <a:solidFill>
                             <a:srgbClr val="000000"/>
                           </a:solidFill>
@@ -3491,14 +3575,14 @@
                         </a:rPr>
                         <a:t>$243k</a:t>
                       </a:r>
-                      <a:endParaRPr lang="en-US" sz="900" dirty="0">
+                      <a:endParaRPr lang="en-US" sz="1000" dirty="0">
                         <a:latin typeface="Arial" charset="0"/>
                         <a:ea typeface="Arial" charset="0"/>
                         <a:cs typeface="Arial" charset="0"/>
                       </a:endParaRPr>
                     </a:p>
                   </a:txBody>
-                  <a:tcPr marL="101600" marR="101600" marT="38100" marB="38100" anchor="ctr">
+                  <a:tcPr marL="44450" marR="44450" marT="31750" marB="31750" anchor="ctr">
                     <a:lnL w="6350" cap="flat" cmpd="sng" algn="ctr">
                       <a:solidFill>
                         <a:srgbClr val="C6C9CD"/>
@@ -3551,7 +3635,7 @@
                         <a:buNone/>
                       </a:pPr>
                       <a:r>
-                        <a:rPr lang="en-US" sz="900" dirty="0">
+                        <a:rPr lang="en-US" sz="1000" dirty="0">
                           <a:solidFill>
                             <a:srgbClr val="000000"/>
                           </a:solidFill>
@@ -3561,14 +3645,14 @@
                         </a:rPr>
                         <a:t>$121.5k</a:t>
                       </a:r>
-                      <a:endParaRPr lang="en-US" sz="900" dirty="0">
+                      <a:endParaRPr lang="en-US" sz="1000" dirty="0">
                         <a:latin typeface="Arial" charset="0"/>
                         <a:ea typeface="Arial" charset="0"/>
                         <a:cs typeface="Arial" charset="0"/>
                       </a:endParaRPr>
                     </a:p>
                   </a:txBody>
-                  <a:tcPr marL="101600" marR="101600" marT="38100" marB="38100" anchor="ctr">
+                  <a:tcPr marL="44450" marR="44450" marT="31750" marB="31750" anchor="ctr">
                     <a:lnL w="6350" cap="flat" cmpd="sng" algn="ctr">
                       <a:solidFill>
                         <a:srgbClr val="C6C9CD"/>
@@ -3621,7 +3705,7 @@
                         <a:buNone/>
                       </a:pPr>
                       <a:r>
-                        <a:rPr lang="en-US" sz="900" b="1" dirty="0">
+                        <a:rPr lang="en-US" sz="1000" b="1" dirty="0">
                           <a:solidFill>
                             <a:srgbClr val="FD5108"/>
                           </a:solidFill>
@@ -3631,14 +3715,14 @@
                         </a:rPr>
                         <a:t>+$6.5k</a:t>
                       </a:r>
-                      <a:endParaRPr lang="en-US" sz="900" dirty="0">
+                      <a:endParaRPr lang="en-US" sz="1000" dirty="0">
                         <a:latin typeface="Arial" charset="0"/>
                         <a:ea typeface="Arial" charset="0"/>
                         <a:cs typeface="Arial" charset="0"/>
                       </a:endParaRPr>
                     </a:p>
                   </a:txBody>
-                  <a:tcPr marL="101600" marR="101600" marT="38100" marB="38100" anchor="ctr">
+                  <a:tcPr marL="44450" marR="44450" marT="31750" marB="31750" anchor="ctr">
                     <a:lnL w="6350" cap="flat" cmpd="sng" algn="ctr">
                       <a:solidFill>
                         <a:srgbClr val="C6C9CD"/>
@@ -3693,7 +3777,7 @@
                         <a:buNone/>
                       </a:pPr>
                       <a:r>
-                        <a:rPr lang="en-US" sz="900" b="1" dirty="0">
+                        <a:rPr lang="en-US" sz="1000" b="1" dirty="0">
                           <a:solidFill>
                             <a:srgbClr val="000000"/>
                           </a:solidFill>
@@ -3703,14 +3787,14 @@
                         </a:rPr>
                         <a:t>Upside</a:t>
                       </a:r>
-                      <a:endParaRPr lang="en-US" sz="900" dirty="0">
+                      <a:endParaRPr lang="en-US" sz="1000" dirty="0">
                         <a:latin typeface="Arial" charset="0"/>
                         <a:ea typeface="Arial" charset="0"/>
                         <a:cs typeface="Arial" charset="0"/>
                       </a:endParaRPr>
                     </a:p>
                   </a:txBody>
-                  <a:tcPr marL="101600" marR="101600" marT="38100" marB="38100" anchor="ctr">
+                  <a:tcPr marL="44450" marR="44450" marT="31750" marB="31750" anchor="ctr">
                     <a:lnL w="6350" cap="flat" cmpd="sng" algn="ctr">
                       <a:solidFill>
                         <a:srgbClr val="C6C9CD"/>
@@ -3763,7 +3847,7 @@
                         <a:buNone/>
                       </a:pPr>
                       <a:r>
-                        <a:rPr lang="en-US" sz="900" dirty="0">
+                        <a:rPr lang="en-US" sz="1000" dirty="0">
                           <a:solidFill>
                             <a:srgbClr val="000000"/>
                           </a:solidFill>
@@ -3773,14 +3857,14 @@
                         </a:rPr>
                         <a:t>75%</a:t>
                       </a:r>
-                      <a:endParaRPr lang="en-US" sz="900" dirty="0">
+                      <a:endParaRPr lang="en-US" sz="1000" dirty="0">
                         <a:latin typeface="Arial" charset="0"/>
                         <a:ea typeface="Arial" charset="0"/>
                         <a:cs typeface="Arial" charset="0"/>
                       </a:endParaRPr>
                     </a:p>
                   </a:txBody>
-                  <a:tcPr marL="101600" marR="101600" marT="38100" marB="38100" anchor="ctr">
+                  <a:tcPr marL="44450" marR="44450" marT="31750" marB="31750" anchor="ctr">
                     <a:lnL w="6350" cap="flat" cmpd="sng" algn="ctr">
                       <a:solidFill>
                         <a:srgbClr val="C6C9CD"/>
@@ -3833,7 +3917,7 @@
                         <a:buNone/>
                       </a:pPr>
                       <a:r>
-                        <a:rPr lang="en-US" sz="900" dirty="0">
+                        <a:rPr lang="en-US" sz="1000" dirty="0">
                           <a:solidFill>
                             <a:srgbClr val="000000"/>
                           </a:solidFill>
@@ -3843,14 +3927,14 @@
                         </a:rPr>
                         <a:t>40%</a:t>
                       </a:r>
-                      <a:endParaRPr lang="en-US" sz="900" dirty="0">
+                      <a:endParaRPr lang="en-US" sz="1000" dirty="0">
                         <a:latin typeface="Arial" charset="0"/>
                         <a:ea typeface="Arial" charset="0"/>
                         <a:cs typeface="Arial" charset="0"/>
                       </a:endParaRPr>
                     </a:p>
                   </a:txBody>
-                  <a:tcPr marL="101600" marR="101600" marT="38100" marB="38100" anchor="ctr">
+                  <a:tcPr marL="44450" marR="44450" marT="31750" marB="31750" anchor="ctr">
                     <a:lnL w="6350" cap="flat" cmpd="sng" algn="ctr">
                       <a:solidFill>
                         <a:srgbClr val="C6C9CD"/>
@@ -3903,7 +3987,7 @@
                         <a:buNone/>
                       </a:pPr>
                       <a:r>
-                        <a:rPr lang="en-US" sz="900" dirty="0">
+                        <a:rPr lang="en-US" sz="1000" dirty="0">
                           <a:solidFill>
                             <a:srgbClr val="000000"/>
                           </a:solidFill>
@@ -3913,14 +3997,14 @@
                         </a:rPr>
                         <a:t>3,240</a:t>
                       </a:r>
-                      <a:endParaRPr lang="en-US" sz="900" dirty="0">
+                      <a:endParaRPr lang="en-US" sz="1000" dirty="0">
                         <a:latin typeface="Arial" charset="0"/>
                         <a:ea typeface="Arial" charset="0"/>
                         <a:cs typeface="Arial" charset="0"/>
                       </a:endParaRPr>
                     </a:p>
                   </a:txBody>
-                  <a:tcPr marL="101600" marR="101600" marT="38100" marB="38100" anchor="ctr">
+                  <a:tcPr marL="44450" marR="44450" marT="31750" marB="31750" anchor="ctr">
                     <a:lnL w="6350" cap="flat" cmpd="sng" algn="ctr">
                       <a:solidFill>
                         <a:srgbClr val="C6C9CD"/>
@@ -3973,7 +4057,7 @@
                         <a:buNone/>
                       </a:pPr>
                       <a:r>
-                        <a:rPr lang="en-US" sz="900" dirty="0">
+                        <a:rPr lang="en-US" sz="1000" dirty="0">
                           <a:solidFill>
                             <a:srgbClr val="000000"/>
                           </a:solidFill>
@@ -3983,14 +4067,14 @@
                         </a:rPr>
                         <a:t>$405k</a:t>
                       </a:r>
-                      <a:endParaRPr lang="en-US" sz="900" dirty="0">
+                      <a:endParaRPr lang="en-US" sz="1000" dirty="0">
                         <a:latin typeface="Arial" charset="0"/>
                         <a:ea typeface="Arial" charset="0"/>
                         <a:cs typeface="Arial" charset="0"/>
                       </a:endParaRPr>
                     </a:p>
                   </a:txBody>
-                  <a:tcPr marL="101600" marR="101600" marT="38100" marB="38100" anchor="ctr">
+                  <a:tcPr marL="44450" marR="44450" marT="31750" marB="31750" anchor="ctr">
                     <a:lnL w="6350" cap="flat" cmpd="sng" algn="ctr">
                       <a:solidFill>
                         <a:srgbClr val="C6C9CD"/>
@@ -4043,7 +4127,7 @@
                         <a:buNone/>
                       </a:pPr>
                       <a:r>
-                        <a:rPr lang="en-US" sz="900" dirty="0">
+                        <a:rPr lang="en-US" sz="1000" dirty="0">
                           <a:solidFill>
                             <a:srgbClr val="000000"/>
                           </a:solidFill>
@@ -4053,14 +4137,14 @@
                         </a:rPr>
                         <a:t>$202.5k</a:t>
                       </a:r>
-                      <a:endParaRPr lang="en-US" sz="900" dirty="0">
+                      <a:endParaRPr lang="en-US" sz="1000" dirty="0">
                         <a:latin typeface="Arial" charset="0"/>
                         <a:ea typeface="Arial" charset="0"/>
                         <a:cs typeface="Arial" charset="0"/>
                       </a:endParaRPr>
                     </a:p>
                   </a:txBody>
-                  <a:tcPr marL="101600" marR="101600" marT="38100" marB="38100" anchor="ctr">
+                  <a:tcPr marL="44450" marR="44450" marT="31750" marB="31750" anchor="ctr">
                     <a:lnL w="6350" cap="flat" cmpd="sng" algn="ctr">
                       <a:solidFill>
                         <a:srgbClr val="C6C9CD"/>
@@ -4113,7 +4197,7 @@
                         <a:buNone/>
                       </a:pPr>
                       <a:r>
-                        <a:rPr lang="en-US" sz="900" b="1" dirty="0">
+                        <a:rPr lang="en-US" sz="1000" b="1" dirty="0">
                           <a:solidFill>
                             <a:srgbClr val="FD5108"/>
                           </a:solidFill>
@@ -4123,14 +4207,14 @@
                         </a:rPr>
                         <a:t>+$87.5k</a:t>
                       </a:r>
-                      <a:endParaRPr lang="en-US" sz="900" dirty="0">
+                      <a:endParaRPr lang="en-US" sz="1000" dirty="0">
                         <a:latin typeface="Arial" charset="0"/>
                         <a:ea typeface="Arial" charset="0"/>
                         <a:cs typeface="Arial" charset="0"/>
                       </a:endParaRPr>
                     </a:p>
                   </a:txBody>
-                  <a:tcPr marL="101600" marR="101600" marT="38100" marB="38100" anchor="ctr">
+                  <a:tcPr marL="44450" marR="44450" marT="31750" marB="31750" anchor="ctr">
                     <a:lnL w="6350" cap="flat" cmpd="sng" algn="ctr">
                       <a:solidFill>
                         <a:srgbClr val="C6C9CD"/>
@@ -4298,7 +4382,7 @@
               <a:defRPr spc="0"/>
             </a:pPr>
             <a:r>
-              <a:rPr lang="en-US" sz="1350" b="1" dirty="0" spc="0">
+              <a:rPr lang="en-US" sz="1400" b="1" dirty="0" spc="0">
                 <a:solidFill>
                   <a:srgbClr val="000000"/>
                 </a:solidFill>
@@ -4308,7 +4392,7 @@
               </a:rPr>
               <a:t>BASE-CASE CAPACITY MODEL</a:t>
             </a:r>
-            <a:endParaRPr lang="en-US" sz="1350" dirty="0" spc="0"/>
+            <a:endParaRPr lang="en-US" sz="1400" dirty="0" spc="0"/>
           </a:p>
         </p:txBody>
       </p:sp>
@@ -4380,52 +4464,7 @@
       </p:sp>
       <p:sp>
         <p:nvSpPr>
-          <p:cNvPr id="16" name="capacity-labels"/>
-          <p:cNvSpPr txBox="1"/>
-          <p:nvPr/>
-        </p:nvSpPr>
-        <p:spPr>
-          <a:xfrm>
-            <a:off x="412750" y="2781300"/>
-            <a:ext cx="3175000" cy="285750"/>
-          </a:xfrm>
-          <a:prstGeom prst="rect">
-            <a:avLst/>
-          </a:prstGeom>
-          <a:noFill/>
-          <a:ln/>
-        </p:spPr>
-        <p:txBody>
-          <a:bodyPr wrap="square" lIns="12700" tIns="12700" rIns="12700" bIns="12700" rtlCol="0" anchor="t">
-            <a:noAutofit/>
-          </a:bodyPr>
-          <a:lstStyle/>
-          <a:p>
-            <a:pPr algn="ctr" indent="0" marL="0">
-              <a:lnSpc>
-                <a:spcPct val="100000"/>
-              </a:lnSpc>
-              <a:buNone/>
-              <a:defRPr spc="0"/>
-            </a:pPr>
-            <a:r>
-              <a:rPr lang="en-US" sz="950" dirty="0" spc="0">
-                <a:solidFill>
-                  <a:srgbClr val="000000"/>
-                </a:solidFill>
-                <a:latin typeface="Arial" pitchFamily="34" charset="0"/>
-                <a:ea typeface="Arial" pitchFamily="34" charset="-122"/>
-                <a:cs typeface="Arial" pitchFamily="34" charset="-120"/>
-              </a:rPr>
-              <a:t>Engagements Research time Adoption Time saved</a:t>
-            </a:r>
-            <a:endParaRPr lang="en-US" sz="950" dirty="0" spc="0"/>
-          </a:p>
-        </p:txBody>
-      </p:sp>
-      <p:sp>
-        <p:nvSpPr>
-          <p:cNvPr id="17" name="capacity-value"/>
+          <p:cNvPr id="16" name="capacity-value"/>
           <p:cNvSpPr txBox="1"/>
           <p:nvPr/>
         </p:nvSpPr>
@@ -4454,7 +4493,7 @@
               <a:defRPr spc="0"/>
             </a:pPr>
             <a:r>
-              <a:rPr lang="en-US" sz="1350" dirty="0" spc="0">
+              <a:rPr lang="en-US" sz="1400" dirty="0" spc="0">
                 <a:solidFill>
                   <a:srgbClr val="000000"/>
                 </a:solidFill>
@@ -4464,13 +4503,13 @@
               </a:rPr>
               <a:t>1,944 h × $125/h =</a:t>
             </a:r>
-            <a:endParaRPr lang="en-US" sz="1350" dirty="0" spc="0"/>
+            <a:endParaRPr lang="en-US" sz="1400" dirty="0" spc="0"/>
           </a:p>
         </p:txBody>
       </p:sp>
       <p:sp>
         <p:nvSpPr>
-          <p:cNvPr id="18" name="capacity-value-number"/>
+          <p:cNvPr id="17" name="capacity-value-number"/>
           <p:cNvSpPr txBox="1"/>
           <p:nvPr/>
         </p:nvSpPr>
@@ -4499,7 +4538,7 @@
               <a:defRPr spc="0"/>
             </a:pPr>
             <a:r>
-              <a:rPr lang="en-US" sz="2350" b="1" dirty="0" spc="0">
+              <a:rPr lang="en-US" sz="2650" b="1" dirty="0" spc="0">
                 <a:solidFill>
                   <a:srgbClr val="FD5108"/>
                 </a:solidFill>
@@ -4509,13 +4548,13 @@
               </a:rPr>
               <a:t>$243k</a:t>
             </a:r>
-            <a:endParaRPr lang="en-US" sz="2350" dirty="0" spc="0"/>
+            <a:endParaRPr lang="en-US" sz="2650" dirty="0" spc="0"/>
           </a:p>
         </p:txBody>
       </p:sp>
       <p:sp>
         <p:nvSpPr>
-          <p:cNvPr id="19" name="capacity-caption"/>
+          <p:cNvPr id="18" name="capacity-caption"/>
           <p:cNvSpPr txBox="1"/>
           <p:nvPr/>
         </p:nvSpPr>
@@ -4523,6 +4562,96 @@
           <a:xfrm>
             <a:off x="412750" y="3708400"/>
             <a:ext cx="2984500" cy="215900"/>
+          </a:xfrm>
+          <a:prstGeom prst="rect">
+            <a:avLst/>
+          </a:prstGeom>
+          <a:noFill/>
+          <a:ln/>
+        </p:spPr>
+        <p:txBody>
+          <a:bodyPr wrap="square" lIns="12700" tIns="12700" rIns="12700" bIns="12700" rtlCol="0" anchor="t">
+            <a:noAutofit/>
+          </a:bodyPr>
+          <a:lstStyle/>
+          <a:p>
+            <a:pPr algn="l" indent="0" marL="0">
+              <a:lnSpc>
+                <a:spcPct val="100000"/>
+              </a:lnSpc>
+              <a:buNone/>
+              <a:defRPr spc="0"/>
+            </a:pPr>
+            <a:r>
+              <a:rPr lang="en-US" sz="1300" dirty="0" spc="0">
+                <a:solidFill>
+                  <a:srgbClr val="000000"/>
+                </a:solidFill>
+                <a:latin typeface="Arial" pitchFamily="34" charset="0"/>
+                <a:ea typeface="Arial" pitchFamily="34" charset="-122"/>
+                <a:cs typeface="Arial" pitchFamily="34" charset="-120"/>
+              </a:rPr>
+              <a:t>annual capacity equivalent</a:t>
+            </a:r>
+            <a:endParaRPr lang="en-US" sz="1300" dirty="0" spc="0"/>
+          </a:p>
+        </p:txBody>
+      </p:sp>
+      <p:sp>
+        <p:nvSpPr>
+          <p:cNvPr id="19" name="investment-heading"/>
+          <p:cNvSpPr txBox="1"/>
+          <p:nvPr/>
+        </p:nvSpPr>
+        <p:spPr>
+          <a:xfrm>
+            <a:off x="3937000" y="1644650"/>
+            <a:ext cx="3079750" cy="241300"/>
+          </a:xfrm>
+          <a:prstGeom prst="rect">
+            <a:avLst/>
+          </a:prstGeom>
+          <a:noFill/>
+          <a:ln/>
+        </p:spPr>
+        <p:txBody>
+          <a:bodyPr wrap="square" lIns="12700" tIns="12700" rIns="12700" bIns="12700" rtlCol="0" anchor="t">
+            <a:noAutofit/>
+          </a:bodyPr>
+          <a:lstStyle/>
+          <a:p>
+            <a:pPr algn="l" indent="0" marL="0">
+              <a:lnSpc>
+                <a:spcPct val="100000"/>
+              </a:lnSpc>
+              <a:buNone/>
+              <a:defRPr spc="0"/>
+            </a:pPr>
+            <a:r>
+              <a:rPr lang="en-US" sz="1400" b="1" dirty="0" spc="0">
+                <a:solidFill>
+                  <a:srgbClr val="000000"/>
+                </a:solidFill>
+                <a:latin typeface="Arial" pitchFamily="34" charset="0"/>
+                <a:ea typeface="Arial" pitchFamily="34" charset="-122"/>
+                <a:cs typeface="Arial" pitchFamily="34" charset="-120"/>
+              </a:rPr>
+              <a:t>INVESTMENT</a:t>
+            </a:r>
+            <a:endParaRPr lang="en-US" sz="1400" dirty="0" spc="0"/>
+          </a:p>
+        </p:txBody>
+      </p:sp>
+      <p:sp>
+        <p:nvSpPr>
+          <p:cNvPr id="20" name="investment-note"/>
+          <p:cNvSpPr txBox="1"/>
+          <p:nvPr/>
+        </p:nvSpPr>
+        <p:spPr>
+          <a:xfrm>
+            <a:off x="3937000" y="3708400"/>
+            <a:ext cx="3079750" cy="228600"/>
           </a:xfrm>
           <a:prstGeom prst="rect">
             <a:avLst/>
@@ -4552,7 +4681,7 @@
                 <a:ea typeface="Arial" pitchFamily="34" charset="-122"/>
                 <a:cs typeface="Arial" pitchFamily="34" charset="-120"/>
               </a:rPr>
-              <a:t>annual capacity equivalent</a:t>
+              <a:t>Remaining implementation after the pilot $60k.</a:t>
             </a:r>
             <a:endParaRPr lang="en-US" sz="1100" dirty="0" spc="0"/>
           </a:p>
@@ -4560,97 +4689,7 @@
       </p:sp>
       <p:sp>
         <p:nvSpPr>
-          <p:cNvPr id="20" name="investment-heading"/>
-          <p:cNvSpPr txBox="1"/>
-          <p:nvPr/>
-        </p:nvSpPr>
-        <p:spPr>
-          <a:xfrm>
-            <a:off x="3937000" y="1644650"/>
-            <a:ext cx="3079750" cy="241300"/>
-          </a:xfrm>
-          <a:prstGeom prst="rect">
-            <a:avLst/>
-          </a:prstGeom>
-          <a:noFill/>
-          <a:ln/>
-        </p:spPr>
-        <p:txBody>
-          <a:bodyPr wrap="square" lIns="12700" tIns="12700" rIns="12700" bIns="12700" rtlCol="0" anchor="t">
-            <a:noAutofit/>
-          </a:bodyPr>
-          <a:lstStyle/>
-          <a:p>
-            <a:pPr algn="l" indent="0" marL="0">
-              <a:lnSpc>
-                <a:spcPct val="100000"/>
-              </a:lnSpc>
-              <a:buNone/>
-              <a:defRPr spc="0"/>
-            </a:pPr>
-            <a:r>
-              <a:rPr lang="en-US" sz="1350" b="1" dirty="0" spc="0">
-                <a:solidFill>
-                  <a:srgbClr val="000000"/>
-                </a:solidFill>
-                <a:latin typeface="Arial" pitchFamily="34" charset="0"/>
-                <a:ea typeface="Arial" pitchFamily="34" charset="-122"/>
-                <a:cs typeface="Arial" pitchFamily="34" charset="-120"/>
-              </a:rPr>
-              <a:t>INVESTMENT</a:t>
-            </a:r>
-            <a:endParaRPr lang="en-US" sz="1350" dirty="0" spc="0"/>
-          </a:p>
-        </p:txBody>
-      </p:sp>
-      <p:sp>
-        <p:nvSpPr>
-          <p:cNvPr id="21" name="investment-note"/>
-          <p:cNvSpPr txBox="1"/>
-          <p:nvPr/>
-        </p:nvSpPr>
-        <p:spPr>
-          <a:xfrm>
-            <a:off x="3937000" y="3708400"/>
-            <a:ext cx="3079750" cy="228600"/>
-          </a:xfrm>
-          <a:prstGeom prst="rect">
-            <a:avLst/>
-          </a:prstGeom>
-          <a:noFill/>
-          <a:ln/>
-        </p:spPr>
-        <p:txBody>
-          <a:bodyPr wrap="square" lIns="12700" tIns="12700" rIns="12700" bIns="12700" rtlCol="0" anchor="t">
-            <a:noAutofit/>
-          </a:bodyPr>
-          <a:lstStyle/>
-          <a:p>
-            <a:pPr algn="l" indent="0" marL="0">
-              <a:lnSpc>
-                <a:spcPct val="100000"/>
-              </a:lnSpc>
-              <a:buNone/>
-              <a:defRPr spc="0"/>
-            </a:pPr>
-            <a:r>
-              <a:rPr lang="en-US" sz="1050" dirty="0" spc="0">
-                <a:solidFill>
-                  <a:srgbClr val="000000"/>
-                </a:solidFill>
-                <a:latin typeface="Arial" pitchFamily="34" charset="0"/>
-                <a:ea typeface="Arial" pitchFamily="34" charset="-122"/>
-                <a:cs typeface="Arial" pitchFamily="34" charset="-120"/>
-              </a:rPr>
-              <a:t>Remaining implementation after the pilot $60k.</a:t>
-            </a:r>
-            <a:endParaRPr lang="en-US" sz="1050" dirty="0" spc="0"/>
-          </a:p>
-        </p:txBody>
-      </p:sp>
-      <p:sp>
-        <p:nvSpPr>
-          <p:cNvPr id="22" name="sensitivity-heading"/>
+          <p:cNvPr id="21" name="sensitivity-heading"/>
           <p:cNvSpPr txBox="1"/>
           <p:nvPr/>
         </p:nvSpPr>
@@ -4679,7 +4718,7 @@
               <a:defRPr spc="0"/>
             </a:pPr>
             <a:r>
-              <a:rPr lang="en-US" sz="1350" b="1" dirty="0" spc="0">
+              <a:rPr lang="en-US" sz="1400" b="1" dirty="0" spc="0">
                 <a:solidFill>
                   <a:srgbClr val="000000"/>
                 </a:solidFill>
@@ -4689,13 +4728,13 @@
               </a:rPr>
               <a:t>FIRST-YEAR SENSITIVITY · 50% RAMP</a:t>
             </a:r>
-            <a:endParaRPr lang="en-US" sz="1350" dirty="0" spc="0"/>
+            <a:endParaRPr lang="en-US" sz="1400" dirty="0" spc="0"/>
           </a:p>
         </p:txBody>
       </p:sp>
       <p:sp>
         <p:nvSpPr>
-          <p:cNvPr id="23" name="criteria-heading"/>
+          <p:cNvPr id="22" name="criteria-heading"/>
           <p:cNvSpPr txBox="1"/>
           <p:nvPr/>
         </p:nvSpPr>
@@ -4724,7 +4763,7 @@
               <a:defRPr spc="0"/>
             </a:pPr>
             <a:r>
-              <a:rPr lang="en-US" sz="1350" b="1" dirty="0" spc="0">
+              <a:rPr lang="en-US" sz="1400" b="1" dirty="0" spc="0">
                 <a:solidFill>
                   <a:srgbClr val="000000"/>
                 </a:solidFill>
@@ -4734,13 +4773,13 @@
               </a:rPr>
               <a:t>DECISION CRITERIA</a:t>
             </a:r>
-            <a:endParaRPr lang="en-US" sz="1350" dirty="0" spc="0"/>
+            <a:endParaRPr lang="en-US" sz="1400" dirty="0" spc="0"/>
           </a:p>
         </p:txBody>
       </p:sp>
       <p:sp>
         <p:nvSpPr>
-          <p:cNvPr id="24" name="criterion-label-go"/>
+          <p:cNvPr id="23" name="criterion-label-go"/>
           <p:cNvSpPr txBox="1"/>
           <p:nvPr/>
         </p:nvSpPr>
@@ -4769,7 +4808,7 @@
               <a:defRPr spc="0"/>
             </a:pPr>
             <a:r>
-              <a:rPr lang="en-US" sz="1350" b="1" dirty="0" spc="0">
+              <a:rPr lang="en-US" sz="1400" b="1" dirty="0" spc="0">
                 <a:solidFill>
                   <a:srgbClr val="FD5108"/>
                 </a:solidFill>
@@ -4779,13 +4818,13 @@
               </a:rPr>
               <a:t>GO</a:t>
             </a:r>
-            <a:endParaRPr lang="en-US" sz="1350" dirty="0" spc="0"/>
+            <a:endParaRPr lang="en-US" sz="1400" dirty="0" spc="0"/>
           </a:p>
         </p:txBody>
       </p:sp>
       <p:sp>
         <p:nvSpPr>
-          <p:cNvPr id="25" name="criterion-body-go"/>
+          <p:cNvPr id="24" name="criterion-body-go"/>
           <p:cNvSpPr txBox="1"/>
           <p:nvPr/>
         </p:nvSpPr>
@@ -4814,7 +4853,7 @@
               <a:defRPr spc="0"/>
             </a:pPr>
             <a:r>
-              <a:rPr lang="en-US" sz="1100" dirty="0" spc="0">
+              <a:rPr lang="en-US" sz="1200" dirty="0" spc="0">
                 <a:solidFill>
                   <a:srgbClr val="000000"/>
                 </a:solidFill>
@@ -4824,7 +4863,7 @@
               </a:rPr>
               <a:t>All four gates hold.</a:t>
             </a:r>
-            <a:endParaRPr lang="en-US" sz="1100" dirty="0" spc="0"/>
+            <a:endParaRPr lang="en-US" sz="1200" dirty="0" spc="0"/>
           </a:p>
           <a:p>
             <a:pPr algn="l" indent="0" marL="0">
@@ -4835,7 +4874,7 @@
               <a:defRPr spc="0"/>
             </a:pPr>
             <a:r>
-              <a:rPr lang="en-US" sz="1100" dirty="0" spc="0">
+              <a:rPr lang="en-US" sz="1200" dirty="0" spc="0">
                 <a:solidFill>
                   <a:srgbClr val="000000"/>
                 </a:solidFill>
@@ -4845,13 +4884,13 @@
               </a:rPr>
               <a:t>Practice lead owns rollout.</a:t>
             </a:r>
-            <a:endParaRPr lang="en-US" sz="1100" dirty="0" spc="0"/>
+            <a:endParaRPr lang="en-US" sz="1200" dirty="0" spc="0"/>
           </a:p>
         </p:txBody>
       </p:sp>
       <p:sp>
         <p:nvSpPr>
-          <p:cNvPr id="26" name="criterion-label-hold"/>
+          <p:cNvPr id="25" name="criterion-label-hold"/>
           <p:cNvSpPr txBox="1"/>
           <p:nvPr/>
         </p:nvSpPr>
@@ -4880,7 +4919,7 @@
               <a:defRPr spc="0"/>
             </a:pPr>
             <a:r>
-              <a:rPr lang="en-US" sz="1350" b="1" dirty="0" spc="0">
+              <a:rPr lang="en-US" sz="1400" b="1" dirty="0" spc="0">
                 <a:solidFill>
                   <a:srgbClr val="FD5108"/>
                 </a:solidFill>
@@ -4890,13 +4929,13 @@
               </a:rPr>
               <a:t>HOLD</a:t>
             </a:r>
-            <a:endParaRPr lang="en-US" sz="1350" dirty="0" spc="0"/>
+            <a:endParaRPr lang="en-US" sz="1400" dirty="0" spc="0"/>
           </a:p>
         </p:txBody>
       </p:sp>
       <p:sp>
         <p:nvSpPr>
-          <p:cNvPr id="27" name="criterion-body-hold"/>
+          <p:cNvPr id="26" name="criterion-body-hold"/>
           <p:cNvSpPr txBox="1"/>
           <p:nvPr/>
         </p:nvSpPr>
@@ -4925,7 +4964,7 @@
               <a:defRPr spc="0"/>
             </a:pPr>
             <a:r>
-              <a:rPr lang="en-US" sz="1100" dirty="0" spc="0">
+              <a:rPr lang="en-US" sz="1200" dirty="0" spc="0">
                 <a:solidFill>
                   <a:srgbClr val="000000"/>
                 </a:solidFill>
@@ -4935,7 +4974,7 @@
               </a:rPr>
               <a:t>Evidence or usage is weak.</a:t>
             </a:r>
-            <a:endParaRPr lang="en-US" sz="1100" dirty="0" spc="0"/>
+            <a:endParaRPr lang="en-US" sz="1200" dirty="0" spc="0"/>
           </a:p>
           <a:p>
             <a:pPr algn="l" indent="0" marL="0">
@@ -4946,7 +4985,7 @@
               <a:defRPr spc="0"/>
             </a:pPr>
             <a:r>
-              <a:rPr lang="en-US" sz="1100" dirty="0" spc="0">
+              <a:rPr lang="en-US" sz="1200" dirty="0" spc="0">
                 <a:solidFill>
                   <a:srgbClr val="000000"/>
                 </a:solidFill>
@@ -4956,13 +4995,13 @@
               </a:rPr>
               <a:t>Extend within an agreed cap.</a:t>
             </a:r>
-            <a:endParaRPr lang="en-US" sz="1100" dirty="0" spc="0"/>
+            <a:endParaRPr lang="en-US" sz="1200" dirty="0" spc="0"/>
           </a:p>
         </p:txBody>
       </p:sp>
       <p:sp>
         <p:nvSpPr>
-          <p:cNvPr id="28" name="criterion-label-stop"/>
+          <p:cNvPr id="27" name="criterion-label-stop"/>
           <p:cNvSpPr txBox="1"/>
           <p:nvPr/>
         </p:nvSpPr>
@@ -4991,7 +5030,7 @@
               <a:defRPr spc="0"/>
             </a:pPr>
             <a:r>
-              <a:rPr lang="en-US" sz="1350" b="1" dirty="0" spc="0">
+              <a:rPr lang="en-US" sz="1400" b="1" dirty="0" spc="0">
                 <a:solidFill>
                   <a:srgbClr val="FD5108"/>
                 </a:solidFill>
@@ -5001,13 +5040,13 @@
               </a:rPr>
               <a:t>STOP</a:t>
             </a:r>
-            <a:endParaRPr lang="en-US" sz="1350" dirty="0" spc="0"/>
+            <a:endParaRPr lang="en-US" sz="1400" dirty="0" spc="0"/>
           </a:p>
         </p:txBody>
       </p:sp>
       <p:sp>
         <p:nvSpPr>
-          <p:cNvPr id="29" name="criterion-body-stop"/>
+          <p:cNvPr id="28" name="criterion-body-stop"/>
           <p:cNvSpPr txBox="1"/>
           <p:nvPr/>
         </p:nvSpPr>
@@ -5036,7 +5075,7 @@
               <a:defRPr spc="0"/>
             </a:pPr>
             <a:r>
-              <a:rPr lang="en-US" sz="1100" dirty="0" spc="0">
+              <a:rPr lang="en-US" sz="1200" dirty="0" spc="0">
                 <a:solidFill>
                   <a:srgbClr val="000000"/>
                 </a:solidFill>
@@ -5046,7 +5085,7 @@
               </a:rPr>
               <a:t>A critical data control fails.</a:t>
             </a:r>
-            <a:endParaRPr lang="en-US" sz="1100" dirty="0" spc="0"/>
+            <a:endParaRPr lang="en-US" sz="1200" dirty="0" spc="0"/>
           </a:p>
           <a:p>
             <a:pPr algn="l" indent="0" marL="0">
@@ -5057,7 +5096,7 @@
               <a:defRPr spc="0"/>
             </a:pPr>
             <a:r>
-              <a:rPr lang="en-US" sz="1100" dirty="0" spc="0">
+              <a:rPr lang="en-US" sz="1200" dirty="0" spc="0">
                 <a:solidFill>
                   <a:srgbClr val="000000"/>
                 </a:solidFill>
@@ -5067,13 +5106,13 @@
               </a:rPr>
               <a:t>Suspend use and close the issue.</a:t>
             </a:r>
-            <a:endParaRPr lang="en-US" sz="1100" dirty="0" spc="0"/>
+            <a:endParaRPr lang="en-US" sz="1200" dirty="0" spc="0"/>
           </a:p>
         </p:txBody>
       </p:sp>
       <p:sp>
         <p:nvSpPr>
-          <p:cNvPr id="30" name="decision-label"/>
+          <p:cNvPr id="29" name="decision-label"/>
           <p:cNvSpPr txBox="1"/>
           <p:nvPr/>
         </p:nvSpPr>
@@ -5118,7 +5157,7 @@
       </p:sp>
       <p:sp>
         <p:nvSpPr>
-          <p:cNvPr id="31" name="decision-message"/>
+          <p:cNvPr id="30" name="decision-message"/>
           <p:cNvSpPr txBox="1"/>
           <p:nvPr/>
         </p:nvSpPr>
@@ -5161,9 +5200,210 @@
           </a:p>
         </p:txBody>
       </p:sp>
+      <p:sp>
+        <p:nvSpPr>
+          <p:cNvPr id="31" name="factor-engagements"/>
+          <p:cNvSpPr txBox="1"/>
+          <p:nvPr/>
+        </p:nvSpPr>
+        <p:spPr>
+          <a:xfrm>
+            <a:off x="406400" y="2787650"/>
+            <a:ext cx="762000" cy="431800"/>
+          </a:xfrm>
+          <a:prstGeom prst="rect">
+            <a:avLst/>
+          </a:prstGeom>
+          <a:noFill/>
+          <a:ln/>
+        </p:spPr>
+        <p:txBody>
+          <a:bodyPr wrap="square" lIns="12700" tIns="12700" rIns="12700" bIns="12700" rtlCol="0" anchor="t">
+            <a:noAutofit/>
+          </a:bodyPr>
+          <a:lstStyle/>
+          <a:p>
+            <a:pPr algn="ctr" indent="0" marL="0">
+              <a:lnSpc>
+                <a:spcPct val="100000"/>
+              </a:lnSpc>
+              <a:buNone/>
+              <a:defRPr spc="0"/>
+            </a:pPr>
+            <a:r>
+              <a:rPr lang="en-US" sz="900" dirty="0" spc="0">
+                <a:solidFill>
+                  <a:srgbClr val="000000"/>
+                </a:solidFill>
+                <a:latin typeface="Arial" pitchFamily="34" charset="0"/>
+                <a:ea typeface="Arial" pitchFamily="34" charset="-122"/>
+                <a:cs typeface="Arial" pitchFamily="34" charset="-120"/>
+              </a:rPr>
+              <a:t>Engagements</a:t>
+            </a:r>
+            <a:endParaRPr lang="en-US" sz="900" dirty="0" spc="0"/>
+          </a:p>
+        </p:txBody>
+      </p:sp>
+      <p:sp>
+        <p:nvSpPr>
+          <p:cNvPr id="32" name="factor-research"/>
+          <p:cNvSpPr txBox="1"/>
+          <p:nvPr/>
+        </p:nvSpPr>
+        <p:spPr>
+          <a:xfrm>
+            <a:off x="1282700" y="2787650"/>
+            <a:ext cx="723900" cy="431800"/>
+          </a:xfrm>
+          <a:prstGeom prst="rect">
+            <a:avLst/>
+          </a:prstGeom>
+          <a:noFill/>
+          <a:ln/>
+        </p:spPr>
+        <p:txBody>
+          <a:bodyPr wrap="square" lIns="12700" tIns="12700" rIns="12700" bIns="12700" rtlCol="0" anchor="t">
+            <a:noAutofit/>
+          </a:bodyPr>
+          <a:lstStyle/>
+          <a:p>
+            <a:pPr algn="ctr" indent="0" marL="0">
+              <a:lnSpc>
+                <a:spcPct val="100000"/>
+              </a:lnSpc>
+              <a:buNone/>
+              <a:defRPr spc="0"/>
+            </a:pPr>
+            <a:r>
+              <a:rPr lang="en-US" sz="900" dirty="0" spc="0">
+                <a:solidFill>
+                  <a:srgbClr val="000000"/>
+                </a:solidFill>
+                <a:latin typeface="Arial" pitchFamily="34" charset="0"/>
+                <a:ea typeface="Arial" pitchFamily="34" charset="-122"/>
+                <a:cs typeface="Arial" pitchFamily="34" charset="-120"/>
+              </a:rPr>
+              <a:t>Research</a:t>
+            </a:r>
+            <a:endParaRPr lang="en-US" sz="900" dirty="0" spc="0"/>
+          </a:p>
+          <a:p>
+            <a:pPr algn="ctr" indent="0" marL="0">
+              <a:lnSpc>
+                <a:spcPct val="100000"/>
+              </a:lnSpc>
+              <a:buNone/>
+              <a:defRPr spc="0"/>
+            </a:pPr>
+            <a:r>
+              <a:rPr lang="en-US" sz="900" dirty="0" spc="0">
+                <a:solidFill>
+                  <a:srgbClr val="000000"/>
+                </a:solidFill>
+                <a:latin typeface="Arial" pitchFamily="34" charset="0"/>
+                <a:ea typeface="Arial" pitchFamily="34" charset="-122"/>
+                <a:cs typeface="Arial" pitchFamily="34" charset="-120"/>
+              </a:rPr>
+              <a:t>time</a:t>
+            </a:r>
+            <a:endParaRPr lang="en-US" sz="900" dirty="0" spc="0"/>
+          </a:p>
+        </p:txBody>
+      </p:sp>
+      <p:sp>
+        <p:nvSpPr>
+          <p:cNvPr id="33" name="factor-adoption"/>
+          <p:cNvSpPr txBox="1"/>
+          <p:nvPr/>
+        </p:nvSpPr>
+        <p:spPr>
+          <a:xfrm>
+            <a:off x="2139950" y="2787650"/>
+            <a:ext cx="698500" cy="431800"/>
+          </a:xfrm>
+          <a:prstGeom prst="rect">
+            <a:avLst/>
+          </a:prstGeom>
+          <a:noFill/>
+          <a:ln/>
+        </p:spPr>
+        <p:txBody>
+          <a:bodyPr wrap="square" lIns="12700" tIns="12700" rIns="12700" bIns="12700" rtlCol="0" anchor="t">
+            <a:noAutofit/>
+          </a:bodyPr>
+          <a:lstStyle/>
+          <a:p>
+            <a:pPr algn="ctr" indent="0" marL="0">
+              <a:lnSpc>
+                <a:spcPct val="100000"/>
+              </a:lnSpc>
+              <a:buNone/>
+              <a:defRPr spc="0"/>
+            </a:pPr>
+            <a:r>
+              <a:rPr lang="en-US" sz="900" dirty="0" spc="0">
+                <a:solidFill>
+                  <a:srgbClr val="000000"/>
+                </a:solidFill>
+                <a:latin typeface="Arial" pitchFamily="34" charset="0"/>
+                <a:ea typeface="Arial" pitchFamily="34" charset="-122"/>
+                <a:cs typeface="Arial" pitchFamily="34" charset="-120"/>
+              </a:rPr>
+              <a:t>Adoption</a:t>
+            </a:r>
+            <a:endParaRPr lang="en-US" sz="900" dirty="0" spc="0"/>
+          </a:p>
+        </p:txBody>
+      </p:sp>
+      <p:sp>
+        <p:nvSpPr>
+          <p:cNvPr id="34" name="factor-saved"/>
+          <p:cNvSpPr txBox="1"/>
+          <p:nvPr/>
+        </p:nvSpPr>
+        <p:spPr>
+          <a:xfrm>
+            <a:off x="2933700" y="2787650"/>
+            <a:ext cx="730250" cy="431800"/>
+          </a:xfrm>
+          <a:prstGeom prst="rect">
+            <a:avLst/>
+          </a:prstGeom>
+          <a:noFill/>
+          <a:ln/>
+        </p:spPr>
+        <p:txBody>
+          <a:bodyPr wrap="square" lIns="12700" tIns="12700" rIns="12700" bIns="12700" rtlCol="0" anchor="t">
+            <a:noAutofit/>
+          </a:bodyPr>
+          <a:lstStyle/>
+          <a:p>
+            <a:pPr algn="ctr" indent="0" marL="0">
+              <a:lnSpc>
+                <a:spcPct val="100000"/>
+              </a:lnSpc>
+              <a:buNone/>
+              <a:defRPr spc="0"/>
+            </a:pPr>
+            <a:r>
+              <a:rPr lang="en-US" sz="900" dirty="0" spc="0">
+                <a:solidFill>
+                  <a:srgbClr val="000000"/>
+                </a:solidFill>
+                <a:latin typeface="Arial" pitchFamily="34" charset="0"/>
+                <a:ea typeface="Arial" pitchFamily="34" charset="-122"/>
+                <a:cs typeface="Arial" pitchFamily="34" charset="-120"/>
+              </a:rPr>
+              <a:t>Time saved</a:t>
+            </a:r>
+            <a:endParaRPr lang="en-US" sz="900" dirty="0" spc="0"/>
+          </a:p>
+        </p:txBody>
+      </p:sp>
       <p:pic>
         <p:nvPicPr>
-          <p:cNvPr id="32" name="criterion-icon-go" descr="remix-play-circle-line">    </p:cNvPr>
+          <p:cNvPr id="35" name="criterion-icon-go" descr="remix-play-circle-line">    </p:cNvPr>
           <p:cNvPicPr>
             <a:picLocks noChangeAspect="1"/>
           </p:cNvPicPr>
@@ -5183,8 +5423,8 @@
         </p:blipFill>
         <p:spPr>
           <a:xfrm>
-            <a:off x="508000" y="4591050"/>
-            <a:ext cx="546100" cy="546100"/>
+            <a:off x="514350" y="4540250"/>
+            <a:ext cx="749300" cy="749300"/>
           </a:xfrm>
           <a:prstGeom prst="rect">
             <a:avLst/>
@@ -5193,7 +5433,7 @@
       </p:pic>
       <p:pic>
         <p:nvPicPr>
-          <p:cNvPr id="33" name="criterion-icon-hold" descr="remix-pause-circle-line">    </p:cNvPr>
+          <p:cNvPr id="36" name="criterion-icon-hold" descr="remix-pause-circle-line">    </p:cNvPr>
           <p:cNvPicPr>
             <a:picLocks noChangeAspect="1"/>
           </p:cNvPicPr>
@@ -5213,8 +5453,8 @@
         </p:blipFill>
         <p:spPr>
           <a:xfrm>
-            <a:off x="4375150" y="4591050"/>
-            <a:ext cx="546100" cy="546100"/>
+            <a:off x="4381500" y="4540250"/>
+            <a:ext cx="749300" cy="749300"/>
           </a:xfrm>
           <a:prstGeom prst="rect">
             <a:avLst/>
@@ -5223,7 +5463,7 @@
       </p:pic>
       <p:pic>
         <p:nvPicPr>
-          <p:cNvPr id="34" name="criterion-icon-stop" descr="remix-stop-circle-line">    </p:cNvPr>
+          <p:cNvPr id="37" name="criterion-icon-stop" descr="remix-stop-circle-line">    </p:cNvPr>
           <p:cNvPicPr>
             <a:picLocks noChangeAspect="1"/>
           </p:cNvPicPr>
@@ -5243,8 +5483,8 @@
         </p:blipFill>
         <p:spPr>
           <a:xfrm>
-            <a:off x="8242300" y="4591050"/>
-            <a:ext cx="546100" cy="546100"/>
+            <a:off x="8248650" y="4540250"/>
+            <a:ext cx="749300" cy="749300"/>
           </a:xfrm>
           <a:prstGeom prst="rect">
             <a:avLst/>
@@ -5253,7 +5493,7 @@
       </p:pic>
       <p:sp>
         <p:nvSpPr>
-          <p:cNvPr id="35" name="Slide Number Placeholder 0"/>
+          <p:cNvPr id="38" name="Slide Number Placeholder 0"/>
           <p:cNvSpPr>
             <a:spLocks noGrp="1"/>
           </p:cNvSpPr>
